--- a/presentation/Fleet-Temperature-Monitoring.pptx
+++ b/presentation/Fleet-Temperature-Monitoring.pptx
@@ -13,6 +13,7 @@
     <p:sldId id="261" r:id="rId13"/>
     <p:sldId id="262" r:id="rId14"/>
     <p:sldId id="263" r:id="rId15"/>
+    <p:sldId id="264" r:id="rId16"/>
   </p:sldIdLst>
   <p:sldSz cx="12191695" cy="6858000" type="screen4x3"/>
   <p:notesSz cx="6858000" cy="9144000"/>
@@ -843,25 +844,25 @@
           <a:lstStyle/>
           <a:p>
             <a:r>
-              <a:t>REPLACE THESE NUMBERS with Plymouth's real site count before you present. The maths only gets better — their cost is per-site, mine isn't.</a:t>
+              <a:t>This is the slide that does the work, because none of it is my estimate — the left column is their own quote.</a:t>
             </a:r>
           </a:p>
           <a:p/>
           <a:p>
             <a:r>
-              <a:t>Say the big number once, then stop talking. Let it sit.</a:t>
+              <a:t>Two lines to point at:</a:t>
             </a:r>
           </a:p>
           <a:p/>
           <a:p>
             <a:r>
-              <a:t>If pushed on the $12 hosting: it's a small cloud server running the whole stack. Storage is nothing — twenty sensors generate about 350MB a year.</a:t>
+              <a:t>GATEWAYS. Their sensors talk a proprietary protocol and need four gateways to reach the network. Mine have WiFi built in. That's $2,396 that simply doesn't exist on my side.</a:t>
             </a:r>
           </a:p>
           <a:p/>
           <a:p>
             <a:r>
-              <a:t>The $350 calibration reference is a single NIST-traceable thermometer that calibrates the entire fleet. That's the answer to 'but theirs come pre-calibrated'.</a:t>
+              <a:t>NIST, 24 MONTHS. It sits under 'one time items' but it expires. That's $1,875 again in two years, and again in four. My reference thermometer is bought once.</a:t>
             </a:r>
           </a:p>
         </p:txBody>
@@ -931,13 +932,19 @@
           <a:lstStyle/>
           <a:p>
             <a:r>
-              <a:t>Facilities teams worry you're going to drill into a freezer wall. Say early that nothing gets drilled — flat gasket cables are standard practice.</a:t>
+              <a:t>Say the number once. Then stop talking and let them do the arithmetic themselves.</a:t>
             </a:r>
           </a:p>
           <a:p/>
           <a:p>
             <a:r>
-              <a:t>The battery box pre-empts the obvious question. Mains isn't a compromise here, it's the right answer: everything we're monitoring is a fixed installation with power already at it.</a:t>
+              <a:t>The assumptions are deliberately conservative: I held their subscription flat rather than assuming increases, and I only counted two NIST recertifications.</a:t>
+            </a:r>
+          </a:p>
+          <a:p/>
+          <a:p>
+            <a:r>
+              <a:t>The last line is the real point. This quote is for a NEW location — it hasn't been signed yet. That's the decision on the table, and every location after it carries the same gap again.</a:t>
             </a:r>
           </a:p>
         </p:txBody>
@@ -1007,19 +1014,13 @@
           <a:lstStyle/>
           <a:p>
             <a:r>
-              <a:t>This slide is why they'll believe the rest of the deck.</a:t>
+              <a:t>Facilities teams worry you're going to drill into a freezer wall. Say early that nothing gets drilled — flat gasket cables are standard practice.</a:t>
             </a:r>
           </a:p>
           <a:p/>
           <a:p>
             <a:r>
-              <a:t>A pitch with no acknowledged weaknesses reads as a demo. Naming the sensor accuracy problem yourself — before anyone who knows sensors asks — is the single most credible thing in the presentation.</a:t>
-            </a:r>
-          </a:p>
-          <a:p/>
-          <a:p>
-            <a:r>
-              <a:t>The calibration line is also your rebuttal on price. Say it out loud: their $125 per sensor buys traceability. I buy it once, for $350, for the whole fleet.</a:t>
+              <a:t>The battery box pre-empts the obvious question. Mains isn't a compromise here, it's the right answer: everything we're monitoring is a fixed installation with power already at it.</a:t>
             </a:r>
           </a:p>
         </p:txBody>
@@ -1045,6 +1046,88 @@
 </file>
 
 <file path=ppt/notesSlides/notesSlide8.xml><?xml version="1.0" encoding="utf-8"?>
+<p:notes xmlns:a="http://schemas.openxmlformats.org/drawingml/2006/main" xmlns:p="http://schemas.openxmlformats.org/presentationml/2006/main" xmlns:r="http://schemas.openxmlformats.org/officeDocument/2006/relationships">
+  <p:cSld>
+    <p:spTree>
+      <p:nvGrpSpPr>
+        <p:cNvPr id="1" name=""/>
+        <p:cNvGrpSpPr/>
+        <p:nvPr/>
+      </p:nvGrpSpPr>
+      <p:grpSpPr>
+        <a:xfrm>
+          <a:off x="0" y="0"/>
+          <a:ext cx="0" cy="0"/>
+          <a:chOff x="0" y="0"/>
+          <a:chExt cx="0" cy="0"/>
+        </a:xfrm>
+      </p:grpSpPr>
+      <p:sp>
+        <p:nvSpPr>
+          <p:cNvPr id="2" name="Slide Image Placeholder 1"/>
+          <p:cNvSpPr>
+            <a:spLocks noGrp="1"/>
+          </p:cNvSpPr>
+          <p:nvPr>
+            <p:ph type="sldImg" idx="2"/>
+          </p:nvPr>
+        </p:nvSpPr>
+        <p:spPr/>
+      </p:sp>
+      <p:sp>
+        <p:nvSpPr>
+          <p:cNvPr id="3" name="Notes Placeholder 2"/>
+          <p:cNvSpPr>
+            <a:spLocks noGrp="1"/>
+          </p:cNvSpPr>
+          <p:nvPr>
+            <p:ph type="body" idx="3" sz="quarter"/>
+          </p:nvPr>
+        </p:nvSpPr>
+        <p:spPr/>
+        <p:txBody>
+          <a:bodyPr/>
+          <a:lstStyle/>
+          <a:p>
+            <a:r>
+              <a:t>This slide is why they'll believe the rest of the deck.</a:t>
+            </a:r>
+          </a:p>
+          <a:p/>
+          <a:p>
+            <a:r>
+              <a:t>A pitch with no acknowledged weaknesses reads as a demo. Naming the sensor accuracy problem yourself — before anyone who knows sensors asks — is the single most credible thing in the presentation.</a:t>
+            </a:r>
+          </a:p>
+          <a:p/>
+          <a:p>
+            <a:r>
+              <a:t>The calibration line is also your rebuttal on price. Say it out loud: their $125 per sensor buys traceability. I buy it once, for $350, for the whole fleet.</a:t>
+            </a:r>
+          </a:p>
+        </p:txBody>
+      </p:sp>
+      <p:sp>
+        <p:nvSpPr>
+          <p:cNvPr id="4" name="Slide Number Placeholder 3"/>
+          <p:cNvSpPr>
+            <a:spLocks noGrp="1"/>
+          </p:cNvSpPr>
+          <p:nvPr>
+            <p:ph type="sldNum" idx="5" sz="quarter"/>
+          </p:nvPr>
+        </p:nvSpPr>
+        <p:spPr/>
+      </p:sp>
+    </p:spTree>
+  </p:cSld>
+  <p:clrMapOvr>
+    <a:masterClrMapping/>
+  </p:clrMapOvr>
+</p:notes>
+</file>
+
+<file path=ppt/notesSlides/notesSlide9.xml><?xml version="1.0" encoding="utf-8"?>
 <p:notes xmlns:a="http://schemas.openxmlformats.org/drawingml/2006/main" xmlns:p="http://schemas.openxmlformats.org/presentationml/2006/main" xmlns:r="http://schemas.openxmlformats.org/officeDocument/2006/relationships">
   <p:cSld>
     <p:spTree>
@@ -4486,7 +4569,7 @@
                 </a:solidFill>
                 <a:latin typeface="Arial"/>
               </a:rPr>
-              <a:t>Same job as SmartSense. Roughly a tenth of the cost.</a:t>
+              <a:t>Quote #145514 puts the new Auburn location at $9,202.</a:t>
             </a:r>
           </a:p>
         </p:txBody>
@@ -4531,7 +4614,7 @@
                 </a:solidFill>
                 <a:latin typeface="Arial"/>
               </a:rPr>
-              <a:t>The unit on the table is live and reporting right now.</a:t>
+              <a:t>I can cover the same 15 points for $1,544 — and it is already running.</a:t>
             </a:r>
           </a:p>
         </p:txBody>
@@ -4620,7 +4703,7 @@
                 </a:solidFill>
                 <a:latin typeface="Arial"/>
               </a:rPr>
-              <a:t>Prototype demonstration  ·  Plymouth</a:t>
+              <a:t>Plymouth Poultry  ·  Auburn WA  ·  prototype demonstration</a:t>
             </a:r>
           </a:p>
         </p:txBody>
@@ -5207,7 +5290,7 @@
                 </a:solidFill>
                 <a:latin typeface="Arial"/>
               </a:rPr>
-              <a:t>hardware, case and all</a:t>
+              <a:t>against $370 on the quote</a:t>
             </a:r>
           </a:p>
         </p:txBody>
@@ -5297,7 +5380,7 @@
                 </a:solidFill>
                 <a:latin typeface="Arial"/>
               </a:rPr>
-              <a:t>per-site licences</a:t>
+              <a:t>gateways needed</a:t>
             </a:r>
           </a:p>
         </p:txBody>
@@ -5342,7 +5425,7 @@
                 </a:solidFill>
                 <a:latin typeface="Arial"/>
               </a:rPr>
-              <a:t>adding a site costs nothing</a:t>
+              <a:t>WiFi is built into the board</a:t>
             </a:r>
           </a:p>
         </p:txBody>
@@ -7725,7 +7808,7 @@
     <p:bg>
       <p:bgPr>
         <a:solidFill>
-          <a:srgbClr val="0F1B22"/>
+          <a:srgbClr val="FAFBFC"/>
         </a:solidFill>
         <a:effectLst/>
       </p:bgPr>
@@ -7839,7 +7922,7 @@
             <a:r>
               <a:rPr sz="1200" b="0">
                 <a:solidFill>
-                  <a:srgbClr val="9EAFB7"/>
+                  <a:srgbClr val="637782"/>
                 </a:solidFill>
                 <a:latin typeface="Arial"/>
               </a:rPr>
@@ -7884,11 +7967,11 @@
             <a:r>
               <a:rPr sz="3300" b="0">
                 <a:solidFill>
-                  <a:srgbClr val="FAFBFC"/>
+                  <a:srgbClr val="121E25"/>
                 </a:solidFill>
                 <a:latin typeface="Georgia"/>
               </a:rPr>
-              <a:t>Five years, four sites</a:t>
+              <a:t>Quote #145514, line by line</a:t>
             </a:r>
           </a:p>
         </p:txBody>
@@ -7901,8 +7984,8 @@
         </p:nvSpPr>
         <p:spPr>
           <a:xfrm>
-            <a:off x="822960" y="2240280"/>
-            <a:ext cx="3657600" cy="274320"/>
+            <a:off x="822960" y="2121408"/>
+            <a:ext cx="4754880" cy="274320"/>
           </a:xfrm>
           <a:prstGeom prst="rect">
             <a:avLst/>
@@ -7927,12 +8010,57 @@
               </a:spcAft>
             </a:pPr>
             <a:r>
-              <a:rPr sz="1150" b="1">
-                <a:solidFill>
-                  <a:srgbClr val="E8935C"/>
+              <a:rPr sz="1100" b="1">
+                <a:solidFill>
+                  <a:srgbClr val="637782"/>
                 </a:solidFill>
                 <a:latin typeface="Arial"/>
               </a:rPr>
+              <a:t>AUBURN WA — 15 MONITORING POINTS</a:t>
+            </a:r>
+          </a:p>
+        </p:txBody>
+      </p:sp>
+      <p:sp>
+        <p:nvSpPr>
+          <p:cNvPr id="6" name="TextBox 5"/>
+          <p:cNvSpPr txBox="1"/>
+          <p:nvPr/>
+        </p:nvSpPr>
+        <p:spPr>
+          <a:xfrm>
+            <a:off x="5943600" y="2121408"/>
+            <a:ext cx="2194560" cy="274320"/>
+          </a:xfrm>
+          <a:prstGeom prst="rect">
+            <a:avLst/>
+          </a:prstGeom>
+          <a:noFill/>
+        </p:spPr>
+        <p:txBody>
+          <a:bodyPr wrap="square" anchor="t" lIns="0" rIns="0" tIns="0" bIns="0">
+            <a:spAutoFit/>
+          </a:bodyPr>
+          <a:lstStyle/>
+          <a:p>
+            <a:pPr algn="l">
+              <a:lnSpc>
+                <a:spcPct val="100000"/>
+              </a:lnSpc>
+              <a:spcBef>
+                <a:spcPts val="0"/>
+              </a:spcBef>
+              <a:spcAft>
+                <a:spcPts val="0"/>
+              </a:spcAft>
+            </a:pPr>
+            <a:r>
+              <a:rPr sz="1100" b="1">
+                <a:solidFill>
+                  <a:srgbClr val="C4622D"/>
+                </a:solidFill>
+                <a:latin typeface="Arial"/>
+              </a:rPr>
               <a:t>SMARTSENSE</a:t>
             </a:r>
           </a:p>
@@ -7940,20 +8068,65 @@
       </p:sp>
       <p:sp>
         <p:nvSpPr>
-          <p:cNvPr id="6" name="Rectangle 5"/>
+          <p:cNvPr id="7" name="TextBox 6"/>
+          <p:cNvSpPr txBox="1"/>
+          <p:nvPr/>
+        </p:nvSpPr>
+        <p:spPr>
+          <a:xfrm>
+            <a:off x="8503920" y="2121408"/>
+            <a:ext cx="2194560" cy="274320"/>
+          </a:xfrm>
+          <a:prstGeom prst="rect">
+            <a:avLst/>
+          </a:prstGeom>
+          <a:noFill/>
+        </p:spPr>
+        <p:txBody>
+          <a:bodyPr wrap="square" anchor="t" lIns="0" rIns="0" tIns="0" bIns="0">
+            <a:spAutoFit/>
+          </a:bodyPr>
+          <a:lstStyle/>
+          <a:p>
+            <a:pPr algn="l">
+              <a:lnSpc>
+                <a:spcPct val="100000"/>
+              </a:lnSpc>
+              <a:spcBef>
+                <a:spcPts val="0"/>
+              </a:spcBef>
+              <a:spcAft>
+                <a:spcPts val="0"/>
+              </a:spcAft>
+            </a:pPr>
+            <a:r>
+              <a:rPr sz="1100" b="1">
+                <a:solidFill>
+                  <a:srgbClr val="2B8A9E"/>
+                </a:solidFill>
+                <a:latin typeface="Arial"/>
+              </a:rPr>
+              <a:t>MINE</a:t>
+            </a:r>
+          </a:p>
+        </p:txBody>
+      </p:sp>
+      <p:sp>
+        <p:nvSpPr>
+          <p:cNvPr id="8" name="Rectangle 7"/>
           <p:cNvSpPr/>
           <p:nvPr/>
         </p:nvSpPr>
         <p:spPr>
           <a:xfrm>
-            <a:off x="822960" y="2560320"/>
-            <a:ext cx="7680960" cy="658368"/>
+            <a:off x="822960" y="2395728"/>
+            <a:ext cx="10545775" cy="13716"/>
           </a:xfrm>
           <a:prstGeom prst="rect">
             <a:avLst/>
           </a:prstGeom>
           <a:solidFill>
-            <a:srgbClr val="C4622D"/>
+            <a:srgbClr val="DDE5E8"/>
           </a:solidFill>
           <a:ln>
             <a:noFill/>
@@ -7984,14 +8157,14 @@
       </p:sp>
       <p:sp>
         <p:nvSpPr>
-          <p:cNvPr id="7" name="TextBox 6"/>
-          <p:cNvSpPr txBox="1"/>
-          <p:nvPr/>
-        </p:nvSpPr>
-        <p:spPr>
-          <a:xfrm>
-            <a:off x="8778240" y="2606040"/>
-            <a:ext cx="2377440" cy="548640"/>
+          <p:cNvPr id="9" name="TextBox 8"/>
+          <p:cNvSpPr txBox="1"/>
+          <p:nvPr/>
+        </p:nvSpPr>
+        <p:spPr>
+          <a:xfrm>
+            <a:off x="822960" y="2606040"/>
+            <a:ext cx="3840480" cy="256032"/>
           </a:xfrm>
           <a:prstGeom prst="rect">
             <a:avLst/>
@@ -8016,27 +8189,117 @@
               </a:spcAft>
             </a:pPr>
             <a:r>
-              <a:rPr sz="3000" b="0">
-                <a:solidFill>
-                  <a:srgbClr val="FAFBFC"/>
+              <a:rPr sz="1350" b="1">
+                <a:solidFill>
+                  <a:srgbClr val="121E25"/>
+                </a:solidFill>
+                <a:latin typeface="Arial"/>
+              </a:rPr>
+              <a:t>Gateways</a:t>
+            </a:r>
+          </a:p>
+        </p:txBody>
+      </p:sp>
+      <p:sp>
+        <p:nvSpPr>
+          <p:cNvPr id="10" name="TextBox 9"/>
+          <p:cNvSpPr txBox="1"/>
+          <p:nvPr/>
+        </p:nvSpPr>
+        <p:spPr>
+          <a:xfrm>
+            <a:off x="822960" y="2843784"/>
+            <a:ext cx="4754880" cy="237744"/>
+          </a:xfrm>
+          <a:prstGeom prst="rect">
+            <a:avLst/>
+          </a:prstGeom>
+          <a:noFill/>
+        </p:spPr>
+        <p:txBody>
+          <a:bodyPr wrap="square" anchor="t" lIns="0" rIns="0" tIns="0" bIns="0">
+            <a:spAutoFit/>
+          </a:bodyPr>
+          <a:lstStyle/>
+          <a:p>
+            <a:pPr algn="l">
+              <a:lnSpc>
+                <a:spcPct val="100000"/>
+              </a:lnSpc>
+              <a:spcBef>
+                <a:spcPts val="0"/>
+              </a:spcBef>
+              <a:spcAft>
+                <a:spcPts val="0"/>
+              </a:spcAft>
+            </a:pPr>
+            <a:r>
+              <a:rPr sz="1100" b="0">
+                <a:solidFill>
+                  <a:srgbClr val="637782"/>
+                </a:solidFill>
+                <a:latin typeface="Arial"/>
+              </a:rPr>
+              <a:t>4 needed at $599</a:t>
+            </a:r>
+          </a:p>
+        </p:txBody>
+      </p:sp>
+      <p:sp>
+        <p:nvSpPr>
+          <p:cNvPr id="11" name="TextBox 10"/>
+          <p:cNvSpPr txBox="1"/>
+          <p:nvPr/>
+        </p:nvSpPr>
+        <p:spPr>
+          <a:xfrm>
+            <a:off x="5943600" y="2624328"/>
+            <a:ext cx="2103120" cy="274320"/>
+          </a:xfrm>
+          <a:prstGeom prst="rect">
+            <a:avLst/>
+          </a:prstGeom>
+          <a:noFill/>
+        </p:spPr>
+        <p:txBody>
+          <a:bodyPr wrap="square" anchor="t" lIns="0" rIns="0" tIns="0" bIns="0">
+            <a:spAutoFit/>
+          </a:bodyPr>
+          <a:lstStyle/>
+          <a:p>
+            <a:pPr algn="l">
+              <a:lnSpc>
+                <a:spcPct val="100000"/>
+              </a:lnSpc>
+              <a:spcBef>
+                <a:spcPts val="0"/>
+              </a:spcBef>
+              <a:spcAft>
+                <a:spcPts val="0"/>
+              </a:spcAft>
+            </a:pPr>
+            <a:r>
+              <a:rPr sz="1500" b="0">
+                <a:solidFill>
+                  <a:srgbClr val="C4622D"/>
                 </a:solidFill>
                 <a:latin typeface="Georgia"/>
               </a:rPr>
-              <a:t>$31,400</a:t>
-            </a:r>
-          </a:p>
-        </p:txBody>
-      </p:sp>
-      <p:sp>
-        <p:nvSpPr>
-          <p:cNvPr id="8" name="TextBox 7"/>
-          <p:cNvSpPr txBox="1"/>
-          <p:nvPr/>
-        </p:nvSpPr>
-        <p:spPr>
-          <a:xfrm>
-            <a:off x="822960" y="3310128"/>
-            <a:ext cx="7315200" cy="274320"/>
+              <a:t>$2,396</a:t>
+            </a:r>
+          </a:p>
+        </p:txBody>
+      </p:sp>
+      <p:sp>
+        <p:nvSpPr>
+          <p:cNvPr id="12" name="TextBox 11"/>
+          <p:cNvSpPr txBox="1"/>
+          <p:nvPr/>
+        </p:nvSpPr>
+        <p:spPr>
+          <a:xfrm>
+            <a:off x="8503920" y="2624328"/>
+            <a:ext cx="2103120" cy="274320"/>
           </a:xfrm>
           <a:prstGeom prst="rect">
             <a:avLst/>
@@ -8061,27 +8324,72 @@
               </a:spcAft>
             </a:pPr>
             <a:r>
-              <a:rPr sz="1200" b="0">
-                <a:solidFill>
-                  <a:srgbClr val="8EA2AB"/>
+              <a:rPr sz="1500" b="0">
+                <a:solidFill>
+                  <a:srgbClr val="2B8A9E"/>
+                </a:solidFill>
+                <a:latin typeface="Georgia"/>
+              </a:rPr>
+              <a:t>$0</a:t>
+            </a:r>
+          </a:p>
+        </p:txBody>
+      </p:sp>
+      <p:sp>
+        <p:nvSpPr>
+          <p:cNvPr id="13" name="TextBox 12"/>
+          <p:cNvSpPr txBox="1"/>
+          <p:nvPr/>
+        </p:nvSpPr>
+        <p:spPr>
+          <a:xfrm>
+            <a:off x="8503920" y="2862072"/>
+            <a:ext cx="2743200" cy="237744"/>
+          </a:xfrm>
+          <a:prstGeom prst="rect">
+            <a:avLst/>
+          </a:prstGeom>
+          <a:noFill/>
+        </p:spPr>
+        <p:txBody>
+          <a:bodyPr wrap="square" anchor="t" lIns="0" rIns="0" tIns="0" bIns="0">
+            <a:spAutoFit/>
+          </a:bodyPr>
+          <a:lstStyle/>
+          <a:p>
+            <a:pPr algn="l">
+              <a:lnSpc>
+                <a:spcPct val="100000"/>
+              </a:lnSpc>
+              <a:spcBef>
+                <a:spcPts val="0"/>
+              </a:spcBef>
+              <a:spcAft>
+                <a:spcPts val="0"/>
+              </a:spcAft>
+            </a:pPr>
+            <a:r>
+              <a:rPr sz="1050" b="0">
+                <a:solidFill>
+                  <a:srgbClr val="637782"/>
                 </a:solidFill>
                 <a:latin typeface="Arial"/>
               </a:rPr>
-              <a:t>$7,400 hardware   +   $24,000 in subscriptions</a:t>
-            </a:r>
-          </a:p>
-        </p:txBody>
-      </p:sp>
-      <p:sp>
-        <p:nvSpPr>
-          <p:cNvPr id="9" name="TextBox 8"/>
-          <p:cNvSpPr txBox="1"/>
-          <p:nvPr/>
-        </p:nvSpPr>
-        <p:spPr>
-          <a:xfrm>
-            <a:off x="822960" y="3977639"/>
-            <a:ext cx="3657600" cy="274320"/>
+              <a:t>WiFi is built in</a:t>
+            </a:r>
+          </a:p>
+        </p:txBody>
+      </p:sp>
+      <p:sp>
+        <p:nvSpPr>
+          <p:cNvPr id="14" name="TextBox 13"/>
+          <p:cNvSpPr txBox="1"/>
+          <p:nvPr/>
+        </p:nvSpPr>
+        <p:spPr>
+          <a:xfrm>
+            <a:off x="822960" y="3172968"/>
+            <a:ext cx="3840480" cy="256032"/>
           </a:xfrm>
           <a:prstGeom prst="rect">
             <a:avLst/>
@@ -8106,33 +8414,1068 @@
               </a:spcAft>
             </a:pPr>
             <a:r>
-              <a:rPr sz="1150" b="1">
-                <a:solidFill>
-                  <a:srgbClr val="7FC4D2"/>
+              <a:rPr sz="1350" b="1">
+                <a:solidFill>
+                  <a:srgbClr val="121E25"/>
                 </a:solidFill>
                 <a:latin typeface="Arial"/>
               </a:rPr>
-              <a:t>MINE</a:t>
-            </a:r>
-          </a:p>
-        </p:txBody>
-      </p:sp>
-      <p:sp>
-        <p:nvSpPr>
-          <p:cNvPr id="10" name="Rectangle 9"/>
+              <a:t>Sensor + display</a:t>
+            </a:r>
+          </a:p>
+        </p:txBody>
+      </p:sp>
+      <p:sp>
+        <p:nvSpPr>
+          <p:cNvPr id="15" name="TextBox 14"/>
+          <p:cNvSpPr txBox="1"/>
+          <p:nvPr/>
+        </p:nvSpPr>
+        <p:spPr>
+          <a:xfrm>
+            <a:off x="822960" y="3410712"/>
+            <a:ext cx="4754880" cy="237744"/>
+          </a:xfrm>
+          <a:prstGeom prst="rect">
+            <a:avLst/>
+          </a:prstGeom>
+          <a:noFill/>
+        </p:spPr>
+        <p:txBody>
+          <a:bodyPr wrap="square" anchor="t" lIns="0" rIns="0" tIns="0" bIns="0">
+            <a:spAutoFit/>
+          </a:bodyPr>
+          <a:lstStyle/>
+          <a:p>
+            <a:pPr algn="l">
+              <a:lnSpc>
+                <a:spcPct val="100000"/>
+              </a:lnSpc>
+              <a:spcBef>
+                <a:spcPts val="0"/>
+              </a:spcBef>
+              <a:spcAft>
+                <a:spcPts val="0"/>
+              </a:spcAft>
+            </a:pPr>
+            <a:r>
+              <a:rPr sz="1100" b="0">
+                <a:solidFill>
+                  <a:srgbClr val="637782"/>
+                </a:solidFill>
+                <a:latin typeface="Arial"/>
+              </a:rPr>
+              <a:t>10 at $245</a:t>
+            </a:r>
+          </a:p>
+        </p:txBody>
+      </p:sp>
+      <p:sp>
+        <p:nvSpPr>
+          <p:cNvPr id="16" name="TextBox 15"/>
+          <p:cNvSpPr txBox="1"/>
+          <p:nvPr/>
+        </p:nvSpPr>
+        <p:spPr>
+          <a:xfrm>
+            <a:off x="5943600" y="3191256"/>
+            <a:ext cx="2103120" cy="274320"/>
+          </a:xfrm>
+          <a:prstGeom prst="rect">
+            <a:avLst/>
+          </a:prstGeom>
+          <a:noFill/>
+        </p:spPr>
+        <p:txBody>
+          <a:bodyPr wrap="square" anchor="t" lIns="0" rIns="0" tIns="0" bIns="0">
+            <a:spAutoFit/>
+          </a:bodyPr>
+          <a:lstStyle/>
+          <a:p>
+            <a:pPr algn="l">
+              <a:lnSpc>
+                <a:spcPct val="100000"/>
+              </a:lnSpc>
+              <a:spcBef>
+                <a:spcPts val="0"/>
+              </a:spcBef>
+              <a:spcAft>
+                <a:spcPts val="0"/>
+              </a:spcAft>
+            </a:pPr>
+            <a:r>
+              <a:rPr sz="1500" b="0">
+                <a:solidFill>
+                  <a:srgbClr val="C4622D"/>
+                </a:solidFill>
+                <a:latin typeface="Georgia"/>
+              </a:rPr>
+              <a:t>$2,450</a:t>
+            </a:r>
+          </a:p>
+        </p:txBody>
+      </p:sp>
+      <p:sp>
+        <p:nvSpPr>
+          <p:cNvPr id="17" name="TextBox 16"/>
+          <p:cNvSpPr txBox="1"/>
+          <p:nvPr/>
+        </p:nvSpPr>
+        <p:spPr>
+          <a:xfrm>
+            <a:off x="8503920" y="3191256"/>
+            <a:ext cx="2103120" cy="274320"/>
+          </a:xfrm>
+          <a:prstGeom prst="rect">
+            <a:avLst/>
+          </a:prstGeom>
+          <a:noFill/>
+        </p:spPr>
+        <p:txBody>
+          <a:bodyPr wrap="square" anchor="t" lIns="0" rIns="0" tIns="0" bIns="0">
+            <a:spAutoFit/>
+          </a:bodyPr>
+          <a:lstStyle/>
+          <a:p>
+            <a:pPr algn="l">
+              <a:lnSpc>
+                <a:spcPct val="100000"/>
+              </a:lnSpc>
+              <a:spcBef>
+                <a:spcPts val="0"/>
+              </a:spcBef>
+              <a:spcAft>
+                <a:spcPts val="0"/>
+              </a:spcAft>
+            </a:pPr>
+            <a:r>
+              <a:rPr sz="1500" b="0">
+                <a:solidFill>
+                  <a:srgbClr val="2B8A9E"/>
+                </a:solidFill>
+                <a:latin typeface="Georgia"/>
+              </a:rPr>
+              <a:t>$1,050</a:t>
+            </a:r>
+          </a:p>
+        </p:txBody>
+      </p:sp>
+      <p:sp>
+        <p:nvSpPr>
+          <p:cNvPr id="18" name="TextBox 17"/>
+          <p:cNvSpPr txBox="1"/>
+          <p:nvPr/>
+        </p:nvSpPr>
+        <p:spPr>
+          <a:xfrm>
+            <a:off x="8503920" y="3429000"/>
+            <a:ext cx="2743200" cy="237744"/>
+          </a:xfrm>
+          <a:prstGeom prst="rect">
+            <a:avLst/>
+          </a:prstGeom>
+          <a:noFill/>
+        </p:spPr>
+        <p:txBody>
+          <a:bodyPr wrap="square" anchor="t" lIns="0" rIns="0" tIns="0" bIns="0">
+            <a:spAutoFit/>
+          </a:bodyPr>
+          <a:lstStyle/>
+          <a:p>
+            <a:pPr algn="l">
+              <a:lnSpc>
+                <a:spcPct val="100000"/>
+              </a:lnSpc>
+              <a:spcBef>
+                <a:spcPts val="0"/>
+              </a:spcBef>
+              <a:spcAft>
+                <a:spcPts val="0"/>
+              </a:spcAft>
+            </a:pPr>
+            <a:r>
+              <a:rPr sz="1050" b="0">
+                <a:solidFill>
+                  <a:srgbClr val="637782"/>
+                </a:solidFill>
+                <a:latin typeface="Arial"/>
+              </a:rPr>
+              <a:t>15 units at $70</a:t>
+            </a:r>
+          </a:p>
+        </p:txBody>
+      </p:sp>
+      <p:sp>
+        <p:nvSpPr>
+          <p:cNvPr id="19" name="TextBox 18"/>
+          <p:cNvSpPr txBox="1"/>
+          <p:nvPr/>
+        </p:nvSpPr>
+        <p:spPr>
+          <a:xfrm>
+            <a:off x="822960" y="3739896"/>
+            <a:ext cx="3840480" cy="256032"/>
+          </a:xfrm>
+          <a:prstGeom prst="rect">
+            <a:avLst/>
+          </a:prstGeom>
+          <a:noFill/>
+        </p:spPr>
+        <p:txBody>
+          <a:bodyPr wrap="square" anchor="t" lIns="0" rIns="0" tIns="0" bIns="0">
+            <a:spAutoFit/>
+          </a:bodyPr>
+          <a:lstStyle/>
+          <a:p>
+            <a:pPr algn="l">
+              <a:lnSpc>
+                <a:spcPct val="100000"/>
+              </a:lnSpc>
+              <a:spcBef>
+                <a:spcPts val="0"/>
+              </a:spcBef>
+              <a:spcAft>
+                <a:spcPts val="0"/>
+              </a:spcAft>
+            </a:pPr>
+            <a:r>
+              <a:rPr sz="1350" b="1">
+                <a:solidFill>
+                  <a:srgbClr val="121E25"/>
+                </a:solidFill>
+                <a:latin typeface="Arial"/>
+              </a:rPr>
+              <a:t>NIST certification</a:t>
+            </a:r>
+          </a:p>
+        </p:txBody>
+      </p:sp>
+      <p:sp>
+        <p:nvSpPr>
+          <p:cNvPr id="20" name="TextBox 19"/>
+          <p:cNvSpPr txBox="1"/>
+          <p:nvPr/>
+        </p:nvSpPr>
+        <p:spPr>
+          <a:xfrm>
+            <a:off x="822960" y="3977640"/>
+            <a:ext cx="4754880" cy="237744"/>
+          </a:xfrm>
+          <a:prstGeom prst="rect">
+            <a:avLst/>
+          </a:prstGeom>
+          <a:noFill/>
+        </p:spPr>
+        <p:txBody>
+          <a:bodyPr wrap="square" anchor="t" lIns="0" rIns="0" tIns="0" bIns="0">
+            <a:spAutoFit/>
+          </a:bodyPr>
+          <a:lstStyle/>
+          <a:p>
+            <a:pPr algn="l">
+              <a:lnSpc>
+                <a:spcPct val="100000"/>
+              </a:lnSpc>
+              <a:spcBef>
+                <a:spcPts val="0"/>
+              </a:spcBef>
+              <a:spcAft>
+                <a:spcPts val="0"/>
+              </a:spcAft>
+            </a:pPr>
+            <a:r>
+              <a:rPr sz="1100" b="0">
+                <a:solidFill>
+                  <a:srgbClr val="637782"/>
+                </a:solidFill>
+                <a:latin typeface="Arial"/>
+              </a:rPr>
+              <a:t>15 at $125, expires in 24 months</a:t>
+            </a:r>
+          </a:p>
+        </p:txBody>
+      </p:sp>
+      <p:sp>
+        <p:nvSpPr>
+          <p:cNvPr id="21" name="TextBox 20"/>
+          <p:cNvSpPr txBox="1"/>
+          <p:nvPr/>
+        </p:nvSpPr>
+        <p:spPr>
+          <a:xfrm>
+            <a:off x="5943600" y="3758184"/>
+            <a:ext cx="2103120" cy="274320"/>
+          </a:xfrm>
+          <a:prstGeom prst="rect">
+            <a:avLst/>
+          </a:prstGeom>
+          <a:noFill/>
+        </p:spPr>
+        <p:txBody>
+          <a:bodyPr wrap="square" anchor="t" lIns="0" rIns="0" tIns="0" bIns="0">
+            <a:spAutoFit/>
+          </a:bodyPr>
+          <a:lstStyle/>
+          <a:p>
+            <a:pPr algn="l">
+              <a:lnSpc>
+                <a:spcPct val="100000"/>
+              </a:lnSpc>
+              <a:spcBef>
+                <a:spcPts val="0"/>
+              </a:spcBef>
+              <a:spcAft>
+                <a:spcPts val="0"/>
+              </a:spcAft>
+            </a:pPr>
+            <a:r>
+              <a:rPr sz="1500" b="0">
+                <a:solidFill>
+                  <a:srgbClr val="C4622D"/>
+                </a:solidFill>
+                <a:latin typeface="Georgia"/>
+              </a:rPr>
+              <a:t>$1,875</a:t>
+            </a:r>
+          </a:p>
+        </p:txBody>
+      </p:sp>
+      <p:sp>
+        <p:nvSpPr>
+          <p:cNvPr id="22" name="TextBox 21"/>
+          <p:cNvSpPr txBox="1"/>
+          <p:nvPr/>
+        </p:nvSpPr>
+        <p:spPr>
+          <a:xfrm>
+            <a:off x="8503920" y="3758184"/>
+            <a:ext cx="2103120" cy="274320"/>
+          </a:xfrm>
+          <a:prstGeom prst="rect">
+            <a:avLst/>
+          </a:prstGeom>
+          <a:noFill/>
+        </p:spPr>
+        <p:txBody>
+          <a:bodyPr wrap="square" anchor="t" lIns="0" rIns="0" tIns="0" bIns="0">
+            <a:spAutoFit/>
+          </a:bodyPr>
+          <a:lstStyle/>
+          <a:p>
+            <a:pPr algn="l">
+              <a:lnSpc>
+                <a:spcPct val="100000"/>
+              </a:lnSpc>
+              <a:spcBef>
+                <a:spcPts val="0"/>
+              </a:spcBef>
+              <a:spcAft>
+                <a:spcPts val="0"/>
+              </a:spcAft>
+            </a:pPr>
+            <a:r>
+              <a:rPr sz="1500" b="0">
+                <a:solidFill>
+                  <a:srgbClr val="2B8A9E"/>
+                </a:solidFill>
+                <a:latin typeface="Georgia"/>
+              </a:rPr>
+              <a:t>$350</a:t>
+            </a:r>
+          </a:p>
+        </p:txBody>
+      </p:sp>
+      <p:sp>
+        <p:nvSpPr>
+          <p:cNvPr id="23" name="TextBox 22"/>
+          <p:cNvSpPr txBox="1"/>
+          <p:nvPr/>
+        </p:nvSpPr>
+        <p:spPr>
+          <a:xfrm>
+            <a:off x="8503920" y="3995928"/>
+            <a:ext cx="2743200" cy="237744"/>
+          </a:xfrm>
+          <a:prstGeom prst="rect">
+            <a:avLst/>
+          </a:prstGeom>
+          <a:noFill/>
+        </p:spPr>
+        <p:txBody>
+          <a:bodyPr wrap="square" anchor="t" lIns="0" rIns="0" tIns="0" bIns="0">
+            <a:spAutoFit/>
+          </a:bodyPr>
+          <a:lstStyle/>
+          <a:p>
+            <a:pPr algn="l">
+              <a:lnSpc>
+                <a:spcPct val="100000"/>
+              </a:lnSpc>
+              <a:spcBef>
+                <a:spcPts val="0"/>
+              </a:spcBef>
+              <a:spcAft>
+                <a:spcPts val="0"/>
+              </a:spcAft>
+            </a:pPr>
+            <a:r>
+              <a:rPr sz="1050" b="0">
+                <a:solidFill>
+                  <a:srgbClr val="637782"/>
+                </a:solidFill>
+                <a:latin typeface="Arial"/>
+              </a:rPr>
+              <a:t>one reference, no expiry</a:t>
+            </a:r>
+          </a:p>
+        </p:txBody>
+      </p:sp>
+      <p:sp>
+        <p:nvSpPr>
+          <p:cNvPr id="24" name="TextBox 23"/>
+          <p:cNvSpPr txBox="1"/>
+          <p:nvPr/>
+        </p:nvSpPr>
+        <p:spPr>
+          <a:xfrm>
+            <a:off x="822960" y="4306824"/>
+            <a:ext cx="3840480" cy="256032"/>
+          </a:xfrm>
+          <a:prstGeom prst="rect">
+            <a:avLst/>
+          </a:prstGeom>
+          <a:noFill/>
+        </p:spPr>
+        <p:txBody>
+          <a:bodyPr wrap="square" anchor="t" lIns="0" rIns="0" tIns="0" bIns="0">
+            <a:spAutoFit/>
+          </a:bodyPr>
+          <a:lstStyle/>
+          <a:p>
+            <a:pPr algn="l">
+              <a:lnSpc>
+                <a:spcPct val="100000"/>
+              </a:lnSpc>
+              <a:spcBef>
+                <a:spcPts val="0"/>
+              </a:spcBef>
+              <a:spcAft>
+                <a:spcPts val="0"/>
+              </a:spcAft>
+            </a:pPr>
+            <a:r>
+              <a:rPr sz="1350" b="1">
+                <a:solidFill>
+                  <a:srgbClr val="121E25"/>
+                </a:solidFill>
+                <a:latin typeface="Arial"/>
+              </a:rPr>
+              <a:t>Duty, tariff, shipping</a:t>
+            </a:r>
+          </a:p>
+        </p:txBody>
+      </p:sp>
+      <p:sp>
+        <p:nvSpPr>
+          <p:cNvPr id="25" name="TextBox 24"/>
+          <p:cNvSpPr txBox="1"/>
+          <p:nvPr/>
+        </p:nvSpPr>
+        <p:spPr>
+          <a:xfrm>
+            <a:off x="822960" y="4544568"/>
+            <a:ext cx="4754880" cy="237744"/>
+          </a:xfrm>
+          <a:prstGeom prst="rect">
+            <a:avLst/>
+          </a:prstGeom>
+          <a:noFill/>
+        </p:spPr>
+        <p:txBody>
+          <a:bodyPr wrap="square" anchor="t" lIns="0" rIns="0" tIns="0" bIns="0">
+            <a:spAutoFit/>
+          </a:bodyPr>
+          <a:lstStyle/>
+          <a:p>
+            <a:pPr algn="l">
+              <a:lnSpc>
+                <a:spcPct val="100000"/>
+              </a:lnSpc>
+              <a:spcBef>
+                <a:spcPts val="0"/>
+              </a:spcBef>
+              <a:spcAft>
+                <a:spcPts val="0"/>
+              </a:spcAft>
+            </a:pPr>
+            <a:r>
+              <a:rPr sz="1100" b="0">
+                <a:solidFill>
+                  <a:srgbClr val="637782"/>
+                </a:solidFill>
+                <a:latin typeface="Arial"/>
+              </a:rPr>
+              <a:t>imported hardware</a:t>
+            </a:r>
+          </a:p>
+        </p:txBody>
+      </p:sp>
+      <p:sp>
+        <p:nvSpPr>
+          <p:cNvPr id="26" name="TextBox 25"/>
+          <p:cNvSpPr txBox="1"/>
+          <p:nvPr/>
+        </p:nvSpPr>
+        <p:spPr>
+          <a:xfrm>
+            <a:off x="5943600" y="4325112"/>
+            <a:ext cx="2103120" cy="274320"/>
+          </a:xfrm>
+          <a:prstGeom prst="rect">
+            <a:avLst/>
+          </a:prstGeom>
+          <a:noFill/>
+        </p:spPr>
+        <p:txBody>
+          <a:bodyPr wrap="square" anchor="t" lIns="0" rIns="0" tIns="0" bIns="0">
+            <a:spAutoFit/>
+          </a:bodyPr>
+          <a:lstStyle/>
+          <a:p>
+            <a:pPr algn="l">
+              <a:lnSpc>
+                <a:spcPct val="100000"/>
+              </a:lnSpc>
+              <a:spcBef>
+                <a:spcPts val="0"/>
+              </a:spcBef>
+              <a:spcAft>
+                <a:spcPts val="0"/>
+              </a:spcAft>
+            </a:pPr>
+            <a:r>
+              <a:rPr sz="1500" b="0">
+                <a:solidFill>
+                  <a:srgbClr val="C4622D"/>
+                </a:solidFill>
+                <a:latin typeface="Georgia"/>
+              </a:rPr>
+              <a:t>$407</a:t>
+            </a:r>
+          </a:p>
+        </p:txBody>
+      </p:sp>
+      <p:sp>
+        <p:nvSpPr>
+          <p:cNvPr id="27" name="TextBox 26"/>
+          <p:cNvSpPr txBox="1"/>
+          <p:nvPr/>
+        </p:nvSpPr>
+        <p:spPr>
+          <a:xfrm>
+            <a:off x="8503920" y="4325112"/>
+            <a:ext cx="2103120" cy="274320"/>
+          </a:xfrm>
+          <a:prstGeom prst="rect">
+            <a:avLst/>
+          </a:prstGeom>
+          <a:noFill/>
+        </p:spPr>
+        <p:txBody>
+          <a:bodyPr wrap="square" anchor="t" lIns="0" rIns="0" tIns="0" bIns="0">
+            <a:spAutoFit/>
+          </a:bodyPr>
+          <a:lstStyle/>
+          <a:p>
+            <a:pPr algn="l">
+              <a:lnSpc>
+                <a:spcPct val="100000"/>
+              </a:lnSpc>
+              <a:spcBef>
+                <a:spcPts val="0"/>
+              </a:spcBef>
+              <a:spcAft>
+                <a:spcPts val="0"/>
+              </a:spcAft>
+            </a:pPr>
+            <a:r>
+              <a:rPr sz="1500" b="0">
+                <a:solidFill>
+                  <a:srgbClr val="2B8A9E"/>
+                </a:solidFill>
+                <a:latin typeface="Georgia"/>
+              </a:rPr>
+              <a:t>$0</a:t>
+            </a:r>
+          </a:p>
+        </p:txBody>
+      </p:sp>
+      <p:sp>
+        <p:nvSpPr>
+          <p:cNvPr id="28" name="TextBox 27"/>
+          <p:cNvSpPr txBox="1"/>
+          <p:nvPr/>
+        </p:nvSpPr>
+        <p:spPr>
+          <a:xfrm>
+            <a:off x="8503920" y="4562856"/>
+            <a:ext cx="2743200" cy="237744"/>
+          </a:xfrm>
+          <a:prstGeom prst="rect">
+            <a:avLst/>
+          </a:prstGeom>
+          <a:noFill/>
+        </p:spPr>
+        <p:txBody>
+          <a:bodyPr wrap="square" anchor="t" lIns="0" rIns="0" tIns="0" bIns="0">
+            <a:spAutoFit/>
+          </a:bodyPr>
+          <a:lstStyle/>
+          <a:p>
+            <a:pPr algn="l">
+              <a:lnSpc>
+                <a:spcPct val="100000"/>
+              </a:lnSpc>
+              <a:spcBef>
+                <a:spcPts val="0"/>
+              </a:spcBef>
+              <a:spcAft>
+                <a:spcPts val="0"/>
+              </a:spcAft>
+            </a:pPr>
+            <a:r>
+              <a:rPr sz="1050" b="0">
+                <a:solidFill>
+                  <a:srgbClr val="637782"/>
+                </a:solidFill>
+                <a:latin typeface="Arial"/>
+              </a:rPr>
+              <a:t>bought domestically</a:t>
+            </a:r>
+          </a:p>
+        </p:txBody>
+      </p:sp>
+      <p:sp>
+        <p:nvSpPr>
+          <p:cNvPr id="29" name="TextBox 28"/>
+          <p:cNvSpPr txBox="1"/>
+          <p:nvPr/>
+        </p:nvSpPr>
+        <p:spPr>
+          <a:xfrm>
+            <a:off x="822960" y="4873752"/>
+            <a:ext cx="3840480" cy="256032"/>
+          </a:xfrm>
+          <a:prstGeom prst="rect">
+            <a:avLst/>
+          </a:prstGeom>
+          <a:noFill/>
+        </p:spPr>
+        <p:txBody>
+          <a:bodyPr wrap="square" anchor="t" lIns="0" rIns="0" tIns="0" bIns="0">
+            <a:spAutoFit/>
+          </a:bodyPr>
+          <a:lstStyle/>
+          <a:p>
+            <a:pPr algn="l">
+              <a:lnSpc>
+                <a:spcPct val="100000"/>
+              </a:lnSpc>
+              <a:spcBef>
+                <a:spcPts val="0"/>
+              </a:spcBef>
+              <a:spcAft>
+                <a:spcPts val="0"/>
+              </a:spcAft>
+            </a:pPr>
+            <a:r>
+              <a:rPr sz="1350" b="1">
+                <a:solidFill>
+                  <a:srgbClr val="121E25"/>
+                </a:solidFill>
+                <a:latin typeface="Arial"/>
+              </a:rPr>
+              <a:t>Tax</a:t>
+            </a:r>
+          </a:p>
+        </p:txBody>
+      </p:sp>
+      <p:sp>
+        <p:nvSpPr>
+          <p:cNvPr id="30" name="TextBox 29"/>
+          <p:cNvSpPr txBox="1"/>
+          <p:nvPr/>
+        </p:nvSpPr>
+        <p:spPr>
+          <a:xfrm>
+            <a:off x="822960" y="5111496"/>
+            <a:ext cx="4754880" cy="237744"/>
+          </a:xfrm>
+          <a:prstGeom prst="rect">
+            <a:avLst/>
+          </a:prstGeom>
+          <a:noFill/>
+        </p:spPr>
+        <p:txBody>
+          <a:bodyPr wrap="square" anchor="t" lIns="0" rIns="0" tIns="0" bIns="0">
+            <a:spAutoFit/>
+          </a:bodyPr>
+          <a:lstStyle/>
+          <a:p>
+            <a:pPr algn="l">
+              <a:lnSpc>
+                <a:spcPct val="100000"/>
+              </a:lnSpc>
+              <a:spcBef>
+                <a:spcPts val="0"/>
+              </a:spcBef>
+              <a:spcAft>
+                <a:spcPts val="0"/>
+              </a:spcAft>
+            </a:pPr>
+            <a:r>
+              <a:rPr sz="1100" b="0">
+                <a:solidFill>
+                  <a:srgbClr val="637782"/>
+                </a:solidFill>
+                <a:latin typeface="Arial"/>
+              </a:rPr>
+              <a:t>10.5%</a:t>
+            </a:r>
+          </a:p>
+        </p:txBody>
+      </p:sp>
+      <p:sp>
+        <p:nvSpPr>
+          <p:cNvPr id="31" name="TextBox 30"/>
+          <p:cNvSpPr txBox="1"/>
+          <p:nvPr/>
+        </p:nvSpPr>
+        <p:spPr>
+          <a:xfrm>
+            <a:off x="5943600" y="4892040"/>
+            <a:ext cx="2103120" cy="274320"/>
+          </a:xfrm>
+          <a:prstGeom prst="rect">
+            <a:avLst/>
+          </a:prstGeom>
+          <a:noFill/>
+        </p:spPr>
+        <p:txBody>
+          <a:bodyPr wrap="square" anchor="t" lIns="0" rIns="0" tIns="0" bIns="0">
+            <a:spAutoFit/>
+          </a:bodyPr>
+          <a:lstStyle/>
+          <a:p>
+            <a:pPr algn="l">
+              <a:lnSpc>
+                <a:spcPct val="100000"/>
+              </a:lnSpc>
+              <a:spcBef>
+                <a:spcPts val="0"/>
+              </a:spcBef>
+              <a:spcAft>
+                <a:spcPts val="0"/>
+              </a:spcAft>
+            </a:pPr>
+            <a:r>
+              <a:rPr sz="1500" b="0">
+                <a:solidFill>
+                  <a:srgbClr val="C4622D"/>
+                </a:solidFill>
+                <a:latin typeface="Georgia"/>
+              </a:rPr>
+              <a:t>$748</a:t>
+            </a:r>
+          </a:p>
+        </p:txBody>
+      </p:sp>
+      <p:sp>
+        <p:nvSpPr>
+          <p:cNvPr id="32" name="TextBox 31"/>
+          <p:cNvSpPr txBox="1"/>
+          <p:nvPr/>
+        </p:nvSpPr>
+        <p:spPr>
+          <a:xfrm>
+            <a:off x="8503920" y="4892040"/>
+            <a:ext cx="2103120" cy="274320"/>
+          </a:xfrm>
+          <a:prstGeom prst="rect">
+            <a:avLst/>
+          </a:prstGeom>
+          <a:noFill/>
+        </p:spPr>
+        <p:txBody>
+          <a:bodyPr wrap="square" anchor="t" lIns="0" rIns="0" tIns="0" bIns="0">
+            <a:spAutoFit/>
+          </a:bodyPr>
+          <a:lstStyle/>
+          <a:p>
+            <a:pPr algn="l">
+              <a:lnSpc>
+                <a:spcPct val="100000"/>
+              </a:lnSpc>
+              <a:spcBef>
+                <a:spcPts val="0"/>
+              </a:spcBef>
+              <a:spcAft>
+                <a:spcPts val="0"/>
+              </a:spcAft>
+            </a:pPr>
+            <a:r>
+              <a:rPr sz="1500" b="0">
+                <a:solidFill>
+                  <a:srgbClr val="2B8A9E"/>
+                </a:solidFill>
+                <a:latin typeface="Georgia"/>
+              </a:rPr>
+              <a:t>$147</a:t>
+            </a:r>
+          </a:p>
+        </p:txBody>
+      </p:sp>
+      <p:sp>
+        <p:nvSpPr>
+          <p:cNvPr id="33" name="TextBox 32"/>
+          <p:cNvSpPr txBox="1"/>
+          <p:nvPr/>
+        </p:nvSpPr>
+        <p:spPr>
+          <a:xfrm>
+            <a:off x="822960" y="5440680"/>
+            <a:ext cx="3840480" cy="256032"/>
+          </a:xfrm>
+          <a:prstGeom prst="rect">
+            <a:avLst/>
+          </a:prstGeom>
+          <a:noFill/>
+        </p:spPr>
+        <p:txBody>
+          <a:bodyPr wrap="square" anchor="t" lIns="0" rIns="0" tIns="0" bIns="0">
+            <a:spAutoFit/>
+          </a:bodyPr>
+          <a:lstStyle/>
+          <a:p>
+            <a:pPr algn="l">
+              <a:lnSpc>
+                <a:spcPct val="100000"/>
+              </a:lnSpc>
+              <a:spcBef>
+                <a:spcPts val="0"/>
+              </a:spcBef>
+              <a:spcAft>
+                <a:spcPts val="0"/>
+              </a:spcAft>
+            </a:pPr>
+            <a:r>
+              <a:rPr sz="1350" b="1">
+                <a:solidFill>
+                  <a:srgbClr val="121E25"/>
+                </a:solidFill>
+                <a:latin typeface="Arial"/>
+              </a:rPr>
+              <a:t>Subscription</a:t>
+            </a:r>
+          </a:p>
+        </p:txBody>
+      </p:sp>
+      <p:sp>
+        <p:nvSpPr>
+          <p:cNvPr id="34" name="TextBox 33"/>
+          <p:cNvSpPr txBox="1"/>
+          <p:nvPr/>
+        </p:nvSpPr>
+        <p:spPr>
+          <a:xfrm>
+            <a:off x="822960" y="5678424"/>
+            <a:ext cx="4754880" cy="237744"/>
+          </a:xfrm>
+          <a:prstGeom prst="rect">
+            <a:avLst/>
+          </a:prstGeom>
+          <a:noFill/>
+        </p:spPr>
+        <p:txBody>
+          <a:bodyPr wrap="square" anchor="t" lIns="0" rIns="0" tIns="0" bIns="0">
+            <a:spAutoFit/>
+          </a:bodyPr>
+          <a:lstStyle/>
+          <a:p>
+            <a:pPr algn="l">
+              <a:lnSpc>
+                <a:spcPct val="100000"/>
+              </a:lnSpc>
+              <a:spcBef>
+                <a:spcPts val="0"/>
+              </a:spcBef>
+              <a:spcAft>
+                <a:spcPts val="0"/>
+              </a:spcAft>
+            </a:pPr>
+            <a:r>
+              <a:rPr sz="1100" b="0">
+                <a:solidFill>
+                  <a:srgbClr val="637782"/>
+                </a:solidFill>
+                <a:latin typeface="Arial"/>
+              </a:rPr>
+              <a:t>per site, per year</a:t>
+            </a:r>
+          </a:p>
+        </p:txBody>
+      </p:sp>
+      <p:sp>
+        <p:nvSpPr>
+          <p:cNvPr id="35" name="TextBox 34"/>
+          <p:cNvSpPr txBox="1"/>
+          <p:nvPr/>
+        </p:nvSpPr>
+        <p:spPr>
+          <a:xfrm>
+            <a:off x="5943600" y="5458968"/>
+            <a:ext cx="2103120" cy="274320"/>
+          </a:xfrm>
+          <a:prstGeom prst="rect">
+            <a:avLst/>
+          </a:prstGeom>
+          <a:noFill/>
+        </p:spPr>
+        <p:txBody>
+          <a:bodyPr wrap="square" anchor="t" lIns="0" rIns="0" tIns="0" bIns="0">
+            <a:spAutoFit/>
+          </a:bodyPr>
+          <a:lstStyle/>
+          <a:p>
+            <a:pPr algn="l">
+              <a:lnSpc>
+                <a:spcPct val="100000"/>
+              </a:lnSpc>
+              <a:spcBef>
+                <a:spcPts val="0"/>
+              </a:spcBef>
+              <a:spcAft>
+                <a:spcPts val="0"/>
+              </a:spcAft>
+            </a:pPr>
+            <a:r>
+              <a:rPr sz="1500" b="0">
+                <a:solidFill>
+                  <a:srgbClr val="C4622D"/>
+                </a:solidFill>
+                <a:latin typeface="Georgia"/>
+              </a:rPr>
+              <a:t>$1,200</a:t>
+            </a:r>
+          </a:p>
+        </p:txBody>
+      </p:sp>
+      <p:sp>
+        <p:nvSpPr>
+          <p:cNvPr id="36" name="TextBox 35"/>
+          <p:cNvSpPr txBox="1"/>
+          <p:nvPr/>
+        </p:nvSpPr>
+        <p:spPr>
+          <a:xfrm>
+            <a:off x="8503920" y="5458968"/>
+            <a:ext cx="2103120" cy="274320"/>
+          </a:xfrm>
+          <a:prstGeom prst="rect">
+            <a:avLst/>
+          </a:prstGeom>
+          <a:noFill/>
+        </p:spPr>
+        <p:txBody>
+          <a:bodyPr wrap="square" anchor="t" lIns="0" rIns="0" tIns="0" bIns="0">
+            <a:spAutoFit/>
+          </a:bodyPr>
+          <a:lstStyle/>
+          <a:p>
+            <a:pPr algn="l">
+              <a:lnSpc>
+                <a:spcPct val="100000"/>
+              </a:lnSpc>
+              <a:spcBef>
+                <a:spcPts val="0"/>
+              </a:spcBef>
+              <a:spcAft>
+                <a:spcPts val="0"/>
+              </a:spcAft>
+            </a:pPr>
+            <a:r>
+              <a:rPr sz="1500" b="0">
+                <a:solidFill>
+                  <a:srgbClr val="2B8A9E"/>
+                </a:solidFill>
+                <a:latin typeface="Georgia"/>
+              </a:rPr>
+              <a:t>$144</a:t>
+            </a:r>
+          </a:p>
+        </p:txBody>
+      </p:sp>
+      <p:sp>
+        <p:nvSpPr>
+          <p:cNvPr id="37" name="TextBox 36"/>
+          <p:cNvSpPr txBox="1"/>
+          <p:nvPr/>
+        </p:nvSpPr>
+        <p:spPr>
+          <a:xfrm>
+            <a:off x="8503920" y="5696712"/>
+            <a:ext cx="2743200" cy="237744"/>
+          </a:xfrm>
+          <a:prstGeom prst="rect">
+            <a:avLst/>
+          </a:prstGeom>
+          <a:noFill/>
+        </p:spPr>
+        <p:txBody>
+          <a:bodyPr wrap="square" anchor="t" lIns="0" rIns="0" tIns="0" bIns="0">
+            <a:spAutoFit/>
+          </a:bodyPr>
+          <a:lstStyle/>
+          <a:p>
+            <a:pPr algn="l">
+              <a:lnSpc>
+                <a:spcPct val="100000"/>
+              </a:lnSpc>
+              <a:spcBef>
+                <a:spcPts val="0"/>
+              </a:spcBef>
+              <a:spcAft>
+                <a:spcPts val="0"/>
+              </a:spcAft>
+            </a:pPr>
+            <a:r>
+              <a:rPr sz="1050" b="0">
+                <a:solidFill>
+                  <a:srgbClr val="637782"/>
+                </a:solidFill>
+                <a:latin typeface="Arial"/>
+              </a:rPr>
+              <a:t>hosting, all sites</a:t>
+            </a:r>
+          </a:p>
+        </p:txBody>
+      </p:sp>
+      <p:sp>
+        <p:nvSpPr>
+          <p:cNvPr id="38" name="Rectangle 37"/>
           <p:cNvSpPr/>
           <p:nvPr/>
         </p:nvSpPr>
         <p:spPr>
           <a:xfrm>
-            <a:off x="822960" y="4297680"/>
-            <a:ext cx="552483135836" cy="658368"/>
+            <a:off x="822960" y="6025896"/>
+            <a:ext cx="10545775" cy="18288"/>
           </a:xfrm>
           <a:prstGeom prst="rect">
             <a:avLst/>
           </a:prstGeom>
           <a:solidFill>
-            <a:srgbClr val="2B8A9E"/>
+            <a:srgbClr val="121E25"/>
           </a:solidFill>
           <a:ln>
             <a:noFill/>
@@ -8163,14 +9506,14 @@
       </p:sp>
       <p:sp>
         <p:nvSpPr>
-          <p:cNvPr id="11" name="TextBox 10"/>
-          <p:cNvSpPr txBox="1"/>
-          <p:nvPr/>
-        </p:nvSpPr>
-        <p:spPr>
-          <a:xfrm>
-            <a:off x="1691640" y="4343400"/>
-            <a:ext cx="2377440" cy="548640"/>
+          <p:cNvPr id="39" name="TextBox 38"/>
+          <p:cNvSpPr txBox="1"/>
+          <p:nvPr/>
+        </p:nvSpPr>
+        <p:spPr>
+          <a:xfrm>
+            <a:off x="822960" y="6172200"/>
+            <a:ext cx="4114800" cy="320040"/>
           </a:xfrm>
           <a:prstGeom prst="rect">
             <a:avLst/>
@@ -8195,27 +9538,72 @@
               </a:spcAft>
             </a:pPr>
             <a:r>
-              <a:rPr sz="3000" b="0">
-                <a:solidFill>
-                  <a:srgbClr val="FAFBFC"/>
+              <a:rPr sz="1700" b="1">
+                <a:solidFill>
+                  <a:srgbClr val="121E25"/>
+                </a:solidFill>
+                <a:latin typeface="Arial"/>
+              </a:rPr>
+              <a:t>First year</a:t>
+            </a:r>
+          </a:p>
+        </p:txBody>
+      </p:sp>
+      <p:sp>
+        <p:nvSpPr>
+          <p:cNvPr id="40" name="TextBox 39"/>
+          <p:cNvSpPr txBox="1"/>
+          <p:nvPr/>
+        </p:nvSpPr>
+        <p:spPr>
+          <a:xfrm>
+            <a:off x="5943600" y="6135624"/>
+            <a:ext cx="2194560" cy="365760"/>
+          </a:xfrm>
+          <a:prstGeom prst="rect">
+            <a:avLst/>
+          </a:prstGeom>
+          <a:noFill/>
+        </p:spPr>
+        <p:txBody>
+          <a:bodyPr wrap="square" anchor="t" lIns="0" rIns="0" tIns="0" bIns="0">
+            <a:spAutoFit/>
+          </a:bodyPr>
+          <a:lstStyle/>
+          <a:p>
+            <a:pPr algn="l">
+              <a:lnSpc>
+                <a:spcPct val="100000"/>
+              </a:lnSpc>
+              <a:spcBef>
+                <a:spcPts val="0"/>
+              </a:spcBef>
+              <a:spcAft>
+                <a:spcPts val="0"/>
+              </a:spcAft>
+            </a:pPr>
+            <a:r>
+              <a:rPr sz="2400" b="0">
+                <a:solidFill>
+                  <a:srgbClr val="C4622D"/>
                 </a:solidFill>
                 <a:latin typeface="Georgia"/>
               </a:rPr>
-              <a:t>$2,470</a:t>
-            </a:r>
-          </a:p>
-        </p:txBody>
-      </p:sp>
-      <p:sp>
-        <p:nvSpPr>
-          <p:cNvPr id="12" name="TextBox 11"/>
-          <p:cNvSpPr txBox="1"/>
-          <p:nvPr/>
-        </p:nvSpPr>
-        <p:spPr>
-          <a:xfrm>
-            <a:off x="822960" y="5047488"/>
-            <a:ext cx="7680960" cy="274320"/>
+              <a:t>$9,202</a:t>
+            </a:r>
+          </a:p>
+        </p:txBody>
+      </p:sp>
+      <p:sp>
+        <p:nvSpPr>
+          <p:cNvPr id="41" name="TextBox 40"/>
+          <p:cNvSpPr txBox="1"/>
+          <p:nvPr/>
+        </p:nvSpPr>
+        <p:spPr>
+          <a:xfrm>
+            <a:off x="8503920" y="6135624"/>
+            <a:ext cx="2194560" cy="365760"/>
           </a:xfrm>
           <a:prstGeom prst="rect">
             <a:avLst/>
@@ -8240,33 +9628,104 @@
               </a:spcAft>
             </a:pPr>
             <a:r>
-              <a:rPr sz="1200" b="0">
-                <a:solidFill>
-                  <a:srgbClr val="8EA2AB"/>
+              <a:rPr sz="2400" b="0">
+                <a:solidFill>
+                  <a:srgbClr val="2B8A9E"/>
+                </a:solidFill>
+                <a:latin typeface="Georgia"/>
+              </a:rPr>
+              <a:t>$1,544</a:t>
+            </a:r>
+          </a:p>
+        </p:txBody>
+      </p:sp>
+      <p:sp>
+        <p:nvSpPr>
+          <p:cNvPr id="42" name="TextBox 41"/>
+          <p:cNvSpPr txBox="1"/>
+          <p:nvPr/>
+        </p:nvSpPr>
+        <p:spPr>
+          <a:xfrm>
+            <a:off x="822960" y="6199632"/>
+            <a:ext cx="10545775" cy="292608"/>
+          </a:xfrm>
+          <a:prstGeom prst="rect">
+            <a:avLst/>
+          </a:prstGeom>
+          <a:noFill/>
+        </p:spPr>
+        <p:txBody>
+          <a:bodyPr wrap="square" anchor="t" lIns="0" rIns="0" tIns="0" bIns="0">
+            <a:spAutoFit/>
+          </a:bodyPr>
+          <a:lstStyle/>
+          <a:p>
+            <a:pPr algn="l">
+              <a:lnSpc>
+                <a:spcPct val="100000"/>
+              </a:lnSpc>
+              <a:spcBef>
+                <a:spcPts val="0"/>
+              </a:spcBef>
+              <a:spcAft>
+                <a:spcPts val="0"/>
+              </a:spcAft>
+            </a:pPr>
+            <a:r>
+              <a:rPr sz="1050" b="0">
+                <a:solidFill>
+                  <a:srgbClr val="9EAFB7"/>
                 </a:solidFill>
                 <a:latin typeface="Arial"/>
               </a:rPr>
-              <a:t>$1,400 hardware   +   $350 calibration reference   +   $720 hosting</a:t>
-            </a:r>
-          </a:p>
-        </p:txBody>
-      </p:sp>
-      <p:sp>
-        <p:nvSpPr>
-          <p:cNvPr id="13" name="Rectangle 12"/>
+              <a:t>Their figures are taken directly from the quote. Mine are at the same 15 monitoring points.</a:t>
+            </a:r>
+          </a:p>
+        </p:txBody>
+      </p:sp>
+    </p:spTree>
+  </p:cSld>
+  <p:clrMapOvr>
+    <a:masterClrMapping/>
+  </p:clrMapOvr>
+</p:sld>
+</file>
+
+<file path=ppt/slides/slide6.xml><?xml version="1.0" encoding="utf-8"?>
+<p:sld xmlns:a="http://schemas.openxmlformats.org/drawingml/2006/main" xmlns:p="http://schemas.openxmlformats.org/presentationml/2006/main" xmlns:r="http://schemas.openxmlformats.org/officeDocument/2006/relationships">
+  <p:cSld>
+    <p:bg>
+      <p:bgPr>
+        <a:solidFill>
+          <a:srgbClr val="0F1B22"/>
+        </a:solidFill>
+        <a:effectLst/>
+      </p:bgPr>
+    </p:bg>
+    <p:spTree>
+      <p:nvGrpSpPr>
+        <p:cNvPr id="1" name=""/>
+        <p:cNvGrpSpPr/>
+        <p:nvPr/>
+      </p:nvGrpSpPr>
+      <p:grpSpPr/>
+      <p:sp>
+        <p:nvSpPr>
+          <p:cNvPr id="2" name="Rectangle 1"/>
           <p:cNvSpPr/>
           <p:nvPr/>
         </p:nvSpPr>
         <p:spPr>
           <a:xfrm>
-            <a:off x="9875520" y="2240280"/>
-            <a:ext cx="13716" cy="3108960"/>
+            <a:off x="822960" y="658368"/>
+            <a:ext cx="50292" cy="384048"/>
           </a:xfrm>
           <a:prstGeom prst="rect">
             <a:avLst/>
           </a:prstGeom>
           <a:solidFill>
-            <a:srgbClr val="2A3A44"/>
+            <a:srgbClr val="2B8A9E"/>
           </a:solidFill>
           <a:ln>
             <a:noFill/>
@@ -8297,14 +9756,14 @@
       </p:sp>
       <p:sp>
         <p:nvSpPr>
-          <p:cNvPr id="14" name="TextBox 13"/>
-          <p:cNvSpPr txBox="1"/>
-          <p:nvPr/>
-        </p:nvSpPr>
-        <p:spPr>
-          <a:xfrm>
-            <a:off x="10195560" y="2240280"/>
-            <a:ext cx="2011680" cy="384048"/>
+          <p:cNvPr id="3" name="TextBox 2"/>
+          <p:cNvSpPr txBox="1"/>
+          <p:nvPr/>
+        </p:nvSpPr>
+        <p:spPr>
+          <a:xfrm>
+            <a:off x="1024128" y="658368"/>
+            <a:ext cx="5486400" cy="274320"/>
           </a:xfrm>
           <a:prstGeom prst="rect">
             <a:avLst/>
@@ -8329,464 +9788,145 @@
               </a:spcAft>
             </a:pPr>
             <a:r>
-              <a:rPr sz="2100" b="0">
+              <a:rPr sz="1200" b="1">
+                <a:solidFill>
+                  <a:srgbClr val="2B8A9E"/>
+                </a:solidFill>
+                <a:latin typeface="Arial"/>
+              </a:rPr>
+              <a:t>05</a:t>
+            </a:r>
+          </a:p>
+          <a:p>
+            <a:pPr algn="l">
+              <a:lnSpc>
+                <a:spcPct val="100000"/>
+              </a:lnSpc>
+              <a:spcBef>
+                <a:spcPts val="0"/>
+              </a:spcBef>
+              <a:spcAft>
+                <a:spcPts val="0"/>
+              </a:spcAft>
+            </a:pPr>
+            <a:r>
+              <a:rPr sz="1200" b="0">
+                <a:solidFill>
+                  <a:srgbClr val="9EAFB7"/>
+                </a:solidFill>
+                <a:latin typeface="Arial"/>
+              </a:rPr>
+              <a:t>   COST</a:t>
+            </a:r>
+          </a:p>
+        </p:txBody>
+      </p:sp>
+      <p:sp>
+        <p:nvSpPr>
+          <p:cNvPr id="4" name="TextBox 3"/>
+          <p:cNvSpPr txBox="1"/>
+          <p:nvPr/>
+        </p:nvSpPr>
+        <p:spPr>
+          <a:xfrm>
+            <a:off x="822960" y="1170432"/>
+            <a:ext cx="10545775" cy="868680"/>
+          </a:xfrm>
+          <a:prstGeom prst="rect">
+            <a:avLst/>
+          </a:prstGeom>
+          <a:noFill/>
+        </p:spPr>
+        <p:txBody>
+          <a:bodyPr wrap="square" anchor="t" lIns="0" rIns="0" tIns="0" bIns="0">
+            <a:spAutoFit/>
+          </a:bodyPr>
+          <a:lstStyle/>
+          <a:p>
+            <a:pPr algn="l">
+              <a:lnSpc>
+                <a:spcPct val="105000"/>
+              </a:lnSpc>
+              <a:spcBef>
+                <a:spcPts val="0"/>
+              </a:spcBef>
+              <a:spcAft>
+                <a:spcPts val="0"/>
+              </a:spcAft>
+            </a:pPr>
+            <a:r>
+              <a:rPr sz="3300" b="0">
                 <a:solidFill>
                   <a:srgbClr val="FAFBFC"/>
                 </a:solidFill>
                 <a:latin typeface="Georgia"/>
               </a:rPr>
-              <a:t>$370</a:t>
-            </a:r>
-          </a:p>
-        </p:txBody>
-      </p:sp>
-      <p:sp>
-        <p:nvSpPr>
-          <p:cNvPr id="15" name="TextBox 14"/>
-          <p:cNvSpPr txBox="1"/>
-          <p:nvPr/>
-        </p:nvSpPr>
-        <p:spPr>
-          <a:xfrm>
-            <a:off x="10195560" y="2587752"/>
-            <a:ext cx="2011680" cy="384048"/>
-          </a:xfrm>
-          <a:prstGeom prst="rect">
-            <a:avLst/>
-          </a:prstGeom>
-          <a:noFill/>
-        </p:spPr>
-        <p:txBody>
-          <a:bodyPr wrap="square" anchor="t" lIns="0" rIns="0" tIns="0" bIns="0">
-            <a:spAutoFit/>
-          </a:bodyPr>
-          <a:lstStyle/>
-          <a:p>
-            <a:pPr algn="l">
-              <a:lnSpc>
-                <a:spcPct val="120000"/>
-              </a:lnSpc>
-              <a:spcBef>
-                <a:spcPts val="0"/>
-              </a:spcBef>
-              <a:spcAft>
-                <a:spcPts val="0"/>
-              </a:spcAft>
-            </a:pPr>
-            <a:r>
-              <a:rPr sz="1050" b="0">
-                <a:solidFill>
-                  <a:srgbClr val="8EA2AB"/>
+              <a:t>The same site, five years out</a:t>
+            </a:r>
+          </a:p>
+        </p:txBody>
+      </p:sp>
+      <p:sp>
+        <p:nvSpPr>
+          <p:cNvPr id="5" name="TextBox 4"/>
+          <p:cNvSpPr txBox="1"/>
+          <p:nvPr/>
+        </p:nvSpPr>
+        <p:spPr>
+          <a:xfrm>
+            <a:off x="822960" y="2286000"/>
+            <a:ext cx="3657600" cy="274320"/>
+          </a:xfrm>
+          <a:prstGeom prst="rect">
+            <a:avLst/>
+          </a:prstGeom>
+          <a:noFill/>
+        </p:spPr>
+        <p:txBody>
+          <a:bodyPr wrap="square" anchor="t" lIns="0" rIns="0" tIns="0" bIns="0">
+            <a:spAutoFit/>
+          </a:bodyPr>
+          <a:lstStyle/>
+          <a:p>
+            <a:pPr algn="l">
+              <a:lnSpc>
+                <a:spcPct val="100000"/>
+              </a:lnSpc>
+              <a:spcBef>
+                <a:spcPts val="0"/>
+              </a:spcBef>
+              <a:spcAft>
+                <a:spcPts val="0"/>
+              </a:spcAft>
+            </a:pPr>
+            <a:r>
+              <a:rPr sz="1150" b="1">
+                <a:solidFill>
+                  <a:srgbClr val="E8935C"/>
                 </a:solidFill>
                 <a:latin typeface="Arial"/>
               </a:rPr>
-              <a:t>their cost per point</a:t>
-            </a:r>
-          </a:p>
-        </p:txBody>
-      </p:sp>
-      <p:sp>
-        <p:nvSpPr>
-          <p:cNvPr id="16" name="TextBox 15"/>
-          <p:cNvSpPr txBox="1"/>
-          <p:nvPr/>
-        </p:nvSpPr>
-        <p:spPr>
-          <a:xfrm>
-            <a:off x="10195560" y="3035808"/>
-            <a:ext cx="2011680" cy="384048"/>
-          </a:xfrm>
-          <a:prstGeom prst="rect">
-            <a:avLst/>
-          </a:prstGeom>
-          <a:noFill/>
-        </p:spPr>
-        <p:txBody>
-          <a:bodyPr wrap="square" anchor="t" lIns="0" rIns="0" tIns="0" bIns="0">
-            <a:spAutoFit/>
-          </a:bodyPr>
-          <a:lstStyle/>
-          <a:p>
-            <a:pPr algn="l">
-              <a:lnSpc>
-                <a:spcPct val="100000"/>
-              </a:lnSpc>
-              <a:spcBef>
-                <a:spcPts val="0"/>
-              </a:spcBef>
-              <a:spcAft>
-                <a:spcPts val="0"/>
-              </a:spcAft>
-            </a:pPr>
-            <a:r>
-              <a:rPr sz="2100" b="0">
-                <a:solidFill>
-                  <a:srgbClr val="FAFBFC"/>
-                </a:solidFill>
-                <a:latin typeface="Georgia"/>
-              </a:rPr>
-              <a:t>$70</a:t>
-            </a:r>
-          </a:p>
-        </p:txBody>
-      </p:sp>
-      <p:sp>
-        <p:nvSpPr>
-          <p:cNvPr id="17" name="TextBox 16"/>
-          <p:cNvSpPr txBox="1"/>
-          <p:nvPr/>
-        </p:nvSpPr>
-        <p:spPr>
-          <a:xfrm>
-            <a:off x="10195560" y="3383280"/>
-            <a:ext cx="2011680" cy="384048"/>
-          </a:xfrm>
-          <a:prstGeom prst="rect">
-            <a:avLst/>
-          </a:prstGeom>
-          <a:noFill/>
-        </p:spPr>
-        <p:txBody>
-          <a:bodyPr wrap="square" anchor="t" lIns="0" rIns="0" tIns="0" bIns="0">
-            <a:spAutoFit/>
-          </a:bodyPr>
-          <a:lstStyle/>
-          <a:p>
-            <a:pPr algn="l">
-              <a:lnSpc>
-                <a:spcPct val="120000"/>
-              </a:lnSpc>
-              <a:spcBef>
-                <a:spcPts val="0"/>
-              </a:spcBef>
-              <a:spcAft>
-                <a:spcPts val="0"/>
-              </a:spcAft>
-            </a:pPr>
-            <a:r>
-              <a:rPr sz="1050" b="0">
-                <a:solidFill>
-                  <a:srgbClr val="8EA2AB"/>
-                </a:solidFill>
-                <a:latin typeface="Arial"/>
-              </a:rPr>
-              <a:t>mine</a:t>
-            </a:r>
-          </a:p>
-        </p:txBody>
-      </p:sp>
-      <p:sp>
-        <p:nvSpPr>
-          <p:cNvPr id="18" name="TextBox 17"/>
-          <p:cNvSpPr txBox="1"/>
-          <p:nvPr/>
-        </p:nvSpPr>
-        <p:spPr>
-          <a:xfrm>
-            <a:off x="10195560" y="3831336"/>
-            <a:ext cx="2011680" cy="384048"/>
-          </a:xfrm>
-          <a:prstGeom prst="rect">
-            <a:avLst/>
-          </a:prstGeom>
-          <a:noFill/>
-        </p:spPr>
-        <p:txBody>
-          <a:bodyPr wrap="square" anchor="t" lIns="0" rIns="0" tIns="0" bIns="0">
-            <a:spAutoFit/>
-          </a:bodyPr>
-          <a:lstStyle/>
-          <a:p>
-            <a:pPr algn="l">
-              <a:lnSpc>
-                <a:spcPct val="100000"/>
-              </a:lnSpc>
-              <a:spcBef>
-                <a:spcPts val="0"/>
-              </a:spcBef>
-              <a:spcAft>
-                <a:spcPts val="0"/>
-              </a:spcAft>
-            </a:pPr>
-            <a:r>
-              <a:rPr sz="2100" b="0">
-                <a:solidFill>
-                  <a:srgbClr val="FAFBFC"/>
-                </a:solidFill>
-                <a:latin typeface="Georgia"/>
-              </a:rPr>
-              <a:t>$100</a:t>
-            </a:r>
-          </a:p>
-        </p:txBody>
-      </p:sp>
-      <p:sp>
-        <p:nvSpPr>
-          <p:cNvPr id="19" name="TextBox 18"/>
-          <p:cNvSpPr txBox="1"/>
-          <p:nvPr/>
-        </p:nvSpPr>
-        <p:spPr>
-          <a:xfrm>
-            <a:off x="10195560" y="4178808"/>
-            <a:ext cx="2011680" cy="384048"/>
-          </a:xfrm>
-          <a:prstGeom prst="rect">
-            <a:avLst/>
-          </a:prstGeom>
-          <a:noFill/>
-        </p:spPr>
-        <p:txBody>
-          <a:bodyPr wrap="square" anchor="t" lIns="0" rIns="0" tIns="0" bIns="0">
-            <a:spAutoFit/>
-          </a:bodyPr>
-          <a:lstStyle/>
-          <a:p>
-            <a:pPr algn="l">
-              <a:lnSpc>
-                <a:spcPct val="120000"/>
-              </a:lnSpc>
-              <a:spcBef>
-                <a:spcPts val="0"/>
-              </a:spcBef>
-              <a:spcAft>
-                <a:spcPts val="0"/>
-              </a:spcAft>
-            </a:pPr>
-            <a:r>
-              <a:rPr sz="1050" b="0">
-                <a:solidFill>
-                  <a:srgbClr val="8EA2AB"/>
-                </a:solidFill>
-                <a:latin typeface="Arial"/>
-              </a:rPr>
-              <a:t>their monthly fee, per site</a:t>
-            </a:r>
-          </a:p>
-        </p:txBody>
-      </p:sp>
-      <p:sp>
-        <p:nvSpPr>
-          <p:cNvPr id="20" name="TextBox 19"/>
-          <p:cNvSpPr txBox="1"/>
-          <p:nvPr/>
-        </p:nvSpPr>
-        <p:spPr>
-          <a:xfrm>
-            <a:off x="10195560" y="4626864"/>
-            <a:ext cx="2011680" cy="384048"/>
-          </a:xfrm>
-          <a:prstGeom prst="rect">
-            <a:avLst/>
-          </a:prstGeom>
-          <a:noFill/>
-        </p:spPr>
-        <p:txBody>
-          <a:bodyPr wrap="square" anchor="t" lIns="0" rIns="0" tIns="0" bIns="0">
-            <a:spAutoFit/>
-          </a:bodyPr>
-          <a:lstStyle/>
-          <a:p>
-            <a:pPr algn="l">
-              <a:lnSpc>
-                <a:spcPct val="100000"/>
-              </a:lnSpc>
-              <a:spcBef>
-                <a:spcPts val="0"/>
-              </a:spcBef>
-              <a:spcAft>
-                <a:spcPts val="0"/>
-              </a:spcAft>
-            </a:pPr>
-            <a:r>
-              <a:rPr sz="2100" b="0">
-                <a:solidFill>
-                  <a:srgbClr val="FAFBFC"/>
-                </a:solidFill>
-                <a:latin typeface="Georgia"/>
-              </a:rPr>
-              <a:t>$12</a:t>
-            </a:r>
-          </a:p>
-        </p:txBody>
-      </p:sp>
-      <p:sp>
-        <p:nvSpPr>
-          <p:cNvPr id="21" name="TextBox 20"/>
-          <p:cNvSpPr txBox="1"/>
-          <p:nvPr/>
-        </p:nvSpPr>
-        <p:spPr>
-          <a:xfrm>
-            <a:off x="10195560" y="4974336"/>
-            <a:ext cx="2011680" cy="384048"/>
-          </a:xfrm>
-          <a:prstGeom prst="rect">
-            <a:avLst/>
-          </a:prstGeom>
-          <a:noFill/>
-        </p:spPr>
-        <p:txBody>
-          <a:bodyPr wrap="square" anchor="t" lIns="0" rIns="0" tIns="0" bIns="0">
-            <a:spAutoFit/>
-          </a:bodyPr>
-          <a:lstStyle/>
-          <a:p>
-            <a:pPr algn="l">
-              <a:lnSpc>
-                <a:spcPct val="120000"/>
-              </a:lnSpc>
-              <a:spcBef>
-                <a:spcPts val="0"/>
-              </a:spcBef>
-              <a:spcAft>
-                <a:spcPts val="0"/>
-              </a:spcAft>
-            </a:pPr>
-            <a:r>
-              <a:rPr sz="1050" b="0">
-                <a:solidFill>
-                  <a:srgbClr val="8EA2AB"/>
-                </a:solidFill>
-                <a:latin typeface="Arial"/>
-              </a:rPr>
-              <a:t>mine, all sites</a:t>
-            </a:r>
-          </a:p>
-        </p:txBody>
-      </p:sp>
-      <p:sp>
-        <p:nvSpPr>
-          <p:cNvPr id="22" name="TextBox 21"/>
-          <p:cNvSpPr txBox="1"/>
-          <p:nvPr/>
-        </p:nvSpPr>
-        <p:spPr>
-          <a:xfrm>
-            <a:off x="822960" y="5806440"/>
-            <a:ext cx="10545775" cy="457200"/>
-          </a:xfrm>
-          <a:prstGeom prst="rect">
-            <a:avLst/>
-          </a:prstGeom>
-          <a:noFill/>
-        </p:spPr>
-        <p:txBody>
-          <a:bodyPr wrap="square" anchor="t" lIns="0" rIns="0" tIns="0" bIns="0">
-            <a:spAutoFit/>
-          </a:bodyPr>
-          <a:lstStyle/>
-          <a:p>
-            <a:pPr algn="l">
-              <a:lnSpc>
-                <a:spcPct val="100000"/>
-              </a:lnSpc>
-              <a:spcBef>
-                <a:spcPts val="0"/>
-              </a:spcBef>
-              <a:spcAft>
-                <a:spcPts val="0"/>
-              </a:spcAft>
-            </a:pPr>
-            <a:r>
-              <a:rPr sz="1900" b="0">
-                <a:solidFill>
-                  <a:srgbClr val="FAFBFC"/>
-                </a:solidFill>
-                <a:latin typeface="Georgia"/>
-              </a:rPr>
-              <a:t>About $29,000 back over five years — and the gap widens with every site we add.</a:t>
-            </a:r>
-          </a:p>
-        </p:txBody>
-      </p:sp>
-      <p:sp>
-        <p:nvSpPr>
-          <p:cNvPr id="23" name="TextBox 22"/>
-          <p:cNvSpPr txBox="1"/>
-          <p:nvPr/>
-        </p:nvSpPr>
-        <p:spPr>
-          <a:xfrm>
-            <a:off x="822960" y="6199632"/>
-            <a:ext cx="10545775" cy="292608"/>
-          </a:xfrm>
-          <a:prstGeom prst="rect">
-            <a:avLst/>
-          </a:prstGeom>
-          <a:noFill/>
-        </p:spPr>
-        <p:txBody>
-          <a:bodyPr wrap="square" anchor="t" lIns="0" rIns="0" tIns="0" bIns="0">
-            <a:spAutoFit/>
-          </a:bodyPr>
-          <a:lstStyle/>
-          <a:p>
-            <a:pPr algn="l">
-              <a:lnSpc>
-                <a:spcPct val="100000"/>
-              </a:lnSpc>
-              <a:spcBef>
-                <a:spcPts val="0"/>
-              </a:spcBef>
-              <a:spcAft>
-                <a:spcPts val="0"/>
-              </a:spcAft>
-            </a:pPr>
-            <a:r>
-              <a:rPr sz="1050" b="0">
-                <a:solidFill>
-                  <a:srgbClr val="2A3A44"/>
-                </a:solidFill>
-                <a:latin typeface="Arial"/>
-              </a:rPr>
-              <a:t>Modelled on four sites at five monitoring points each. Replace with our real counts.</a:t>
-            </a:r>
-          </a:p>
-        </p:txBody>
-      </p:sp>
-    </p:spTree>
-  </p:cSld>
-  <p:clrMapOvr>
-    <a:masterClrMapping/>
-  </p:clrMapOvr>
-</p:sld>
-</file>
-
-<file path=ppt/slides/slide6.xml><?xml version="1.0" encoding="utf-8"?>
-<p:sld xmlns:a="http://schemas.openxmlformats.org/drawingml/2006/main" xmlns:p="http://schemas.openxmlformats.org/presentationml/2006/main" xmlns:r="http://schemas.openxmlformats.org/officeDocument/2006/relationships">
-  <p:cSld>
-    <p:bg>
-      <p:bgPr>
-        <a:solidFill>
-          <a:srgbClr val="FAFBFC"/>
-        </a:solidFill>
-        <a:effectLst/>
-      </p:bgPr>
-    </p:bg>
-    <p:spTree>
-      <p:nvGrpSpPr>
-        <p:cNvPr id="1" name=""/>
-        <p:cNvGrpSpPr/>
-        <p:nvPr/>
-      </p:nvGrpSpPr>
-      <p:grpSpPr/>
-      <p:sp>
-        <p:nvSpPr>
-          <p:cNvPr id="2" name="Rectangle 1"/>
+              <a:t>SMARTSENSE</a:t>
+            </a:r>
+          </a:p>
+        </p:txBody>
+      </p:sp>
+      <p:sp>
+        <p:nvSpPr>
+          <p:cNvPr id="6" name="Rectangle 5"/>
           <p:cNvSpPr/>
           <p:nvPr/>
         </p:nvSpPr>
         <p:spPr>
           <a:xfrm>
-            <a:off x="822960" y="658368"/>
-            <a:ext cx="50292" cy="384048"/>
+            <a:off x="822960" y="2606040"/>
+            <a:ext cx="7498079" cy="713232"/>
           </a:xfrm>
           <a:prstGeom prst="rect">
             <a:avLst/>
           </a:prstGeom>
           <a:solidFill>
-            <a:srgbClr val="2B8A9E"/>
+            <a:srgbClr val="C4622D"/>
           </a:solidFill>
           <a:ln>
             <a:noFill/>
@@ -8817,14 +9957,14 @@
       </p:sp>
       <p:sp>
         <p:nvSpPr>
-          <p:cNvPr id="3" name="TextBox 2"/>
-          <p:cNvSpPr txBox="1"/>
-          <p:nvPr/>
-        </p:nvSpPr>
-        <p:spPr>
-          <a:xfrm>
-            <a:off x="1024128" y="658368"/>
-            <a:ext cx="5486400" cy="274320"/>
+          <p:cNvPr id="7" name="TextBox 6"/>
+          <p:cNvSpPr txBox="1"/>
+          <p:nvPr/>
+        </p:nvSpPr>
+        <p:spPr>
+          <a:xfrm>
+            <a:off x="8595359" y="2651760"/>
+            <a:ext cx="2560320" cy="548640"/>
           </a:xfrm>
           <a:prstGeom prst="rect">
             <a:avLst/>
@@ -8849,15 +9989,83 @@
               </a:spcAft>
             </a:pPr>
             <a:r>
-              <a:rPr sz="1200" b="1">
-                <a:solidFill>
-                  <a:srgbClr val="2B8A9E"/>
+              <a:rPr sz="3200" b="0">
+                <a:solidFill>
+                  <a:srgbClr val="FAFBFC"/>
+                </a:solidFill>
+                <a:latin typeface="Georgia"/>
+              </a:rPr>
+              <a:t>$18,256</a:t>
+            </a:r>
+          </a:p>
+        </p:txBody>
+      </p:sp>
+      <p:sp>
+        <p:nvSpPr>
+          <p:cNvPr id="8" name="TextBox 7"/>
+          <p:cNvSpPr txBox="1"/>
+          <p:nvPr/>
+        </p:nvSpPr>
+        <p:spPr>
+          <a:xfrm>
+            <a:off x="822960" y="3419856"/>
+            <a:ext cx="8229600" cy="274320"/>
+          </a:xfrm>
+          <a:prstGeom prst="rect">
+            <a:avLst/>
+          </a:prstGeom>
+          <a:noFill/>
+        </p:spPr>
+        <p:txBody>
+          <a:bodyPr wrap="square" anchor="t" lIns="0" rIns="0" tIns="0" bIns="0">
+            <a:spAutoFit/>
+          </a:bodyPr>
+          <a:lstStyle/>
+          <a:p>
+            <a:pPr algn="l">
+              <a:lnSpc>
+                <a:spcPct val="100000"/>
+              </a:lnSpc>
+              <a:spcBef>
+                <a:spcPts val="0"/>
+              </a:spcBef>
+              <a:spcAft>
+                <a:spcPts val="0"/>
+              </a:spcAft>
+            </a:pPr>
+            <a:r>
+              <a:rPr sz="1200" b="0">
+                <a:solidFill>
+                  <a:srgbClr val="8EA2AB"/>
                 </a:solidFill>
                 <a:latin typeface="Arial"/>
               </a:rPr>
-              <a:t>05</a:t>
-            </a:r>
-          </a:p>
+              <a:t>$9,202 first year   +   $5,304 subscriptions   +   $3,750 NIST recertification</a:t>
+            </a:r>
+          </a:p>
+        </p:txBody>
+      </p:sp>
+      <p:sp>
+        <p:nvSpPr>
+          <p:cNvPr id="9" name="TextBox 8"/>
+          <p:cNvSpPr txBox="1"/>
+          <p:nvPr/>
+        </p:nvSpPr>
+        <p:spPr>
+          <a:xfrm>
+            <a:off x="822960" y="4114800"/>
+            <a:ext cx="3657600" cy="274320"/>
+          </a:xfrm>
+          <a:prstGeom prst="rect">
+            <a:avLst/>
+          </a:prstGeom>
+          <a:noFill/>
+        </p:spPr>
+        <p:txBody>
+          <a:bodyPr wrap="square" anchor="t" lIns="0" rIns="0" tIns="0" bIns="0">
+            <a:spAutoFit/>
+          </a:bodyPr>
+          <a:lstStyle/>
           <a:p>
             <a:pPr algn="l">
               <a:lnSpc>
@@ -8871,350 +10079,33 @@
               </a:spcAft>
             </a:pPr>
             <a:r>
-              <a:rPr sz="1200" b="0">
-                <a:solidFill>
-                  <a:srgbClr val="637782"/>
+              <a:rPr sz="1150" b="1">
+                <a:solidFill>
+                  <a:srgbClr val="7FC4D2"/>
                 </a:solidFill>
                 <a:latin typeface="Arial"/>
               </a:rPr>
-              <a:t>   INSTALLATION</a:t>
-            </a:r>
-          </a:p>
-        </p:txBody>
-      </p:sp>
-      <p:sp>
-        <p:nvSpPr>
-          <p:cNvPr id="4" name="TextBox 3"/>
-          <p:cNvSpPr txBox="1"/>
-          <p:nvPr/>
-        </p:nvSpPr>
-        <p:spPr>
-          <a:xfrm>
-            <a:off x="822960" y="1170432"/>
-            <a:ext cx="10545775" cy="868680"/>
-          </a:xfrm>
-          <a:prstGeom prst="rect">
-            <a:avLst/>
-          </a:prstGeom>
-          <a:noFill/>
-        </p:spPr>
-        <p:txBody>
-          <a:bodyPr wrap="square" anchor="t" lIns="0" rIns="0" tIns="0" bIns="0">
-            <a:spAutoFit/>
-          </a:bodyPr>
-          <a:lstStyle/>
-          <a:p>
-            <a:pPr algn="l">
-              <a:lnSpc>
-                <a:spcPct val="105000"/>
-              </a:lnSpc>
-              <a:spcBef>
-                <a:spcPts val="0"/>
-              </a:spcBef>
-              <a:spcAft>
-                <a:spcPts val="0"/>
-              </a:spcAft>
-            </a:pPr>
-            <a:r>
-              <a:rPr sz="3300" b="0">
-                <a:solidFill>
-                  <a:srgbClr val="121E25"/>
-                </a:solidFill>
-                <a:latin typeface="Georgia"/>
-              </a:rPr>
-              <a:t>Wall power, and a probe through the door seal</a:t>
-            </a:r>
-          </a:p>
-        </p:txBody>
-      </p:sp>
-      <p:sp>
-        <p:nvSpPr>
-          <p:cNvPr id="5" name="TextBox 4"/>
-          <p:cNvSpPr txBox="1"/>
-          <p:nvPr/>
-        </p:nvSpPr>
-        <p:spPr>
-          <a:xfrm>
-            <a:off x="822960" y="2194560"/>
-            <a:ext cx="5486400" cy="292608"/>
-          </a:xfrm>
-          <a:prstGeom prst="rect">
-            <a:avLst/>
-          </a:prstGeom>
-          <a:noFill/>
-        </p:spPr>
-        <p:txBody>
-          <a:bodyPr wrap="square" anchor="t" lIns="0" rIns="0" tIns="0" bIns="0">
-            <a:spAutoFit/>
-          </a:bodyPr>
-          <a:lstStyle/>
-          <a:p>
-            <a:pPr algn="l">
-              <a:lnSpc>
-                <a:spcPct val="100000"/>
-              </a:lnSpc>
-              <a:spcBef>
-                <a:spcPts val="0"/>
-              </a:spcBef>
-              <a:spcAft>
-                <a:spcPts val="0"/>
-              </a:spcAft>
-            </a:pPr>
-            <a:r>
-              <a:rPr sz="1600" b="1">
-                <a:solidFill>
-                  <a:srgbClr val="121E25"/>
-                </a:solidFill>
-                <a:latin typeface="Arial"/>
-              </a:rPr>
-              <a:t>Mains powered</a:t>
-            </a:r>
-          </a:p>
-        </p:txBody>
-      </p:sp>
-      <p:sp>
-        <p:nvSpPr>
-          <p:cNvPr id="6" name="TextBox 5"/>
-          <p:cNvSpPr txBox="1"/>
-          <p:nvPr/>
-        </p:nvSpPr>
-        <p:spPr>
-          <a:xfrm>
-            <a:off x="822960" y="2523744"/>
-            <a:ext cx="5394960" cy="685800"/>
-          </a:xfrm>
-          <a:prstGeom prst="rect">
-            <a:avLst/>
-          </a:prstGeom>
-          <a:noFill/>
-        </p:spPr>
-        <p:txBody>
-          <a:bodyPr wrap="square" anchor="t" lIns="0" rIns="0" tIns="0" bIns="0">
-            <a:spAutoFit/>
-          </a:bodyPr>
-          <a:lstStyle/>
-          <a:p>
-            <a:pPr algn="l">
-              <a:lnSpc>
-                <a:spcPct val="135000"/>
-              </a:lnSpc>
-              <a:spcBef>
-                <a:spcPts val="0"/>
-              </a:spcBef>
-              <a:spcAft>
-                <a:spcPts val="0"/>
-              </a:spcAft>
-            </a:pPr>
-            <a:r>
-              <a:rPr sz="1250" b="0">
-                <a:solidFill>
-                  <a:srgbClr val="637782"/>
-                </a:solidFill>
-                <a:latin typeface="Arial"/>
-              </a:rPr>
-              <a:t>Freezers and server rooms both have power. No batteries to manage, and no dead sensor because nobody swapped a cell.</a:t>
-            </a:r>
-          </a:p>
-        </p:txBody>
-      </p:sp>
-      <p:sp>
-        <p:nvSpPr>
-          <p:cNvPr id="7" name="TextBox 6"/>
-          <p:cNvSpPr txBox="1"/>
-          <p:nvPr/>
-        </p:nvSpPr>
-        <p:spPr>
-          <a:xfrm>
-            <a:off x="822960" y="3401568"/>
-            <a:ext cx="5486400" cy="292608"/>
-          </a:xfrm>
-          <a:prstGeom prst="rect">
-            <a:avLst/>
-          </a:prstGeom>
-          <a:noFill/>
-        </p:spPr>
-        <p:txBody>
-          <a:bodyPr wrap="square" anchor="t" lIns="0" rIns="0" tIns="0" bIns="0">
-            <a:spAutoFit/>
-          </a:bodyPr>
-          <a:lstStyle/>
-          <a:p>
-            <a:pPr algn="l">
-              <a:lnSpc>
-                <a:spcPct val="100000"/>
-              </a:lnSpc>
-              <a:spcBef>
-                <a:spcPts val="0"/>
-              </a:spcBef>
-              <a:spcAft>
-                <a:spcPts val="0"/>
-              </a:spcAft>
-            </a:pPr>
-            <a:r>
-              <a:rPr sz="1600" b="1">
-                <a:solidFill>
-                  <a:srgbClr val="121E25"/>
-                </a:solidFill>
-                <a:latin typeface="Arial"/>
-              </a:rPr>
-              <a:t>Probe through the gasket</a:t>
-            </a:r>
-          </a:p>
-        </p:txBody>
-      </p:sp>
-      <p:sp>
-        <p:nvSpPr>
-          <p:cNvPr id="8" name="TextBox 7"/>
-          <p:cNvSpPr txBox="1"/>
-          <p:nvPr/>
-        </p:nvSpPr>
-        <p:spPr>
-          <a:xfrm>
-            <a:off x="822960" y="3730752"/>
-            <a:ext cx="5394960" cy="685800"/>
-          </a:xfrm>
-          <a:prstGeom prst="rect">
-            <a:avLst/>
-          </a:prstGeom>
-          <a:noFill/>
-        </p:spPr>
-        <p:txBody>
-          <a:bodyPr wrap="square" anchor="t" lIns="0" rIns="0" tIns="0" bIns="0">
-            <a:spAutoFit/>
-          </a:bodyPr>
-          <a:lstStyle/>
-          <a:p>
-            <a:pPr algn="l">
-              <a:lnSpc>
-                <a:spcPct val="135000"/>
-              </a:lnSpc>
-              <a:spcBef>
-                <a:spcPts val="0"/>
-              </a:spcBef>
-              <a:spcAft>
-                <a:spcPts val="0"/>
-              </a:spcAft>
-            </a:pPr>
-            <a:r>
-              <a:rPr sz="1250" b="0">
-                <a:solidFill>
-                  <a:srgbClr val="637782"/>
-                </a:solidFill>
-                <a:latin typeface="Arial"/>
-              </a:rPr>
-              <a:t>A flat cable passes through the door seal without compromising it. Nothing gets drilled, nothing gets modified.</a:t>
-            </a:r>
-          </a:p>
-        </p:txBody>
-      </p:sp>
-      <p:sp>
-        <p:nvSpPr>
-          <p:cNvPr id="9" name="TextBox 8"/>
-          <p:cNvSpPr txBox="1"/>
-          <p:nvPr/>
-        </p:nvSpPr>
-        <p:spPr>
-          <a:xfrm>
-            <a:off x="822960" y="4608576"/>
-            <a:ext cx="5486400" cy="292608"/>
-          </a:xfrm>
-          <a:prstGeom prst="rect">
-            <a:avLst/>
-          </a:prstGeom>
-          <a:noFill/>
-        </p:spPr>
-        <p:txBody>
-          <a:bodyPr wrap="square" anchor="t" lIns="0" rIns="0" tIns="0" bIns="0">
-            <a:spAutoFit/>
-          </a:bodyPr>
-          <a:lstStyle/>
-          <a:p>
-            <a:pPr algn="l">
-              <a:lnSpc>
-                <a:spcPct val="100000"/>
-              </a:lnSpc>
-              <a:spcBef>
-                <a:spcPts val="0"/>
-              </a:spcBef>
-              <a:spcAft>
-                <a:spcPts val="0"/>
-              </a:spcAft>
-            </a:pPr>
-            <a:r>
-              <a:rPr sz="1600" b="1">
-                <a:solidFill>
-                  <a:srgbClr val="121E25"/>
-                </a:solidFill>
-                <a:latin typeface="Arial"/>
-              </a:rPr>
-              <a:t>Enclosure I print myself</a:t>
-            </a:r>
-          </a:p>
-        </p:txBody>
-      </p:sp>
-      <p:sp>
-        <p:nvSpPr>
-          <p:cNvPr id="10" name="TextBox 9"/>
-          <p:cNvSpPr txBox="1"/>
-          <p:nvPr/>
-        </p:nvSpPr>
-        <p:spPr>
-          <a:xfrm>
-            <a:off x="822960" y="4937760"/>
-            <a:ext cx="5394960" cy="685800"/>
-          </a:xfrm>
-          <a:prstGeom prst="rect">
-            <a:avLst/>
-          </a:prstGeom>
-          <a:noFill/>
-        </p:spPr>
-        <p:txBody>
-          <a:bodyPr wrap="square" anchor="t" lIns="0" rIns="0" tIns="0" bIns="0">
-            <a:spAutoFit/>
-          </a:bodyPr>
-          <a:lstStyle/>
-          <a:p>
-            <a:pPr algn="l">
-              <a:lnSpc>
-                <a:spcPct val="135000"/>
-              </a:lnSpc>
-              <a:spcBef>
-                <a:spcPts val="0"/>
-              </a:spcBef>
-              <a:spcAft>
-                <a:spcPts val="0"/>
-              </a:spcAft>
-            </a:pPr>
-            <a:r>
-              <a:rPr sz="1250" b="0">
-                <a:solidFill>
-                  <a:srgbClr val="637782"/>
-                </a:solidFill>
-                <a:latin typeface="Arial"/>
-              </a:rPr>
-              <a:t>About $10, and I can change the shape for whatever mounting a site needs.</a:t>
-            </a:r>
-          </a:p>
-        </p:txBody>
-      </p:sp>
-      <p:sp>
-        <p:nvSpPr>
-          <p:cNvPr id="11" name="Rounded Rectangle 10"/>
+              <a:t>MINE</a:t>
+            </a:r>
+          </a:p>
+        </p:txBody>
+      </p:sp>
+      <p:sp>
+        <p:nvSpPr>
+          <p:cNvPr id="10" name="Rectangle 9"/>
           <p:cNvSpPr/>
           <p:nvPr/>
         </p:nvSpPr>
         <p:spPr>
           <a:xfrm>
-            <a:off x="6812280" y="2148840"/>
-            <a:ext cx="4526280" cy="3246120"/>
-          </a:xfrm>
-          <a:prstGeom prst="roundRect">
-            <a:avLst>
-              <a:gd name="adj" fmla="val 3000"/>
-            </a:avLst>
+            <a:off x="822960" y="4434840"/>
+            <a:ext cx="908857861469" cy="713232"/>
+          </a:xfrm>
+          <a:prstGeom prst="rect">
+            <a:avLst/>
           </a:prstGeom>
           <a:solidFill>
-            <a:srgbClr val="F0F4F5"/>
+            <a:srgbClr val="2B8A9E"/>
           </a:solidFill>
           <a:ln>
             <a:noFill/>
@@ -9245,14 +10136,59 @@
       </p:sp>
       <p:sp>
         <p:nvSpPr>
+          <p:cNvPr id="11" name="TextBox 10"/>
+          <p:cNvSpPr txBox="1"/>
+          <p:nvPr/>
+        </p:nvSpPr>
+        <p:spPr>
+          <a:xfrm>
+            <a:off x="2057400" y="4480560"/>
+            <a:ext cx="2560320" cy="548640"/>
+          </a:xfrm>
+          <a:prstGeom prst="rect">
+            <a:avLst/>
+          </a:prstGeom>
+          <a:noFill/>
+        </p:spPr>
+        <p:txBody>
+          <a:bodyPr wrap="square" anchor="t" lIns="0" rIns="0" tIns="0" bIns="0">
+            <a:spAutoFit/>
+          </a:bodyPr>
+          <a:lstStyle/>
+          <a:p>
+            <a:pPr algn="l">
+              <a:lnSpc>
+                <a:spcPct val="100000"/>
+              </a:lnSpc>
+              <a:spcBef>
+                <a:spcPts val="0"/>
+              </a:spcBef>
+              <a:spcAft>
+                <a:spcPts val="0"/>
+              </a:spcAft>
+            </a:pPr>
+            <a:r>
+              <a:rPr sz="3200" b="0">
+                <a:solidFill>
+                  <a:srgbClr val="FAFBFC"/>
+                </a:solidFill>
+                <a:latin typeface="Georgia"/>
+              </a:rPr>
+              <a:t>$2,420</a:t>
+            </a:r>
+          </a:p>
+        </p:txBody>
+      </p:sp>
+      <p:sp>
+        <p:nvSpPr>
           <p:cNvPr id="12" name="TextBox 11"/>
           <p:cNvSpPr txBox="1"/>
           <p:nvPr/>
         </p:nvSpPr>
         <p:spPr>
           <a:xfrm>
-            <a:off x="7178040" y="2395728"/>
-            <a:ext cx="3840480" cy="320040"/>
+            <a:off x="822960" y="5248656"/>
+            <a:ext cx="8229600" cy="274320"/>
           </a:xfrm>
           <a:prstGeom prst="rect">
             <a:avLst/>
@@ -9277,87 +10213,245 @@
               </a:spcAft>
             </a:pPr>
             <a:r>
-              <a:rPr sz="1150" b="1">
-                <a:solidFill>
-                  <a:srgbClr val="C4622D"/>
+              <a:rPr sz="1200" b="0">
+                <a:solidFill>
+                  <a:srgbClr val="8EA2AB"/>
                 </a:solidFill>
                 <a:latin typeface="Arial"/>
               </a:rPr>
-              <a:t>WHY NOT BATTERIES</a:t>
-            </a:r>
-          </a:p>
-        </p:txBody>
-      </p:sp>
-      <p:sp>
-        <p:nvSpPr>
-          <p:cNvPr id="13" name="TextBox 12"/>
-          <p:cNvSpPr txBox="1"/>
-          <p:nvPr/>
-        </p:nvSpPr>
-        <p:spPr>
-          <a:xfrm>
-            <a:off x="7178040" y="2816352"/>
-            <a:ext cx="3840480" cy="2377440"/>
-          </a:xfrm>
-          <a:prstGeom prst="rect">
-            <a:avLst/>
-          </a:prstGeom>
-          <a:noFill/>
-        </p:spPr>
-        <p:txBody>
-          <a:bodyPr wrap="square" anchor="t" lIns="0" rIns="0" tIns="0" bIns="0">
-            <a:spAutoFit/>
-          </a:bodyPr>
-          <a:lstStyle/>
-          <a:p>
-            <a:pPr algn="l">
-              <a:lnSpc>
-                <a:spcPct val="135000"/>
-              </a:lnSpc>
-              <a:spcBef>
-                <a:spcPts val="0"/>
-              </a:spcBef>
-              <a:spcAft>
-                <a:spcPts val="0"/>
-              </a:spcAft>
-            </a:pPr>
-            <a:r>
-              <a:rPr sz="1350" b="0">
-                <a:solidFill>
-                  <a:srgbClr val="121E25"/>
+              <a:t>$1,050 hardware   +   $650 calibration   +   $720 hosting</a:t>
+            </a:r>
+          </a:p>
+        </p:txBody>
+      </p:sp>
+      <p:sp>
+        <p:nvSpPr>
+          <p:cNvPr id="13" name="Rectangle 12"/>
+          <p:cNvSpPr/>
+          <p:nvPr/>
+        </p:nvSpPr>
+        <p:spPr>
+          <a:xfrm>
+            <a:off x="9829800" y="2286000"/>
+            <a:ext cx="13716" cy="3063240"/>
+          </a:xfrm>
+          <a:prstGeom prst="rect">
+            <a:avLst/>
+          </a:prstGeom>
+          <a:solidFill>
+            <a:srgbClr val="2A3A44"/>
+          </a:solidFill>
+          <a:ln>
+            <a:noFill/>
+          </a:ln>
+          <a:effectLst/>
+        </p:spPr>
+        <p:style>
+          <a:lnRef idx="1">
+            <a:schemeClr val="accent1"/>
+          </a:lnRef>
+          <a:fillRef idx="3">
+            <a:schemeClr val="accent1"/>
+          </a:fillRef>
+          <a:effectRef idx="2">
+            <a:schemeClr val="accent1"/>
+          </a:effectRef>
+          <a:fontRef idx="minor">
+            <a:schemeClr val="lt1"/>
+          </a:fontRef>
+        </p:style>
+        <p:txBody>
+          <a:bodyPr rtlCol="0" anchor="ctr"/>
+          <a:lstStyle/>
+          <a:p>
+            <a:pPr algn="ctr"/>
+          </a:p>
+        </p:txBody>
+      </p:sp>
+      <p:sp>
+        <p:nvSpPr>
+          <p:cNvPr id="14" name="TextBox 13"/>
+          <p:cNvSpPr txBox="1"/>
+          <p:nvPr/>
+        </p:nvSpPr>
+        <p:spPr>
+          <a:xfrm>
+            <a:off x="10149840" y="2377440"/>
+            <a:ext cx="2103120" cy="1463040"/>
+          </a:xfrm>
+          <a:prstGeom prst="rect">
+            <a:avLst/>
+          </a:prstGeom>
+          <a:noFill/>
+        </p:spPr>
+        <p:txBody>
+          <a:bodyPr wrap="square" anchor="t" lIns="0" rIns="0" tIns="0" bIns="0">
+            <a:spAutoFit/>
+          </a:bodyPr>
+          <a:lstStyle/>
+          <a:p>
+            <a:pPr algn="l">
+              <a:lnSpc>
+                <a:spcPct val="130000"/>
+              </a:lnSpc>
+              <a:spcBef>
+                <a:spcPts val="0"/>
+              </a:spcBef>
+              <a:spcAft>
+                <a:spcPts val="0"/>
+              </a:spcAft>
+            </a:pPr>
+            <a:r>
+              <a:rPr sz="3000" b="0">
+                <a:solidFill>
+                  <a:srgbClr val="7FC4D2"/>
+                </a:solidFill>
+                <a:latin typeface="Georgia"/>
+              </a:rPr>
+              <a:t>$15,836</a:t>
+            </a:r>
+          </a:p>
+          <a:p>
+            <a:pPr algn="l">
+              <a:lnSpc>
+                <a:spcPct val="130000"/>
+              </a:lnSpc>
+              <a:spcBef>
+                <a:spcPts val="800"/>
+              </a:spcBef>
+              <a:spcAft>
+                <a:spcPts val="0"/>
+              </a:spcAft>
+            </a:pPr>
+            <a:r>
+              <a:rPr sz="1200" b="0">
+                <a:solidFill>
+                  <a:srgbClr val="8EA2AB"/>
                 </a:solidFill>
                 <a:latin typeface="Arial"/>
               </a:rPr>
-              <a:t>Lithium cells lose 20–40% of their capacity at freezer temperatures.</a:t>
-            </a:r>
-          </a:p>
-          <a:p>
-            <a:pPr algn="l">
-              <a:lnSpc>
-                <a:spcPct val="135000"/>
-              </a:lnSpc>
-              <a:spcBef>
-                <a:spcPts val="1000"/>
-              </a:spcBef>
-              <a:spcAft>
-                <a:spcPts val="0"/>
-              </a:spcAft>
-            </a:pPr>
-            <a:r>
-              <a:rPr sz="1250" b="0">
-                <a:solidFill>
-                  <a:srgbClr val="637782"/>
+              <a:t>saved on this
+site alone</a:t>
+            </a:r>
+          </a:p>
+        </p:txBody>
+      </p:sp>
+      <p:sp>
+        <p:nvSpPr>
+          <p:cNvPr id="15" name="TextBox 14"/>
+          <p:cNvSpPr txBox="1"/>
+          <p:nvPr/>
+        </p:nvSpPr>
+        <p:spPr>
+          <a:xfrm>
+            <a:off x="10149840" y="4114800"/>
+            <a:ext cx="2103120" cy="1280160"/>
+          </a:xfrm>
+          <a:prstGeom prst="rect">
+            <a:avLst/>
+          </a:prstGeom>
+          <a:noFill/>
+        </p:spPr>
+        <p:txBody>
+          <a:bodyPr wrap="square" anchor="t" lIns="0" rIns="0" tIns="0" bIns="0">
+            <a:spAutoFit/>
+          </a:bodyPr>
+          <a:lstStyle/>
+          <a:p>
+            <a:pPr algn="l">
+              <a:lnSpc>
+                <a:spcPct val="130000"/>
+              </a:lnSpc>
+              <a:spcBef>
+                <a:spcPts val="0"/>
+              </a:spcBef>
+              <a:spcAft>
+                <a:spcPts val="0"/>
+              </a:spcAft>
+            </a:pPr>
+            <a:r>
+              <a:rPr sz="3000" b="0">
+                <a:solidFill>
+                  <a:srgbClr val="7FC4D2"/>
+                </a:solidFill>
+                <a:latin typeface="Georgia"/>
+              </a:rPr>
+              <a:t>87%</a:t>
+            </a:r>
+          </a:p>
+          <a:p>
+            <a:pPr algn="l">
+              <a:lnSpc>
+                <a:spcPct val="130000"/>
+              </a:lnSpc>
+              <a:spcBef>
+                <a:spcPts val="800"/>
+              </a:spcBef>
+              <a:spcAft>
+                <a:spcPts val="0"/>
+              </a:spcAft>
+            </a:pPr>
+            <a:r>
+              <a:rPr sz="1200" b="0">
+                <a:solidFill>
+                  <a:srgbClr val="8EA2AB"/>
                 </a:solidFill>
                 <a:latin typeface="Arial"/>
               </a:rPr>
-              <a:t>Every one of these installs is somewhere with a wall socket a few feet away. Running on mains removes an entire category of failure — and it's why I can report every few minutes instead of once an hour.</a:t>
-            </a:r>
-          </a:p>
-        </p:txBody>
-      </p:sp>
-      <p:sp>
-        <p:nvSpPr>
-          <p:cNvPr id="14" name="TextBox 13"/>
+              <a:t>lower over
+five years</a:t>
+            </a:r>
+          </a:p>
+        </p:txBody>
+      </p:sp>
+      <p:sp>
+        <p:nvSpPr>
+          <p:cNvPr id="16" name="TextBox 15"/>
+          <p:cNvSpPr txBox="1"/>
+          <p:nvPr/>
+        </p:nvSpPr>
+        <p:spPr>
+          <a:xfrm>
+            <a:off x="822960" y="5852160"/>
+            <a:ext cx="10545775" cy="457200"/>
+          </a:xfrm>
+          <a:prstGeom prst="rect">
+            <a:avLst/>
+          </a:prstGeom>
+          <a:noFill/>
+        </p:spPr>
+        <p:txBody>
+          <a:bodyPr wrap="square" anchor="t" lIns="0" rIns="0" tIns="0" bIns="0">
+            <a:spAutoFit/>
+          </a:bodyPr>
+          <a:lstStyle/>
+          <a:p>
+            <a:pPr algn="l">
+              <a:lnSpc>
+                <a:spcPct val="100000"/>
+              </a:lnSpc>
+              <a:spcBef>
+                <a:spcPts val="0"/>
+              </a:spcBef>
+              <a:spcAft>
+                <a:spcPts val="0"/>
+              </a:spcAft>
+            </a:pPr>
+            <a:r>
+              <a:rPr sz="1900" b="0">
+                <a:solidFill>
+                  <a:srgbClr val="FAFBFC"/>
+                </a:solidFill>
+                <a:latin typeface="Georgia"/>
+              </a:rPr>
+              <a:t>And this quote is for one new location. Every site after it widens the gap.</a:t>
+            </a:r>
+          </a:p>
+        </p:txBody>
+      </p:sp>
+      <p:sp>
+        <p:nvSpPr>
+          <p:cNvPr id="17" name="TextBox 16"/>
           <p:cNvSpPr txBox="1"/>
           <p:nvPr/>
         </p:nvSpPr>
@@ -9391,11 +10485,11 @@
             <a:r>
               <a:rPr sz="1050" b="0">
                 <a:solidFill>
-                  <a:srgbClr val="9EAFB7"/>
+                  <a:srgbClr val="2A3A44"/>
                 </a:solidFill>
                 <a:latin typeface="Arial"/>
               </a:rPr>
-              <a:t>Same hardware for warehouse freezers and server rooms — only the temperature limits differ.</a:t>
+              <a:t>Subscription held flat at today's rate. NIST recertified at 24 and 48 months, as quoted.</a:t>
             </a:r>
           </a:p>
         </p:txBody>
@@ -9532,7 +10626,7 @@
                 </a:solidFill>
                 <a:latin typeface="Arial"/>
               </a:rPr>
-              <a:t>   OPEN ITEMS</a:t>
+              <a:t>   INSTALLATION</a:t>
             </a:r>
           </a:p>
         </p:txBody>
@@ -9577,7 +10671,7 @@
                 </a:solidFill>
                 <a:latin typeface="Georgia"/>
               </a:rPr>
-              <a:t>What I still have to solve</a:t>
+              <a:t>Wall power, and a probe through the door seal</a:t>
             </a:r>
           </a:p>
         </p:txBody>
@@ -9590,8 +10684,8 @@
         </p:nvSpPr>
         <p:spPr>
           <a:xfrm>
-            <a:off x="822960" y="2212848"/>
-            <a:ext cx="10424160" cy="292608"/>
+            <a:off x="822960" y="2194560"/>
+            <a:ext cx="5486400" cy="292608"/>
           </a:xfrm>
           <a:prstGeom prst="rect">
             <a:avLst/>
@@ -9622,7 +10716,7 @@
                 </a:solidFill>
                 <a:latin typeface="Arial"/>
               </a:rPr>
-              <a:t>The probe isn't accurate enough for frozen</a:t>
+              <a:t>Mains powered</a:t>
             </a:r>
           </a:p>
         </p:txBody>
@@ -9635,8 +10729,8 @@
         </p:nvSpPr>
         <p:spPr>
           <a:xfrm>
-            <a:off x="822960" y="2560320"/>
-            <a:ext cx="10241280" cy="566928"/>
+            <a:off x="822960" y="2523744"/>
+            <a:ext cx="5394960" cy="685800"/>
           </a:xfrm>
           <a:prstGeom prst="rect">
             <a:avLst/>
@@ -9667,27 +10761,209 @@
                 </a:solidFill>
                 <a:latin typeface="Arial"/>
               </a:rPr>
-              <a:t>The current sensor is rated ±0.9°F only above 14°F. For freezers I move to an RTD probe — ±0.27°F across the whole range, $8–15 a unit. Chilled produce is fine as-is.</a:t>
-            </a:r>
-          </a:p>
-        </p:txBody>
-      </p:sp>
-      <p:sp>
-        <p:nvSpPr>
-          <p:cNvPr id="7" name="Rectangle 6"/>
+              <a:t>Freezers and server rooms both have power. No batteries to manage, and no dead sensor because nobody swapped a cell.</a:t>
+            </a:r>
+          </a:p>
+        </p:txBody>
+      </p:sp>
+      <p:sp>
+        <p:nvSpPr>
+          <p:cNvPr id="7" name="TextBox 6"/>
+          <p:cNvSpPr txBox="1"/>
+          <p:nvPr/>
+        </p:nvSpPr>
+        <p:spPr>
+          <a:xfrm>
+            <a:off x="822960" y="3401568"/>
+            <a:ext cx="5486400" cy="292608"/>
+          </a:xfrm>
+          <a:prstGeom prst="rect">
+            <a:avLst/>
+          </a:prstGeom>
+          <a:noFill/>
+        </p:spPr>
+        <p:txBody>
+          <a:bodyPr wrap="square" anchor="t" lIns="0" rIns="0" tIns="0" bIns="0">
+            <a:spAutoFit/>
+          </a:bodyPr>
+          <a:lstStyle/>
+          <a:p>
+            <a:pPr algn="l">
+              <a:lnSpc>
+                <a:spcPct val="100000"/>
+              </a:lnSpc>
+              <a:spcBef>
+                <a:spcPts val="0"/>
+              </a:spcBef>
+              <a:spcAft>
+                <a:spcPts val="0"/>
+              </a:spcAft>
+            </a:pPr>
+            <a:r>
+              <a:rPr sz="1600" b="1">
+                <a:solidFill>
+                  <a:srgbClr val="121E25"/>
+                </a:solidFill>
+                <a:latin typeface="Arial"/>
+              </a:rPr>
+              <a:t>Probe through the gasket</a:t>
+            </a:r>
+          </a:p>
+        </p:txBody>
+      </p:sp>
+      <p:sp>
+        <p:nvSpPr>
+          <p:cNvPr id="8" name="TextBox 7"/>
+          <p:cNvSpPr txBox="1"/>
+          <p:nvPr/>
+        </p:nvSpPr>
+        <p:spPr>
+          <a:xfrm>
+            <a:off x="822960" y="3730752"/>
+            <a:ext cx="5394960" cy="685800"/>
+          </a:xfrm>
+          <a:prstGeom prst="rect">
+            <a:avLst/>
+          </a:prstGeom>
+          <a:noFill/>
+        </p:spPr>
+        <p:txBody>
+          <a:bodyPr wrap="square" anchor="t" lIns="0" rIns="0" tIns="0" bIns="0">
+            <a:spAutoFit/>
+          </a:bodyPr>
+          <a:lstStyle/>
+          <a:p>
+            <a:pPr algn="l">
+              <a:lnSpc>
+                <a:spcPct val="135000"/>
+              </a:lnSpc>
+              <a:spcBef>
+                <a:spcPts val="0"/>
+              </a:spcBef>
+              <a:spcAft>
+                <a:spcPts val="0"/>
+              </a:spcAft>
+            </a:pPr>
+            <a:r>
+              <a:rPr sz="1250" b="0">
+                <a:solidFill>
+                  <a:srgbClr val="637782"/>
+                </a:solidFill>
+                <a:latin typeface="Arial"/>
+              </a:rPr>
+              <a:t>A flat cable passes through the door seal without compromising it. Nothing gets drilled, nothing gets modified.</a:t>
+            </a:r>
+          </a:p>
+        </p:txBody>
+      </p:sp>
+      <p:sp>
+        <p:nvSpPr>
+          <p:cNvPr id="9" name="TextBox 8"/>
+          <p:cNvSpPr txBox="1"/>
+          <p:nvPr/>
+        </p:nvSpPr>
+        <p:spPr>
+          <a:xfrm>
+            <a:off x="822960" y="4608576"/>
+            <a:ext cx="5486400" cy="292608"/>
+          </a:xfrm>
+          <a:prstGeom prst="rect">
+            <a:avLst/>
+          </a:prstGeom>
+          <a:noFill/>
+        </p:spPr>
+        <p:txBody>
+          <a:bodyPr wrap="square" anchor="t" lIns="0" rIns="0" tIns="0" bIns="0">
+            <a:spAutoFit/>
+          </a:bodyPr>
+          <a:lstStyle/>
+          <a:p>
+            <a:pPr algn="l">
+              <a:lnSpc>
+                <a:spcPct val="100000"/>
+              </a:lnSpc>
+              <a:spcBef>
+                <a:spcPts val="0"/>
+              </a:spcBef>
+              <a:spcAft>
+                <a:spcPts val="0"/>
+              </a:spcAft>
+            </a:pPr>
+            <a:r>
+              <a:rPr sz="1600" b="1">
+                <a:solidFill>
+                  <a:srgbClr val="121E25"/>
+                </a:solidFill>
+                <a:latin typeface="Arial"/>
+              </a:rPr>
+              <a:t>Enclosure I print myself</a:t>
+            </a:r>
+          </a:p>
+        </p:txBody>
+      </p:sp>
+      <p:sp>
+        <p:nvSpPr>
+          <p:cNvPr id="10" name="TextBox 9"/>
+          <p:cNvSpPr txBox="1"/>
+          <p:nvPr/>
+        </p:nvSpPr>
+        <p:spPr>
+          <a:xfrm>
+            <a:off x="822960" y="4937760"/>
+            <a:ext cx="5394960" cy="685800"/>
+          </a:xfrm>
+          <a:prstGeom prst="rect">
+            <a:avLst/>
+          </a:prstGeom>
+          <a:noFill/>
+        </p:spPr>
+        <p:txBody>
+          <a:bodyPr wrap="square" anchor="t" lIns="0" rIns="0" tIns="0" bIns="0">
+            <a:spAutoFit/>
+          </a:bodyPr>
+          <a:lstStyle/>
+          <a:p>
+            <a:pPr algn="l">
+              <a:lnSpc>
+                <a:spcPct val="135000"/>
+              </a:lnSpc>
+              <a:spcBef>
+                <a:spcPts val="0"/>
+              </a:spcBef>
+              <a:spcAft>
+                <a:spcPts val="0"/>
+              </a:spcAft>
+            </a:pPr>
+            <a:r>
+              <a:rPr sz="1250" b="0">
+                <a:solidFill>
+                  <a:srgbClr val="637782"/>
+                </a:solidFill>
+                <a:latin typeface="Arial"/>
+              </a:rPr>
+              <a:t>About $10, and I can change the shape for whatever mounting a site needs.</a:t>
+            </a:r>
+          </a:p>
+        </p:txBody>
+      </p:sp>
+      <p:sp>
+        <p:nvSpPr>
+          <p:cNvPr id="11" name="Rounded Rectangle 10"/>
           <p:cNvSpPr/>
           <p:nvPr/>
         </p:nvSpPr>
         <p:spPr>
           <a:xfrm>
-            <a:off x="822960" y="3255263"/>
-            <a:ext cx="10545775" cy="13716"/>
-          </a:xfrm>
-          <a:prstGeom prst="rect">
-            <a:avLst/>
+            <a:off x="6812280" y="2148840"/>
+            <a:ext cx="4526280" cy="3246120"/>
+          </a:xfrm>
+          <a:prstGeom prst="roundRect">
+            <a:avLst>
+              <a:gd name="adj" fmla="val 3000"/>
+            </a:avLst>
           </a:prstGeom>
           <a:solidFill>
-            <a:srgbClr val="DDE5E8"/>
+            <a:srgbClr val="F0F4F5"/>
           </a:solidFill>
           <a:ln>
             <a:noFill/>
@@ -9718,14 +10994,14 @@
       </p:sp>
       <p:sp>
         <p:nvSpPr>
-          <p:cNvPr id="8" name="TextBox 7"/>
-          <p:cNvSpPr txBox="1"/>
-          <p:nvPr/>
-        </p:nvSpPr>
-        <p:spPr>
-          <a:xfrm>
-            <a:off x="822960" y="3511296"/>
-            <a:ext cx="10424160" cy="292608"/>
+          <p:cNvPr id="12" name="TextBox 11"/>
+          <p:cNvSpPr txBox="1"/>
+          <p:nvPr/>
+        </p:nvSpPr>
+        <p:spPr>
+          <a:xfrm>
+            <a:off x="7178040" y="2395728"/>
+            <a:ext cx="3840480" cy="320040"/>
           </a:xfrm>
           <a:prstGeom prst="rect">
             <a:avLst/>
@@ -9750,45 +11026,67 @@
               </a:spcAft>
             </a:pPr>
             <a:r>
-              <a:rPr sz="1600" b="1">
+              <a:rPr sz="1150" b="1">
+                <a:solidFill>
+                  <a:srgbClr val="C4622D"/>
+                </a:solidFill>
+                <a:latin typeface="Arial"/>
+              </a:rPr>
+              <a:t>WHY NOT BATTERIES</a:t>
+            </a:r>
+          </a:p>
+        </p:txBody>
+      </p:sp>
+      <p:sp>
+        <p:nvSpPr>
+          <p:cNvPr id="13" name="TextBox 12"/>
+          <p:cNvSpPr txBox="1"/>
+          <p:nvPr/>
+        </p:nvSpPr>
+        <p:spPr>
+          <a:xfrm>
+            <a:off x="7178040" y="2816352"/>
+            <a:ext cx="3840480" cy="2377440"/>
+          </a:xfrm>
+          <a:prstGeom prst="rect">
+            <a:avLst/>
+          </a:prstGeom>
+          <a:noFill/>
+        </p:spPr>
+        <p:txBody>
+          <a:bodyPr wrap="square" anchor="t" lIns="0" rIns="0" tIns="0" bIns="0">
+            <a:spAutoFit/>
+          </a:bodyPr>
+          <a:lstStyle/>
+          <a:p>
+            <a:pPr algn="l">
+              <a:lnSpc>
+                <a:spcPct val="135000"/>
+              </a:lnSpc>
+              <a:spcBef>
+                <a:spcPts val="0"/>
+              </a:spcBef>
+              <a:spcAft>
+                <a:spcPts val="0"/>
+              </a:spcAft>
+            </a:pPr>
+            <a:r>
+              <a:rPr sz="1350" b="0">
                 <a:solidFill>
                   <a:srgbClr val="121E25"/>
                 </a:solidFill>
                 <a:latin typeface="Arial"/>
               </a:rPr>
-              <a:t>Calibration has to be auditable</a:t>
-            </a:r>
-          </a:p>
-        </p:txBody>
-      </p:sp>
-      <p:sp>
-        <p:nvSpPr>
-          <p:cNvPr id="9" name="TextBox 8"/>
-          <p:cNvSpPr txBox="1"/>
-          <p:nvPr/>
-        </p:nvSpPr>
-        <p:spPr>
-          <a:xfrm>
-            <a:off x="822960" y="3858768"/>
-            <a:ext cx="10241280" cy="566928"/>
-          </a:xfrm>
-          <a:prstGeom prst="rect">
-            <a:avLst/>
-          </a:prstGeom>
-          <a:noFill/>
-        </p:spPr>
-        <p:txBody>
-          <a:bodyPr wrap="square" anchor="t" lIns="0" rIns="0" tIns="0" bIns="0">
-            <a:spAutoFit/>
-          </a:bodyPr>
-          <a:lstStyle/>
+              <a:t>Lithium cells lose 20–40% of their capacity at freezer temperatures.</a:t>
+            </a:r>
+          </a:p>
           <a:p>
             <a:pPr algn="l">
               <a:lnSpc>
                 <a:spcPct val="135000"/>
               </a:lnSpc>
               <a:spcBef>
-                <a:spcPts val="0"/>
+                <a:spcPts val="1000"/>
               </a:spcBef>
               <a:spcAft>
                 <a:spcPts val="0"/>
@@ -9801,27 +11099,98 @@
                 </a:solidFill>
                 <a:latin typeface="Arial"/>
               </a:rPr>
-              <a:t>One NIST-traceable reference thermometer, roughly $350, calibrates the whole fleet with documentation an auditor will accept. Their $125 per sensor buys the same thing, over and over.</a:t>
-            </a:r>
-          </a:p>
-        </p:txBody>
-      </p:sp>
-      <p:sp>
-        <p:nvSpPr>
-          <p:cNvPr id="10" name="Rectangle 9"/>
+              <a:t>Every one of these installs is somewhere with a wall socket a few feet away. Running on mains removes an entire category of failure — and it's why I can report every few minutes instead of once an hour.</a:t>
+            </a:r>
+          </a:p>
+        </p:txBody>
+      </p:sp>
+      <p:sp>
+        <p:nvSpPr>
+          <p:cNvPr id="14" name="TextBox 13"/>
+          <p:cNvSpPr txBox="1"/>
+          <p:nvPr/>
+        </p:nvSpPr>
+        <p:spPr>
+          <a:xfrm>
+            <a:off x="822960" y="6199632"/>
+            <a:ext cx="10545775" cy="292608"/>
+          </a:xfrm>
+          <a:prstGeom prst="rect">
+            <a:avLst/>
+          </a:prstGeom>
+          <a:noFill/>
+        </p:spPr>
+        <p:txBody>
+          <a:bodyPr wrap="square" anchor="t" lIns="0" rIns="0" tIns="0" bIns="0">
+            <a:spAutoFit/>
+          </a:bodyPr>
+          <a:lstStyle/>
+          <a:p>
+            <a:pPr algn="l">
+              <a:lnSpc>
+                <a:spcPct val="100000"/>
+              </a:lnSpc>
+              <a:spcBef>
+                <a:spcPts val="0"/>
+              </a:spcBef>
+              <a:spcAft>
+                <a:spcPts val="0"/>
+              </a:spcAft>
+            </a:pPr>
+            <a:r>
+              <a:rPr sz="1050" b="0">
+                <a:solidFill>
+                  <a:srgbClr val="9EAFB7"/>
+                </a:solidFill>
+                <a:latin typeface="Arial"/>
+              </a:rPr>
+              <a:t>Same hardware for warehouse freezers and server rooms — only the temperature limits differ.</a:t>
+            </a:r>
+          </a:p>
+        </p:txBody>
+      </p:sp>
+    </p:spTree>
+  </p:cSld>
+  <p:clrMapOvr>
+    <a:masterClrMapping/>
+  </p:clrMapOvr>
+</p:sld>
+</file>
+
+<file path=ppt/slides/slide8.xml><?xml version="1.0" encoding="utf-8"?>
+<p:sld xmlns:a="http://schemas.openxmlformats.org/drawingml/2006/main" xmlns:p="http://schemas.openxmlformats.org/presentationml/2006/main" xmlns:r="http://schemas.openxmlformats.org/officeDocument/2006/relationships">
+  <p:cSld>
+    <p:bg>
+      <p:bgPr>
+        <a:solidFill>
+          <a:srgbClr val="FAFBFC"/>
+        </a:solidFill>
+        <a:effectLst/>
+      </p:bgPr>
+    </p:bg>
+    <p:spTree>
+      <p:nvGrpSpPr>
+        <p:cNvPr id="1" name=""/>
+        <p:cNvGrpSpPr/>
+        <p:nvPr/>
+      </p:nvGrpSpPr>
+      <p:grpSpPr/>
+      <p:sp>
+        <p:nvSpPr>
+          <p:cNvPr id="2" name="Rectangle 1"/>
           <p:cNvSpPr/>
           <p:nvPr/>
         </p:nvSpPr>
         <p:spPr>
           <a:xfrm>
-            <a:off x="822960" y="4553711"/>
-            <a:ext cx="10545775" cy="13716"/>
+            <a:off x="822960" y="658368"/>
+            <a:ext cx="50292" cy="384048"/>
           </a:xfrm>
           <a:prstGeom prst="rect">
             <a:avLst/>
           </a:prstGeom>
           <a:solidFill>
-            <a:srgbClr val="DDE5E8"/>
+            <a:srgbClr val="2B8A9E"/>
           </a:solidFill>
           <a:ln>
             <a:noFill/>
@@ -9852,13 +11221,125 @@
       </p:sp>
       <p:sp>
         <p:nvSpPr>
-          <p:cNvPr id="11" name="TextBox 10"/>
-          <p:cNvSpPr txBox="1"/>
-          <p:nvPr/>
-        </p:nvSpPr>
-        <p:spPr>
-          <a:xfrm>
-            <a:off x="822960" y="4809744"/>
+          <p:cNvPr id="3" name="TextBox 2"/>
+          <p:cNvSpPr txBox="1"/>
+          <p:nvPr/>
+        </p:nvSpPr>
+        <p:spPr>
+          <a:xfrm>
+            <a:off x="1024128" y="658368"/>
+            <a:ext cx="5486400" cy="274320"/>
+          </a:xfrm>
+          <a:prstGeom prst="rect">
+            <a:avLst/>
+          </a:prstGeom>
+          <a:noFill/>
+        </p:spPr>
+        <p:txBody>
+          <a:bodyPr wrap="square" anchor="t" lIns="0" rIns="0" tIns="0" bIns="0">
+            <a:spAutoFit/>
+          </a:bodyPr>
+          <a:lstStyle/>
+          <a:p>
+            <a:pPr algn="l">
+              <a:lnSpc>
+                <a:spcPct val="100000"/>
+              </a:lnSpc>
+              <a:spcBef>
+                <a:spcPts val="0"/>
+              </a:spcBef>
+              <a:spcAft>
+                <a:spcPts val="0"/>
+              </a:spcAft>
+            </a:pPr>
+            <a:r>
+              <a:rPr sz="1200" b="1">
+                <a:solidFill>
+                  <a:srgbClr val="2B8A9E"/>
+                </a:solidFill>
+                <a:latin typeface="Arial"/>
+              </a:rPr>
+              <a:t>07</a:t>
+            </a:r>
+          </a:p>
+          <a:p>
+            <a:pPr algn="l">
+              <a:lnSpc>
+                <a:spcPct val="100000"/>
+              </a:lnSpc>
+              <a:spcBef>
+                <a:spcPts val="0"/>
+              </a:spcBef>
+              <a:spcAft>
+                <a:spcPts val="0"/>
+              </a:spcAft>
+            </a:pPr>
+            <a:r>
+              <a:rPr sz="1200" b="0">
+                <a:solidFill>
+                  <a:srgbClr val="637782"/>
+                </a:solidFill>
+                <a:latin typeface="Arial"/>
+              </a:rPr>
+              <a:t>   OPEN ITEMS</a:t>
+            </a:r>
+          </a:p>
+        </p:txBody>
+      </p:sp>
+      <p:sp>
+        <p:nvSpPr>
+          <p:cNvPr id="4" name="TextBox 3"/>
+          <p:cNvSpPr txBox="1"/>
+          <p:nvPr/>
+        </p:nvSpPr>
+        <p:spPr>
+          <a:xfrm>
+            <a:off x="822960" y="1170432"/>
+            <a:ext cx="10545775" cy="868680"/>
+          </a:xfrm>
+          <a:prstGeom prst="rect">
+            <a:avLst/>
+          </a:prstGeom>
+          <a:noFill/>
+        </p:spPr>
+        <p:txBody>
+          <a:bodyPr wrap="square" anchor="t" lIns="0" rIns="0" tIns="0" bIns="0">
+            <a:spAutoFit/>
+          </a:bodyPr>
+          <a:lstStyle/>
+          <a:p>
+            <a:pPr algn="l">
+              <a:lnSpc>
+                <a:spcPct val="105000"/>
+              </a:lnSpc>
+              <a:spcBef>
+                <a:spcPts val="0"/>
+              </a:spcBef>
+              <a:spcAft>
+                <a:spcPts val="0"/>
+              </a:spcAft>
+            </a:pPr>
+            <a:r>
+              <a:rPr sz="3300" b="0">
+                <a:solidFill>
+                  <a:srgbClr val="121E25"/>
+                </a:solidFill>
+                <a:latin typeface="Georgia"/>
+              </a:rPr>
+              <a:t>What I still have to solve</a:t>
+            </a:r>
+          </a:p>
+        </p:txBody>
+      </p:sp>
+      <p:sp>
+        <p:nvSpPr>
+          <p:cNvPr id="5" name="TextBox 4"/>
+          <p:cNvSpPr txBox="1"/>
+          <p:nvPr/>
+        </p:nvSpPr>
+        <p:spPr>
+          <a:xfrm>
+            <a:off x="822960" y="2212848"/>
             <a:ext cx="10424160" cy="292608"/>
           </a:xfrm>
           <a:prstGeom prst="rect">
@@ -9890,20 +11371,20 @@
                 </a:solidFill>
                 <a:latin typeface="Arial"/>
               </a:rPr>
-              <a:t>Security needs hardening before it carries real data</a:t>
-            </a:r>
-          </a:p>
-        </p:txBody>
-      </p:sp>
-      <p:sp>
-        <p:nvSpPr>
-          <p:cNvPr id="12" name="TextBox 11"/>
-          <p:cNvSpPr txBox="1"/>
-          <p:nvPr/>
-        </p:nvSpPr>
-        <p:spPr>
-          <a:xfrm>
-            <a:off x="822960" y="5157216"/>
+              <a:t>The probe isn't accurate enough for frozen</a:t>
+            </a:r>
+          </a:p>
+        </p:txBody>
+      </p:sp>
+      <p:sp>
+        <p:nvSpPr>
+          <p:cNvPr id="6" name="TextBox 5"/>
+          <p:cNvSpPr txBox="1"/>
+          <p:nvPr/>
+        </p:nvSpPr>
+        <p:spPr>
+          <a:xfrm>
+            <a:off x="822960" y="2560320"/>
             <a:ext cx="10241280" cy="566928"/>
           </a:xfrm>
           <a:prstGeom prst="rect">
@@ -9935,20 +11416,20 @@
                 </a:solidFill>
                 <a:latin typeface="Arial"/>
               </a:rPr>
-              <a:t>The prototype runs on a trusted network. Production adds encrypted transport and per-device credentials. Known work, not a surprise.</a:t>
-            </a:r>
-          </a:p>
-        </p:txBody>
-      </p:sp>
-      <p:sp>
-        <p:nvSpPr>
-          <p:cNvPr id="13" name="Rectangle 12"/>
+              <a:t>The current sensor is rated ±0.9°F only above 14°F. For freezers I move to an RTD probe — ±0.27°F across the whole range, $8–15 a unit. Chilled produce is fine as-is.</a:t>
+            </a:r>
+          </a:p>
+        </p:txBody>
+      </p:sp>
+      <p:sp>
+        <p:nvSpPr>
+          <p:cNvPr id="7" name="Rectangle 6"/>
           <p:cNvSpPr/>
           <p:nvPr/>
         </p:nvSpPr>
         <p:spPr>
           <a:xfrm>
-            <a:off x="822960" y="5852159"/>
+            <a:off x="822960" y="3255263"/>
             <a:ext cx="10545775" cy="13716"/>
           </a:xfrm>
           <a:prstGeom prst="rect">
@@ -9986,6 +11467,274 @@
       </p:sp>
       <p:sp>
         <p:nvSpPr>
+          <p:cNvPr id="8" name="TextBox 7"/>
+          <p:cNvSpPr txBox="1"/>
+          <p:nvPr/>
+        </p:nvSpPr>
+        <p:spPr>
+          <a:xfrm>
+            <a:off x="822960" y="3511296"/>
+            <a:ext cx="10424160" cy="292608"/>
+          </a:xfrm>
+          <a:prstGeom prst="rect">
+            <a:avLst/>
+          </a:prstGeom>
+          <a:noFill/>
+        </p:spPr>
+        <p:txBody>
+          <a:bodyPr wrap="square" anchor="t" lIns="0" rIns="0" tIns="0" bIns="0">
+            <a:spAutoFit/>
+          </a:bodyPr>
+          <a:lstStyle/>
+          <a:p>
+            <a:pPr algn="l">
+              <a:lnSpc>
+                <a:spcPct val="100000"/>
+              </a:lnSpc>
+              <a:spcBef>
+                <a:spcPts val="0"/>
+              </a:spcBef>
+              <a:spcAft>
+                <a:spcPts val="0"/>
+              </a:spcAft>
+            </a:pPr>
+            <a:r>
+              <a:rPr sz="1600" b="1">
+                <a:solidFill>
+                  <a:srgbClr val="121E25"/>
+                </a:solidFill>
+                <a:latin typeface="Arial"/>
+              </a:rPr>
+              <a:t>Calibration has to be auditable</a:t>
+            </a:r>
+          </a:p>
+        </p:txBody>
+      </p:sp>
+      <p:sp>
+        <p:nvSpPr>
+          <p:cNvPr id="9" name="TextBox 8"/>
+          <p:cNvSpPr txBox="1"/>
+          <p:nvPr/>
+        </p:nvSpPr>
+        <p:spPr>
+          <a:xfrm>
+            <a:off x="822960" y="3858768"/>
+            <a:ext cx="10241280" cy="566928"/>
+          </a:xfrm>
+          <a:prstGeom prst="rect">
+            <a:avLst/>
+          </a:prstGeom>
+          <a:noFill/>
+        </p:spPr>
+        <p:txBody>
+          <a:bodyPr wrap="square" anchor="t" lIns="0" rIns="0" tIns="0" bIns="0">
+            <a:spAutoFit/>
+          </a:bodyPr>
+          <a:lstStyle/>
+          <a:p>
+            <a:pPr algn="l">
+              <a:lnSpc>
+                <a:spcPct val="135000"/>
+              </a:lnSpc>
+              <a:spcBef>
+                <a:spcPts val="0"/>
+              </a:spcBef>
+              <a:spcAft>
+                <a:spcPts val="0"/>
+              </a:spcAft>
+            </a:pPr>
+            <a:r>
+              <a:rPr sz="1250" b="0">
+                <a:solidFill>
+                  <a:srgbClr val="637782"/>
+                </a:solidFill>
+                <a:latin typeface="Arial"/>
+              </a:rPr>
+              <a:t>One NIST-traceable reference thermometer, roughly $350, calibrates the whole fleet with documentation an auditor will accept. The quote charges $125 a sensor for a certificate that expires after 24 months — mine is bought once.</a:t>
+            </a:r>
+          </a:p>
+        </p:txBody>
+      </p:sp>
+      <p:sp>
+        <p:nvSpPr>
+          <p:cNvPr id="10" name="Rectangle 9"/>
+          <p:cNvSpPr/>
+          <p:nvPr/>
+        </p:nvSpPr>
+        <p:spPr>
+          <a:xfrm>
+            <a:off x="822960" y="4553711"/>
+            <a:ext cx="10545775" cy="13716"/>
+          </a:xfrm>
+          <a:prstGeom prst="rect">
+            <a:avLst/>
+          </a:prstGeom>
+          <a:solidFill>
+            <a:srgbClr val="DDE5E8"/>
+          </a:solidFill>
+          <a:ln>
+            <a:noFill/>
+          </a:ln>
+          <a:effectLst/>
+        </p:spPr>
+        <p:style>
+          <a:lnRef idx="1">
+            <a:schemeClr val="accent1"/>
+          </a:lnRef>
+          <a:fillRef idx="3">
+            <a:schemeClr val="accent1"/>
+          </a:fillRef>
+          <a:effectRef idx="2">
+            <a:schemeClr val="accent1"/>
+          </a:effectRef>
+          <a:fontRef idx="minor">
+            <a:schemeClr val="lt1"/>
+          </a:fontRef>
+        </p:style>
+        <p:txBody>
+          <a:bodyPr rtlCol="0" anchor="ctr"/>
+          <a:lstStyle/>
+          <a:p>
+            <a:pPr algn="ctr"/>
+          </a:p>
+        </p:txBody>
+      </p:sp>
+      <p:sp>
+        <p:nvSpPr>
+          <p:cNvPr id="11" name="TextBox 10"/>
+          <p:cNvSpPr txBox="1"/>
+          <p:nvPr/>
+        </p:nvSpPr>
+        <p:spPr>
+          <a:xfrm>
+            <a:off x="822960" y="4809744"/>
+            <a:ext cx="10424160" cy="292608"/>
+          </a:xfrm>
+          <a:prstGeom prst="rect">
+            <a:avLst/>
+          </a:prstGeom>
+          <a:noFill/>
+        </p:spPr>
+        <p:txBody>
+          <a:bodyPr wrap="square" anchor="t" lIns="0" rIns="0" tIns="0" bIns="0">
+            <a:spAutoFit/>
+          </a:bodyPr>
+          <a:lstStyle/>
+          <a:p>
+            <a:pPr algn="l">
+              <a:lnSpc>
+                <a:spcPct val="100000"/>
+              </a:lnSpc>
+              <a:spcBef>
+                <a:spcPts val="0"/>
+              </a:spcBef>
+              <a:spcAft>
+                <a:spcPts val="0"/>
+              </a:spcAft>
+            </a:pPr>
+            <a:r>
+              <a:rPr sz="1600" b="1">
+                <a:solidFill>
+                  <a:srgbClr val="121E25"/>
+                </a:solidFill>
+                <a:latin typeface="Arial"/>
+              </a:rPr>
+              <a:t>Security needs hardening before it carries real data</a:t>
+            </a:r>
+          </a:p>
+        </p:txBody>
+      </p:sp>
+      <p:sp>
+        <p:nvSpPr>
+          <p:cNvPr id="12" name="TextBox 11"/>
+          <p:cNvSpPr txBox="1"/>
+          <p:nvPr/>
+        </p:nvSpPr>
+        <p:spPr>
+          <a:xfrm>
+            <a:off x="822960" y="5157216"/>
+            <a:ext cx="10241280" cy="566928"/>
+          </a:xfrm>
+          <a:prstGeom prst="rect">
+            <a:avLst/>
+          </a:prstGeom>
+          <a:noFill/>
+        </p:spPr>
+        <p:txBody>
+          <a:bodyPr wrap="square" anchor="t" lIns="0" rIns="0" tIns="0" bIns="0">
+            <a:spAutoFit/>
+          </a:bodyPr>
+          <a:lstStyle/>
+          <a:p>
+            <a:pPr algn="l">
+              <a:lnSpc>
+                <a:spcPct val="135000"/>
+              </a:lnSpc>
+              <a:spcBef>
+                <a:spcPts val="0"/>
+              </a:spcBef>
+              <a:spcAft>
+                <a:spcPts val="0"/>
+              </a:spcAft>
+            </a:pPr>
+            <a:r>
+              <a:rPr sz="1250" b="0">
+                <a:solidFill>
+                  <a:srgbClr val="637782"/>
+                </a:solidFill>
+                <a:latin typeface="Arial"/>
+              </a:rPr>
+              <a:t>The prototype runs on a trusted network. Production adds encrypted transport and per-device credentials. Known work, not a surprise.</a:t>
+            </a:r>
+          </a:p>
+        </p:txBody>
+      </p:sp>
+      <p:sp>
+        <p:nvSpPr>
+          <p:cNvPr id="13" name="Rectangle 12"/>
+          <p:cNvSpPr/>
+          <p:nvPr/>
+        </p:nvSpPr>
+        <p:spPr>
+          <a:xfrm>
+            <a:off x="822960" y="5852159"/>
+            <a:ext cx="10545775" cy="13716"/>
+          </a:xfrm>
+          <a:prstGeom prst="rect">
+            <a:avLst/>
+          </a:prstGeom>
+          <a:solidFill>
+            <a:srgbClr val="DDE5E8"/>
+          </a:solidFill>
+          <a:ln>
+            <a:noFill/>
+          </a:ln>
+          <a:effectLst/>
+        </p:spPr>
+        <p:style>
+          <a:lnRef idx="1">
+            <a:schemeClr val="accent1"/>
+          </a:lnRef>
+          <a:fillRef idx="3">
+            <a:schemeClr val="accent1"/>
+          </a:fillRef>
+          <a:effectRef idx="2">
+            <a:schemeClr val="accent1"/>
+          </a:effectRef>
+          <a:fontRef idx="minor">
+            <a:schemeClr val="lt1"/>
+          </a:fontRef>
+        </p:style>
+        <p:txBody>
+          <a:bodyPr rtlCol="0" anchor="ctr"/>
+          <a:lstStyle/>
+          <a:p>
+            <a:pPr algn="ctr"/>
+          </a:p>
+        </p:txBody>
+      </p:sp>
+      <p:sp>
+        <p:nvSpPr>
           <p:cNvPr id="14" name="TextBox 13"/>
           <p:cNvSpPr txBox="1"/>
           <p:nvPr/>
@@ -10037,7 +11786,7 @@
 </p:sld>
 </file>
 
-<file path=ppt/slides/slide8.xml><?xml version="1.0" encoding="utf-8"?>
+<file path=ppt/slides/slide9.xml><?xml version="1.0" encoding="utf-8"?>
 <p:sld xmlns:a="http://schemas.openxmlformats.org/drawingml/2006/main" xmlns:p="http://schemas.openxmlformats.org/presentationml/2006/main" xmlns:r="http://schemas.openxmlformats.org/officeDocument/2006/relationships">
   <p:cSld>
     <p:bg>
@@ -10139,7 +11888,7 @@
                 </a:solidFill>
                 <a:latin typeface="Arial"/>
               </a:rPr>
-              <a:t>07</a:t>
+              <a:t>08</a:t>
             </a:r>
           </a:p>
           <a:p>

--- a/presentation/Fleet-Temperature-Monitoring.pptx
+++ b/presentation/Fleet-Temperature-Monitoring.pptx
@@ -6193,7 +6193,7 @@
                 </a:solidFill>
                 <a:latin typeface="Arial"/>
               </a:rPr>
-              <a:t>The probe never decides what counts as an emergency. It reports, the system judges. That's why one platform can watch produce at 40°F and a freezer at −5°F without either one getting the other's rules.</a:t>
+              <a:t>The probe never decides what counts as an emergency. It reports, the system judges. That's why one platform can watch fresh poultry at 30°F and a freezer at −5°F without either one getting the other's rules.</a:t>
             </a:r>
           </a:p>
         </p:txBody>
@@ -7273,7 +7273,7 @@
                 </a:solidFill>
                 <a:latin typeface="Arial"/>
               </a:rPr>
-              <a:t>Each unit judged against its own limits. Produce at 36–43°F and a freezer at −9 to 0°F run on the same rule.</a:t>
+              <a:t>Each unit judged against its own limits. Fresh poultry at 27–34°F and a freezer at −9 to 0°F run on the same rule.</a:t>
             </a:r>
           </a:p>
         </p:txBody>
@@ -11416,7 +11416,7 @@
                 </a:solidFill>
                 <a:latin typeface="Arial"/>
               </a:rPr>
-              <a:t>The current sensor is rated ±0.9°F only above 14°F. For freezers I move to an RTD probe — ±0.27°F across the whole range, $8–15 a unit. Chilled produce is fine as-is.</a:t>
+              <a:t>The current sensor is rated ±0.9°F only above 14°F. For freezers I move to an RTD probe — ±0.27°F across the whole range, $8–15 a unit. Poultry cold storage at 27–34°F is inside the accurate band, so those points are fine as they are.</a:t>
             </a:r>
           </a:p>
         </p:txBody>

--- a/presentation/Fleet-Temperature-Monitoring.pptx
+++ b/presentation/Fleet-Temperature-Monitoring.pptx
@@ -1014,13 +1014,19 @@
           <a:lstStyle/>
           <a:p>
             <a:r>
-              <a:t>Facilities teams worry you're going to drill into a freezer wall. Say early that nothing gets drilled — flat gasket cables are standard practice.</a:t>
+              <a:t>This slide answers the question a technical person will ask: if their system needs four gateways, why doesn't yours?</a:t>
             </a:r>
           </a:p>
           <a:p/>
           <a:p>
             <a:r>
-              <a:t>The battery box pre-empts the obvious question. Mains isn't a compromise here, it's the right answer: everything we're monitoring is a fixed installation with power already at it.</a:t>
+              <a:t>The answer isn't that mine is cleverer. It's that the electronics sit outside the freezer, so the radio never has to get through a metal wall. Their design puts the whole sensor inside, which is a genuinely hard RF problem, and gateways are how you solve it.</a:t>
+            </a:r>
+          </a:p>
+          <a:p/>
+          <a:p>
+            <a:r>
+              <a:t>Confirm before presenting: WiFi coverage at the freezers, whether IT will allow the device on the network, and that the network is 2.4GHz -- the board doesn't do 5GHz.</a:t>
             </a:r>
           </a:p>
         </p:txBody>
@@ -4614,7 +4620,7 @@
                 </a:solidFill>
                 <a:latin typeface="Arial"/>
               </a:rPr>
-              <a:t>I can cover the same 15 points for $1,544 — and it is already running.</a:t>
+              <a:t>I can cover the same 15 points for $1,856 — and it is already running.</a:t>
             </a:r>
           </a:p>
         </p:txBody>
@@ -7971,7 +7977,7 @@
                 </a:solidFill>
                 <a:latin typeface="Georgia"/>
               </a:rPr>
-              <a:t>Quote #145514, line by line</a:t>
+              <a:t>Every line, both sides</a:t>
             </a:r>
           </a:p>
         </p:txBody>
@@ -8163,8 +8169,8 @@
         </p:nvSpPr>
         <p:spPr>
           <a:xfrm>
-            <a:off x="822960" y="2606040"/>
-            <a:ext cx="3840480" cy="256032"/>
+            <a:off x="822960" y="2542032"/>
+            <a:ext cx="4754880" cy="219456"/>
           </a:xfrm>
           <a:prstGeom prst="rect">
             <a:avLst/>
@@ -8189,7 +8195,52 @@
               </a:spcAft>
             </a:pPr>
             <a:r>
-              <a:rPr sz="1350" b="1">
+              <a:rPr sz="950" b="1">
+                <a:solidFill>
+                  <a:srgbClr val="9EAFB7"/>
+                </a:solidFill>
+                <a:latin typeface="Arial"/>
+              </a:rPr>
+              <a:t>ONE-TIME HARDWARE</a:t>
+            </a:r>
+          </a:p>
+        </p:txBody>
+      </p:sp>
+      <p:sp>
+        <p:nvSpPr>
+          <p:cNvPr id="10" name="TextBox 9"/>
+          <p:cNvSpPr txBox="1"/>
+          <p:nvPr/>
+        </p:nvSpPr>
+        <p:spPr>
+          <a:xfrm>
+            <a:off x="822960" y="2779776"/>
+            <a:ext cx="4023360" cy="219456"/>
+          </a:xfrm>
+          <a:prstGeom prst="rect">
+            <a:avLst/>
+          </a:prstGeom>
+          <a:noFill/>
+        </p:spPr>
+        <p:txBody>
+          <a:bodyPr wrap="square" anchor="t" lIns="0" rIns="0" tIns="0" bIns="0">
+            <a:spAutoFit/>
+          </a:bodyPr>
+          <a:lstStyle/>
+          <a:p>
+            <a:pPr algn="l">
+              <a:lnSpc>
+                <a:spcPct val="100000"/>
+              </a:lnSpc>
+              <a:spcBef>
+                <a:spcPts val="0"/>
+              </a:spcBef>
+              <a:spcAft>
+                <a:spcPts val="0"/>
+              </a:spcAft>
+            </a:pPr>
+            <a:r>
+              <a:rPr sz="1200" b="1">
                 <a:solidFill>
                   <a:srgbClr val="121E25"/>
                 </a:solidFill>
@@ -8202,14 +8253,14 @@
       </p:sp>
       <p:sp>
         <p:nvSpPr>
-          <p:cNvPr id="10" name="TextBox 9"/>
-          <p:cNvSpPr txBox="1"/>
-          <p:nvPr/>
-        </p:nvSpPr>
-        <p:spPr>
-          <a:xfrm>
-            <a:off x="822960" y="2843784"/>
-            <a:ext cx="4754880" cy="237744"/>
+          <p:cNvPr id="11" name="TextBox 10"/>
+          <p:cNvSpPr txBox="1"/>
+          <p:nvPr/>
+        </p:nvSpPr>
+        <p:spPr>
+          <a:xfrm>
+            <a:off x="3337560" y="2793492"/>
+            <a:ext cx="2560320" cy="219456"/>
           </a:xfrm>
           <a:prstGeom prst="rect">
             <a:avLst/>
@@ -8234,27 +8285,27 @@
               </a:spcAft>
             </a:pPr>
             <a:r>
-              <a:rPr sz="1100" b="0">
+              <a:rPr sz="950" b="0">
                 <a:solidFill>
                   <a:srgbClr val="637782"/>
                 </a:solidFill>
                 <a:latin typeface="Arial"/>
               </a:rPr>
-              <a:t>4 needed at $599</a:t>
-            </a:r>
-          </a:p>
-        </p:txBody>
-      </p:sp>
-      <p:sp>
-        <p:nvSpPr>
-          <p:cNvPr id="11" name="TextBox 10"/>
-          <p:cNvSpPr txBox="1"/>
-          <p:nvPr/>
-        </p:nvSpPr>
-        <p:spPr>
-          <a:xfrm>
-            <a:off x="5943600" y="2624328"/>
-            <a:ext cx="2103120" cy="274320"/>
+              <a:t>4 at $599 — proprietary radio</a:t>
+            </a:r>
+          </a:p>
+        </p:txBody>
+      </p:sp>
+      <p:sp>
+        <p:nvSpPr>
+          <p:cNvPr id="12" name="TextBox 11"/>
+          <p:cNvSpPr txBox="1"/>
+          <p:nvPr/>
+        </p:nvSpPr>
+        <p:spPr>
+          <a:xfrm>
+            <a:off x="5943600" y="2770632"/>
+            <a:ext cx="2103120" cy="237744"/>
           </a:xfrm>
           <a:prstGeom prst="rect">
             <a:avLst/>
@@ -8279,7 +8330,7 @@
               </a:spcAft>
             </a:pPr>
             <a:r>
-              <a:rPr sz="1500" b="0">
+              <a:rPr sz="1300" b="0">
                 <a:solidFill>
                   <a:srgbClr val="C4622D"/>
                 </a:solidFill>
@@ -8292,14 +8343,14 @@
       </p:sp>
       <p:sp>
         <p:nvSpPr>
-          <p:cNvPr id="12" name="TextBox 11"/>
-          <p:cNvSpPr txBox="1"/>
-          <p:nvPr/>
-        </p:nvSpPr>
-        <p:spPr>
-          <a:xfrm>
-            <a:off x="8503920" y="2624328"/>
-            <a:ext cx="2103120" cy="274320"/>
+          <p:cNvPr id="13" name="TextBox 12"/>
+          <p:cNvSpPr txBox="1"/>
+          <p:nvPr/>
+        </p:nvSpPr>
+        <p:spPr>
+          <a:xfrm>
+            <a:off x="8503920" y="2770632"/>
+            <a:ext cx="1828800" cy="237744"/>
           </a:xfrm>
           <a:prstGeom prst="rect">
             <a:avLst/>
@@ -8324,7 +8375,7 @@
               </a:spcAft>
             </a:pPr>
             <a:r>
-              <a:rPr sz="1500" b="0">
+              <a:rPr sz="1300" b="0">
                 <a:solidFill>
                   <a:srgbClr val="2B8A9E"/>
                 </a:solidFill>
@@ -8337,14 +8388,14 @@
       </p:sp>
       <p:sp>
         <p:nvSpPr>
-          <p:cNvPr id="13" name="TextBox 12"/>
-          <p:cNvSpPr txBox="1"/>
-          <p:nvPr/>
-        </p:nvSpPr>
-        <p:spPr>
-          <a:xfrm>
-            <a:off x="8503920" y="2862072"/>
-            <a:ext cx="2743200" cy="237744"/>
+          <p:cNvPr id="14" name="TextBox 13"/>
+          <p:cNvSpPr txBox="1"/>
+          <p:nvPr/>
+        </p:nvSpPr>
+        <p:spPr>
+          <a:xfrm>
+            <a:off x="9555480" y="2793492"/>
+            <a:ext cx="2377440" cy="219456"/>
           </a:xfrm>
           <a:prstGeom prst="rect">
             <a:avLst/>
@@ -8369,27 +8420,27 @@
               </a:spcAft>
             </a:pPr>
             <a:r>
-              <a:rPr sz="1050" b="0">
+              <a:rPr sz="950" b="0">
                 <a:solidFill>
                   <a:srgbClr val="637782"/>
                 </a:solidFill>
                 <a:latin typeface="Arial"/>
               </a:rPr>
-              <a:t>WiFi is built in</a:t>
-            </a:r>
-          </a:p>
-        </p:txBody>
-      </p:sp>
-      <p:sp>
-        <p:nvSpPr>
-          <p:cNvPr id="14" name="TextBox 13"/>
-          <p:cNvSpPr txBox="1"/>
-          <p:nvPr/>
-        </p:nvSpPr>
-        <p:spPr>
-          <a:xfrm>
-            <a:off x="822960" y="3172968"/>
-            <a:ext cx="3840480" cy="256032"/>
+              <a:t>WiFi, no gateway</a:t>
+            </a:r>
+          </a:p>
+        </p:txBody>
+      </p:sp>
+      <p:sp>
+        <p:nvSpPr>
+          <p:cNvPr id="15" name="TextBox 14"/>
+          <p:cNvSpPr txBox="1"/>
+          <p:nvPr/>
+        </p:nvSpPr>
+        <p:spPr>
+          <a:xfrm>
+            <a:off x="822960" y="3067812"/>
+            <a:ext cx="4023360" cy="219456"/>
           </a:xfrm>
           <a:prstGeom prst="rect">
             <a:avLst/>
@@ -8414,27 +8465,27 @@
               </a:spcAft>
             </a:pPr>
             <a:r>
-              <a:rPr sz="1350" b="1">
+              <a:rPr sz="1200" b="1">
                 <a:solidFill>
                   <a:srgbClr val="121E25"/>
                 </a:solidFill>
                 <a:latin typeface="Arial"/>
               </a:rPr>
-              <a:t>Sensor + display</a:t>
-            </a:r>
-          </a:p>
-        </p:txBody>
-      </p:sp>
-      <p:sp>
-        <p:nvSpPr>
-          <p:cNvPr id="15" name="TextBox 14"/>
-          <p:cNvSpPr txBox="1"/>
-          <p:nvPr/>
-        </p:nvSpPr>
-        <p:spPr>
-          <a:xfrm>
-            <a:off x="822960" y="3410712"/>
-            <a:ext cx="4754880" cy="237744"/>
+              <a:t>Sensor unit + display</a:t>
+            </a:r>
+          </a:p>
+        </p:txBody>
+      </p:sp>
+      <p:sp>
+        <p:nvSpPr>
+          <p:cNvPr id="16" name="TextBox 15"/>
+          <p:cNvSpPr txBox="1"/>
+          <p:nvPr/>
+        </p:nvSpPr>
+        <p:spPr>
+          <a:xfrm>
+            <a:off x="3337560" y="3081528"/>
+            <a:ext cx="2560320" cy="219456"/>
           </a:xfrm>
           <a:prstGeom prst="rect">
             <a:avLst/>
@@ -8459,7 +8510,7 @@
               </a:spcAft>
             </a:pPr>
             <a:r>
-              <a:rPr sz="1100" b="0">
+              <a:rPr sz="950" b="0">
                 <a:solidFill>
                   <a:srgbClr val="637782"/>
                 </a:solidFill>
@@ -8472,14 +8523,14 @@
       </p:sp>
       <p:sp>
         <p:nvSpPr>
-          <p:cNvPr id="16" name="TextBox 15"/>
-          <p:cNvSpPr txBox="1"/>
-          <p:nvPr/>
-        </p:nvSpPr>
-        <p:spPr>
-          <a:xfrm>
-            <a:off x="5943600" y="3191256"/>
-            <a:ext cx="2103120" cy="274320"/>
+          <p:cNvPr id="17" name="TextBox 16"/>
+          <p:cNvSpPr txBox="1"/>
+          <p:nvPr/>
+        </p:nvSpPr>
+        <p:spPr>
+          <a:xfrm>
+            <a:off x="5943600" y="3058668"/>
+            <a:ext cx="2103120" cy="237744"/>
           </a:xfrm>
           <a:prstGeom prst="rect">
             <a:avLst/>
@@ -8504,7 +8555,7 @@
               </a:spcAft>
             </a:pPr>
             <a:r>
-              <a:rPr sz="1500" b="0">
+              <a:rPr sz="1300" b="0">
                 <a:solidFill>
                   <a:srgbClr val="C4622D"/>
                 </a:solidFill>
@@ -8517,14 +8568,14 @@
       </p:sp>
       <p:sp>
         <p:nvSpPr>
-          <p:cNvPr id="17" name="TextBox 16"/>
-          <p:cNvSpPr txBox="1"/>
-          <p:nvPr/>
-        </p:nvSpPr>
-        <p:spPr>
-          <a:xfrm>
-            <a:off x="8503920" y="3191256"/>
-            <a:ext cx="2103120" cy="274320"/>
+          <p:cNvPr id="18" name="TextBox 17"/>
+          <p:cNvSpPr txBox="1"/>
+          <p:nvPr/>
+        </p:nvSpPr>
+        <p:spPr>
+          <a:xfrm>
+            <a:off x="8503920" y="3058668"/>
+            <a:ext cx="1828800" cy="237744"/>
           </a:xfrm>
           <a:prstGeom prst="rect">
             <a:avLst/>
@@ -8549,27 +8600,27 @@
               </a:spcAft>
             </a:pPr>
             <a:r>
-              <a:rPr sz="1500" b="0">
+              <a:rPr sz="1300" b="0">
                 <a:solidFill>
                   <a:srgbClr val="2B8A9E"/>
                 </a:solidFill>
                 <a:latin typeface="Georgia"/>
               </a:rPr>
-              <a:t>$1,050</a:t>
-            </a:r>
-          </a:p>
-        </p:txBody>
-      </p:sp>
-      <p:sp>
-        <p:nvSpPr>
-          <p:cNvPr id="18" name="TextBox 17"/>
-          <p:cNvSpPr txBox="1"/>
-          <p:nvPr/>
-        </p:nvSpPr>
-        <p:spPr>
-          <a:xfrm>
-            <a:off x="8503920" y="3429000"/>
-            <a:ext cx="2743200" cy="237744"/>
+              <a:t>$900</a:t>
+            </a:r>
+          </a:p>
+        </p:txBody>
+      </p:sp>
+      <p:sp>
+        <p:nvSpPr>
+          <p:cNvPr id="19" name="TextBox 18"/>
+          <p:cNvSpPr txBox="1"/>
+          <p:nvPr/>
+        </p:nvSpPr>
+        <p:spPr>
+          <a:xfrm>
+            <a:off x="9555480" y="3081528"/>
+            <a:ext cx="2377440" cy="219456"/>
           </a:xfrm>
           <a:prstGeom prst="rect">
             <a:avLst/>
@@ -8594,27 +8645,27 @@
               </a:spcAft>
             </a:pPr>
             <a:r>
-              <a:rPr sz="1050" b="0">
+              <a:rPr sz="950" b="0">
                 <a:solidFill>
                   <a:srgbClr val="637782"/>
                 </a:solidFill>
                 <a:latin typeface="Arial"/>
               </a:rPr>
-              <a:t>15 units at $70</a:t>
-            </a:r>
-          </a:p>
-        </p:txBody>
-      </p:sp>
-      <p:sp>
-        <p:nvSpPr>
-          <p:cNvPr id="19" name="TextBox 18"/>
-          <p:cNvSpPr txBox="1"/>
-          <p:nvPr/>
-        </p:nvSpPr>
-        <p:spPr>
-          <a:xfrm>
-            <a:off x="822960" y="3739896"/>
-            <a:ext cx="3840480" cy="256032"/>
+              <a:t>15 at $60</a:t>
+            </a:r>
+          </a:p>
+        </p:txBody>
+      </p:sp>
+      <p:sp>
+        <p:nvSpPr>
+          <p:cNvPr id="20" name="TextBox 19"/>
+          <p:cNvSpPr txBox="1"/>
+          <p:nvPr/>
+        </p:nvSpPr>
+        <p:spPr>
+          <a:xfrm>
+            <a:off x="822960" y="3355848"/>
+            <a:ext cx="4023360" cy="219456"/>
           </a:xfrm>
           <a:prstGeom prst="rect">
             <a:avLst/>
@@ -8639,27 +8690,27 @@
               </a:spcAft>
             </a:pPr>
             <a:r>
-              <a:rPr sz="1350" b="1">
+              <a:rPr sz="1200" b="1">
                 <a:solidFill>
                   <a:srgbClr val="121E25"/>
                 </a:solidFill>
                 <a:latin typeface="Arial"/>
               </a:rPr>
-              <a:t>NIST certification</a:t>
-            </a:r>
-          </a:p>
-        </p:txBody>
-      </p:sp>
-      <p:sp>
-        <p:nvSpPr>
-          <p:cNvPr id="20" name="TextBox 19"/>
-          <p:cNvSpPr txBox="1"/>
-          <p:nvPr/>
-        </p:nvSpPr>
-        <p:spPr>
-          <a:xfrm>
-            <a:off x="822960" y="3977640"/>
-            <a:ext cx="4754880" cy="237744"/>
+              <a:t>Probe + NIST certificate</a:t>
+            </a:r>
+          </a:p>
+        </p:txBody>
+      </p:sp>
+      <p:sp>
+        <p:nvSpPr>
+          <p:cNvPr id="21" name="TextBox 20"/>
+          <p:cNvSpPr txBox="1"/>
+          <p:nvPr/>
+        </p:nvSpPr>
+        <p:spPr>
+          <a:xfrm>
+            <a:off x="3337560" y="3369564"/>
+            <a:ext cx="2560320" cy="219456"/>
           </a:xfrm>
           <a:prstGeom prst="rect">
             <a:avLst/>
@@ -8684,27 +8735,27 @@
               </a:spcAft>
             </a:pPr>
             <a:r>
-              <a:rPr sz="1100" b="0">
+              <a:rPr sz="950" b="0">
                 <a:solidFill>
                   <a:srgbClr val="637782"/>
                 </a:solidFill>
                 <a:latin typeface="Arial"/>
               </a:rPr>
-              <a:t>15 at $125, expires in 24 months</a:t>
-            </a:r>
-          </a:p>
-        </p:txBody>
-      </p:sp>
-      <p:sp>
-        <p:nvSpPr>
-          <p:cNvPr id="21" name="TextBox 20"/>
-          <p:cNvSpPr txBox="1"/>
-          <p:nvPr/>
-        </p:nvSpPr>
-        <p:spPr>
-          <a:xfrm>
-            <a:off x="5943600" y="3758184"/>
-            <a:ext cx="2103120" cy="274320"/>
+              <a:t>15 at $125 — expires at 24 months</a:t>
+            </a:r>
+          </a:p>
+        </p:txBody>
+      </p:sp>
+      <p:sp>
+        <p:nvSpPr>
+          <p:cNvPr id="22" name="TextBox 21"/>
+          <p:cNvSpPr txBox="1"/>
+          <p:nvPr/>
+        </p:nvSpPr>
+        <p:spPr>
+          <a:xfrm>
+            <a:off x="5943600" y="3346704"/>
+            <a:ext cx="2103120" cy="237744"/>
           </a:xfrm>
           <a:prstGeom prst="rect">
             <a:avLst/>
@@ -8729,7 +8780,7 @@
               </a:spcAft>
             </a:pPr>
             <a:r>
-              <a:rPr sz="1500" b="0">
+              <a:rPr sz="1300" b="0">
                 <a:solidFill>
                   <a:srgbClr val="C4622D"/>
                 </a:solidFill>
@@ -8742,14 +8793,14 @@
       </p:sp>
       <p:sp>
         <p:nvSpPr>
-          <p:cNvPr id="22" name="TextBox 21"/>
-          <p:cNvSpPr txBox="1"/>
-          <p:nvPr/>
-        </p:nvSpPr>
-        <p:spPr>
-          <a:xfrm>
-            <a:off x="8503920" y="3758184"/>
-            <a:ext cx="2103120" cy="274320"/>
+          <p:cNvPr id="23" name="TextBox 22"/>
+          <p:cNvSpPr txBox="1"/>
+          <p:nvPr/>
+        </p:nvSpPr>
+        <p:spPr>
+          <a:xfrm>
+            <a:off x="8503920" y="3346704"/>
+            <a:ext cx="1828800" cy="237744"/>
           </a:xfrm>
           <a:prstGeom prst="rect">
             <a:avLst/>
@@ -8774,12 +8825,462 @@
               </a:spcAft>
             </a:pPr>
             <a:r>
-              <a:rPr sz="1500" b="0">
+              <a:rPr sz="1300" b="0">
                 <a:solidFill>
                   <a:srgbClr val="2B8A9E"/>
                 </a:solidFill>
                 <a:latin typeface="Georgia"/>
               </a:rPr>
+              <a:t>$150</a:t>
+            </a:r>
+          </a:p>
+        </p:txBody>
+      </p:sp>
+      <p:sp>
+        <p:nvSpPr>
+          <p:cNvPr id="24" name="TextBox 23"/>
+          <p:cNvSpPr txBox="1"/>
+          <p:nvPr/>
+        </p:nvSpPr>
+        <p:spPr>
+          <a:xfrm>
+            <a:off x="9555480" y="3369564"/>
+            <a:ext cx="2377440" cy="219456"/>
+          </a:xfrm>
+          <a:prstGeom prst="rect">
+            <a:avLst/>
+          </a:prstGeom>
+          <a:noFill/>
+        </p:spPr>
+        <p:txBody>
+          <a:bodyPr wrap="square" anchor="t" lIns="0" rIns="0" tIns="0" bIns="0">
+            <a:spAutoFit/>
+          </a:bodyPr>
+          <a:lstStyle/>
+          <a:p>
+            <a:pPr algn="l">
+              <a:lnSpc>
+                <a:spcPct val="100000"/>
+              </a:lnSpc>
+              <a:spcBef>
+                <a:spcPts val="0"/>
+              </a:spcBef>
+              <a:spcAft>
+                <a:spcPts val="0"/>
+              </a:spcAft>
+            </a:pPr>
+            <a:r>
+              <a:rPr sz="950" b="0">
+                <a:solidFill>
+                  <a:srgbClr val="637782"/>
+                </a:solidFill>
+                <a:latin typeface="Arial"/>
+              </a:rPr>
+              <a:t>15 probes at $10</a:t>
+            </a:r>
+          </a:p>
+        </p:txBody>
+      </p:sp>
+      <p:sp>
+        <p:nvSpPr>
+          <p:cNvPr id="25" name="TextBox 24"/>
+          <p:cNvSpPr txBox="1"/>
+          <p:nvPr/>
+        </p:nvSpPr>
+        <p:spPr>
+          <a:xfrm>
+            <a:off x="822960" y="3643884"/>
+            <a:ext cx="4023360" cy="219456"/>
+          </a:xfrm>
+          <a:prstGeom prst="rect">
+            <a:avLst/>
+          </a:prstGeom>
+          <a:noFill/>
+        </p:spPr>
+        <p:txBody>
+          <a:bodyPr wrap="square" anchor="t" lIns="0" rIns="0" tIns="0" bIns="0">
+            <a:spAutoFit/>
+          </a:bodyPr>
+          <a:lstStyle/>
+          <a:p>
+            <a:pPr algn="l">
+              <a:lnSpc>
+                <a:spcPct val="100000"/>
+              </a:lnSpc>
+              <a:spcBef>
+                <a:spcPts val="0"/>
+              </a:spcBef>
+              <a:spcAft>
+                <a:spcPts val="0"/>
+              </a:spcAft>
+            </a:pPr>
+            <a:r>
+              <a:rPr sz="1200" b="1">
+                <a:solidFill>
+                  <a:srgbClr val="121E25"/>
+                </a:solidFill>
+                <a:latin typeface="Arial"/>
+              </a:rPr>
+              <a:t>Enclosure</a:t>
+            </a:r>
+          </a:p>
+        </p:txBody>
+      </p:sp>
+      <p:sp>
+        <p:nvSpPr>
+          <p:cNvPr id="26" name="TextBox 25"/>
+          <p:cNvSpPr txBox="1"/>
+          <p:nvPr/>
+        </p:nvSpPr>
+        <p:spPr>
+          <a:xfrm>
+            <a:off x="3337560" y="3657600"/>
+            <a:ext cx="2560320" cy="219456"/>
+          </a:xfrm>
+          <a:prstGeom prst="rect">
+            <a:avLst/>
+          </a:prstGeom>
+          <a:noFill/>
+        </p:spPr>
+        <p:txBody>
+          <a:bodyPr wrap="square" anchor="t" lIns="0" rIns="0" tIns="0" bIns="0">
+            <a:spAutoFit/>
+          </a:bodyPr>
+          <a:lstStyle/>
+          <a:p>
+            <a:pPr algn="l">
+              <a:lnSpc>
+                <a:spcPct val="100000"/>
+              </a:lnSpc>
+              <a:spcBef>
+                <a:spcPts val="0"/>
+              </a:spcBef>
+              <a:spcAft>
+                <a:spcPts val="0"/>
+              </a:spcAft>
+            </a:pPr>
+            <a:r>
+              <a:rPr sz="950" b="0">
+                <a:solidFill>
+                  <a:srgbClr val="637782"/>
+                </a:solidFill>
+                <a:latin typeface="Arial"/>
+              </a:rPr>
+              <a:t>included</a:t>
+            </a:r>
+          </a:p>
+        </p:txBody>
+      </p:sp>
+      <p:sp>
+        <p:nvSpPr>
+          <p:cNvPr id="27" name="TextBox 26"/>
+          <p:cNvSpPr txBox="1"/>
+          <p:nvPr/>
+        </p:nvSpPr>
+        <p:spPr>
+          <a:xfrm>
+            <a:off x="5943600" y="3634740"/>
+            <a:ext cx="2103120" cy="237744"/>
+          </a:xfrm>
+          <a:prstGeom prst="rect">
+            <a:avLst/>
+          </a:prstGeom>
+          <a:noFill/>
+        </p:spPr>
+        <p:txBody>
+          <a:bodyPr wrap="square" anchor="t" lIns="0" rIns="0" tIns="0" bIns="0">
+            <a:spAutoFit/>
+          </a:bodyPr>
+          <a:lstStyle/>
+          <a:p>
+            <a:pPr algn="l">
+              <a:lnSpc>
+                <a:spcPct val="100000"/>
+              </a:lnSpc>
+              <a:spcBef>
+                <a:spcPts val="0"/>
+              </a:spcBef>
+              <a:spcAft>
+                <a:spcPts val="0"/>
+              </a:spcAft>
+            </a:pPr>
+            <a:r>
+              <a:rPr sz="1300" b="0">
+                <a:solidFill>
+                  <a:srgbClr val="C4622D"/>
+                </a:solidFill>
+                <a:latin typeface="Georgia"/>
+              </a:rPr>
+              <a:t>—</a:t>
+            </a:r>
+          </a:p>
+        </p:txBody>
+      </p:sp>
+      <p:sp>
+        <p:nvSpPr>
+          <p:cNvPr id="28" name="TextBox 27"/>
+          <p:cNvSpPr txBox="1"/>
+          <p:nvPr/>
+        </p:nvSpPr>
+        <p:spPr>
+          <a:xfrm>
+            <a:off x="8503920" y="3634740"/>
+            <a:ext cx="1828800" cy="237744"/>
+          </a:xfrm>
+          <a:prstGeom prst="rect">
+            <a:avLst/>
+          </a:prstGeom>
+          <a:noFill/>
+        </p:spPr>
+        <p:txBody>
+          <a:bodyPr wrap="square" anchor="t" lIns="0" rIns="0" tIns="0" bIns="0">
+            <a:spAutoFit/>
+          </a:bodyPr>
+          <a:lstStyle/>
+          <a:p>
+            <a:pPr algn="l">
+              <a:lnSpc>
+                <a:spcPct val="100000"/>
+              </a:lnSpc>
+              <a:spcBef>
+                <a:spcPts val="0"/>
+              </a:spcBef>
+              <a:spcAft>
+                <a:spcPts val="0"/>
+              </a:spcAft>
+            </a:pPr>
+            <a:r>
+              <a:rPr sz="1300" b="0">
+                <a:solidFill>
+                  <a:srgbClr val="2B8A9E"/>
+                </a:solidFill>
+                <a:latin typeface="Georgia"/>
+              </a:rPr>
+              <a:t>$150</a:t>
+            </a:r>
+          </a:p>
+        </p:txBody>
+      </p:sp>
+      <p:sp>
+        <p:nvSpPr>
+          <p:cNvPr id="29" name="TextBox 28"/>
+          <p:cNvSpPr txBox="1"/>
+          <p:nvPr/>
+        </p:nvSpPr>
+        <p:spPr>
+          <a:xfrm>
+            <a:off x="9555480" y="3657600"/>
+            <a:ext cx="2377440" cy="219456"/>
+          </a:xfrm>
+          <a:prstGeom prst="rect">
+            <a:avLst/>
+          </a:prstGeom>
+          <a:noFill/>
+        </p:spPr>
+        <p:txBody>
+          <a:bodyPr wrap="square" anchor="t" lIns="0" rIns="0" tIns="0" bIns="0">
+            <a:spAutoFit/>
+          </a:bodyPr>
+          <a:lstStyle/>
+          <a:p>
+            <a:pPr algn="l">
+              <a:lnSpc>
+                <a:spcPct val="100000"/>
+              </a:lnSpc>
+              <a:spcBef>
+                <a:spcPts val="0"/>
+              </a:spcBef>
+              <a:spcAft>
+                <a:spcPts val="0"/>
+              </a:spcAft>
+            </a:pPr>
+            <a:r>
+              <a:rPr sz="950" b="0">
+                <a:solidFill>
+                  <a:srgbClr val="637782"/>
+                </a:solidFill>
+                <a:latin typeface="Arial"/>
+              </a:rPr>
+              <a:t>15 printed at $10</a:t>
+            </a:r>
+          </a:p>
+        </p:txBody>
+      </p:sp>
+      <p:sp>
+        <p:nvSpPr>
+          <p:cNvPr id="30" name="TextBox 29"/>
+          <p:cNvSpPr txBox="1"/>
+          <p:nvPr/>
+        </p:nvSpPr>
+        <p:spPr>
+          <a:xfrm>
+            <a:off x="822960" y="3931920"/>
+            <a:ext cx="4023360" cy="219456"/>
+          </a:xfrm>
+          <a:prstGeom prst="rect">
+            <a:avLst/>
+          </a:prstGeom>
+          <a:noFill/>
+        </p:spPr>
+        <p:txBody>
+          <a:bodyPr wrap="square" anchor="t" lIns="0" rIns="0" tIns="0" bIns="0">
+            <a:spAutoFit/>
+          </a:bodyPr>
+          <a:lstStyle/>
+          <a:p>
+            <a:pPr algn="l">
+              <a:lnSpc>
+                <a:spcPct val="100000"/>
+              </a:lnSpc>
+              <a:spcBef>
+                <a:spcPts val="0"/>
+              </a:spcBef>
+              <a:spcAft>
+                <a:spcPts val="0"/>
+              </a:spcAft>
+            </a:pPr>
+            <a:r>
+              <a:rPr sz="1200" b="1">
+                <a:solidFill>
+                  <a:srgbClr val="121E25"/>
+                </a:solidFill>
+                <a:latin typeface="Arial"/>
+              </a:rPr>
+              <a:t>Calibration reference</a:t>
+            </a:r>
+          </a:p>
+        </p:txBody>
+      </p:sp>
+      <p:sp>
+        <p:nvSpPr>
+          <p:cNvPr id="31" name="TextBox 30"/>
+          <p:cNvSpPr txBox="1"/>
+          <p:nvPr/>
+        </p:nvSpPr>
+        <p:spPr>
+          <a:xfrm>
+            <a:off x="3337560" y="3945636"/>
+            <a:ext cx="2560320" cy="219456"/>
+          </a:xfrm>
+          <a:prstGeom prst="rect">
+            <a:avLst/>
+          </a:prstGeom>
+          <a:noFill/>
+        </p:spPr>
+        <p:txBody>
+          <a:bodyPr wrap="square" anchor="t" lIns="0" rIns="0" tIns="0" bIns="0">
+            <a:spAutoFit/>
+          </a:bodyPr>
+          <a:lstStyle/>
+          <a:p>
+            <a:pPr algn="l">
+              <a:lnSpc>
+                <a:spcPct val="100000"/>
+              </a:lnSpc>
+              <a:spcBef>
+                <a:spcPts val="0"/>
+              </a:spcBef>
+              <a:spcAft>
+                <a:spcPts val="0"/>
+              </a:spcAft>
+            </a:pPr>
+            <a:r>
+              <a:rPr sz="950" b="0">
+                <a:solidFill>
+                  <a:srgbClr val="637782"/>
+                </a:solidFill>
+                <a:latin typeface="Arial"/>
+              </a:rPr>
+              <a:t>n/a — bought per sensor</a:t>
+            </a:r>
+          </a:p>
+        </p:txBody>
+      </p:sp>
+      <p:sp>
+        <p:nvSpPr>
+          <p:cNvPr id="32" name="TextBox 31"/>
+          <p:cNvSpPr txBox="1"/>
+          <p:nvPr/>
+        </p:nvSpPr>
+        <p:spPr>
+          <a:xfrm>
+            <a:off x="5943600" y="3922776"/>
+            <a:ext cx="2103120" cy="237744"/>
+          </a:xfrm>
+          <a:prstGeom prst="rect">
+            <a:avLst/>
+          </a:prstGeom>
+          <a:noFill/>
+        </p:spPr>
+        <p:txBody>
+          <a:bodyPr wrap="square" anchor="t" lIns="0" rIns="0" tIns="0" bIns="0">
+            <a:spAutoFit/>
+          </a:bodyPr>
+          <a:lstStyle/>
+          <a:p>
+            <a:pPr algn="l">
+              <a:lnSpc>
+                <a:spcPct val="100000"/>
+              </a:lnSpc>
+              <a:spcBef>
+                <a:spcPts val="0"/>
+              </a:spcBef>
+              <a:spcAft>
+                <a:spcPts val="0"/>
+              </a:spcAft>
+            </a:pPr>
+            <a:r>
+              <a:rPr sz="1300" b="0">
+                <a:solidFill>
+                  <a:srgbClr val="C4622D"/>
+                </a:solidFill>
+                <a:latin typeface="Georgia"/>
+              </a:rPr>
+              <a:t>—</a:t>
+            </a:r>
+          </a:p>
+        </p:txBody>
+      </p:sp>
+      <p:sp>
+        <p:nvSpPr>
+          <p:cNvPr id="33" name="TextBox 32"/>
+          <p:cNvSpPr txBox="1"/>
+          <p:nvPr/>
+        </p:nvSpPr>
+        <p:spPr>
+          <a:xfrm>
+            <a:off x="8503920" y="3922776"/>
+            <a:ext cx="1828800" cy="237744"/>
+          </a:xfrm>
+          <a:prstGeom prst="rect">
+            <a:avLst/>
+          </a:prstGeom>
+          <a:noFill/>
+        </p:spPr>
+        <p:txBody>
+          <a:bodyPr wrap="square" anchor="t" lIns="0" rIns="0" tIns="0" bIns="0">
+            <a:spAutoFit/>
+          </a:bodyPr>
+          <a:lstStyle/>
+          <a:p>
+            <a:pPr algn="l">
+              <a:lnSpc>
+                <a:spcPct val="100000"/>
+              </a:lnSpc>
+              <a:spcBef>
+                <a:spcPts val="0"/>
+              </a:spcBef>
+              <a:spcAft>
+                <a:spcPts val="0"/>
+              </a:spcAft>
+            </a:pPr>
+            <a:r>
+              <a:rPr sz="1300" b="0">
+                <a:solidFill>
+                  <a:srgbClr val="2B8A9E"/>
+                </a:solidFill>
+                <a:latin typeface="Georgia"/>
+              </a:rPr>
               <a:t>$350</a:t>
             </a:r>
           </a:p>
@@ -8787,14 +9288,14 @@
       </p:sp>
       <p:sp>
         <p:nvSpPr>
-          <p:cNvPr id="23" name="TextBox 22"/>
-          <p:cNvSpPr txBox="1"/>
-          <p:nvPr/>
-        </p:nvSpPr>
-        <p:spPr>
-          <a:xfrm>
-            <a:off x="8503920" y="3995928"/>
-            <a:ext cx="2743200" cy="237744"/>
+          <p:cNvPr id="34" name="TextBox 33"/>
+          <p:cNvSpPr txBox="1"/>
+          <p:nvPr/>
+        </p:nvSpPr>
+        <p:spPr>
+          <a:xfrm>
+            <a:off x="9555480" y="3945636"/>
+            <a:ext cx="2377440" cy="219456"/>
           </a:xfrm>
           <a:prstGeom prst="rect">
             <a:avLst/>
@@ -8819,27 +9320,27 @@
               </a:spcAft>
             </a:pPr>
             <a:r>
-              <a:rPr sz="1050" b="0">
+              <a:rPr sz="950" b="0">
                 <a:solidFill>
                   <a:srgbClr val="637782"/>
                 </a:solidFill>
                 <a:latin typeface="Arial"/>
               </a:rPr>
-              <a:t>one reference, no expiry</a:t>
-            </a:r>
-          </a:p>
-        </p:txBody>
-      </p:sp>
-      <p:sp>
-        <p:nvSpPr>
-          <p:cNvPr id="24" name="TextBox 23"/>
-          <p:cNvSpPr txBox="1"/>
-          <p:nvPr/>
-        </p:nvSpPr>
-        <p:spPr>
-          <a:xfrm>
-            <a:off x="822960" y="4306824"/>
-            <a:ext cx="3840480" cy="256032"/>
+              <a:t>one, covers the fleet</a:t>
+            </a:r>
+          </a:p>
+        </p:txBody>
+      </p:sp>
+      <p:sp>
+        <p:nvSpPr>
+          <p:cNvPr id="35" name="TextBox 34"/>
+          <p:cNvSpPr txBox="1"/>
+          <p:nvPr/>
+        </p:nvSpPr>
+        <p:spPr>
+          <a:xfrm>
+            <a:off x="822960" y="4219956"/>
+            <a:ext cx="4023360" cy="219456"/>
           </a:xfrm>
           <a:prstGeom prst="rect">
             <a:avLst/>
@@ -8864,27 +9365,27 @@
               </a:spcAft>
             </a:pPr>
             <a:r>
-              <a:rPr sz="1350" b="1">
+              <a:rPr sz="1200" b="1">
                 <a:solidFill>
                   <a:srgbClr val="121E25"/>
                 </a:solidFill>
                 <a:latin typeface="Arial"/>
               </a:rPr>
-              <a:t>Duty, tariff, shipping</a:t>
-            </a:r>
-          </a:p>
-        </p:txBody>
-      </p:sp>
-      <p:sp>
-        <p:nvSpPr>
-          <p:cNvPr id="25" name="TextBox 24"/>
-          <p:cNvSpPr txBox="1"/>
-          <p:nvPr/>
-        </p:nvSpPr>
-        <p:spPr>
-          <a:xfrm>
-            <a:off x="822960" y="4544568"/>
-            <a:ext cx="4754880" cy="237744"/>
+              <a:t>Duty, tariff, freight</a:t>
+            </a:r>
+          </a:p>
+        </p:txBody>
+      </p:sp>
+      <p:sp>
+        <p:nvSpPr>
+          <p:cNvPr id="36" name="TextBox 35"/>
+          <p:cNvSpPr txBox="1"/>
+          <p:nvPr/>
+        </p:nvSpPr>
+        <p:spPr>
+          <a:xfrm>
+            <a:off x="3337560" y="4233672"/>
+            <a:ext cx="2560320" cy="219456"/>
           </a:xfrm>
           <a:prstGeom prst="rect">
             <a:avLst/>
@@ -8909,27 +9410,27 @@
               </a:spcAft>
             </a:pPr>
             <a:r>
-              <a:rPr sz="1100" b="0">
+              <a:rPr sz="950" b="0">
                 <a:solidFill>
                   <a:srgbClr val="637782"/>
                 </a:solidFill>
                 <a:latin typeface="Arial"/>
               </a:rPr>
-              <a:t>imported hardware</a:t>
-            </a:r>
-          </a:p>
-        </p:txBody>
-      </p:sp>
-      <p:sp>
-        <p:nvSpPr>
-          <p:cNvPr id="26" name="TextBox 25"/>
-          <p:cNvSpPr txBox="1"/>
-          <p:nvPr/>
-        </p:nvSpPr>
-        <p:spPr>
-          <a:xfrm>
-            <a:off x="5943600" y="4325112"/>
-            <a:ext cx="2103120" cy="274320"/>
+              <a:t>imported</a:t>
+            </a:r>
+          </a:p>
+        </p:txBody>
+      </p:sp>
+      <p:sp>
+        <p:nvSpPr>
+          <p:cNvPr id="37" name="TextBox 36"/>
+          <p:cNvSpPr txBox="1"/>
+          <p:nvPr/>
+        </p:nvSpPr>
+        <p:spPr>
+          <a:xfrm>
+            <a:off x="5943600" y="4210812"/>
+            <a:ext cx="2103120" cy="237744"/>
           </a:xfrm>
           <a:prstGeom prst="rect">
             <a:avLst/>
@@ -8954,7 +9455,7 @@
               </a:spcAft>
             </a:pPr>
             <a:r>
-              <a:rPr sz="1500" b="0">
+              <a:rPr sz="1300" b="0">
                 <a:solidFill>
                   <a:srgbClr val="C4622D"/>
                 </a:solidFill>
@@ -8967,14 +9468,14 @@
       </p:sp>
       <p:sp>
         <p:nvSpPr>
-          <p:cNvPr id="27" name="TextBox 26"/>
-          <p:cNvSpPr txBox="1"/>
-          <p:nvPr/>
-        </p:nvSpPr>
-        <p:spPr>
-          <a:xfrm>
-            <a:off x="8503920" y="4325112"/>
-            <a:ext cx="2103120" cy="274320"/>
+          <p:cNvPr id="38" name="TextBox 37"/>
+          <p:cNvSpPr txBox="1"/>
+          <p:nvPr/>
+        </p:nvSpPr>
+        <p:spPr>
+          <a:xfrm>
+            <a:off x="8503920" y="4210812"/>
+            <a:ext cx="1828800" cy="237744"/>
           </a:xfrm>
           <a:prstGeom prst="rect">
             <a:avLst/>
@@ -8999,7 +9500,7 @@
               </a:spcAft>
             </a:pPr>
             <a:r>
-              <a:rPr sz="1500" b="0">
+              <a:rPr sz="1300" b="0">
                 <a:solidFill>
                   <a:srgbClr val="2B8A9E"/>
                 </a:solidFill>
@@ -9012,14 +9513,14 @@
       </p:sp>
       <p:sp>
         <p:nvSpPr>
-          <p:cNvPr id="28" name="TextBox 27"/>
-          <p:cNvSpPr txBox="1"/>
-          <p:nvPr/>
-        </p:nvSpPr>
-        <p:spPr>
-          <a:xfrm>
-            <a:off x="8503920" y="4562856"/>
-            <a:ext cx="2743200" cy="237744"/>
+          <p:cNvPr id="39" name="TextBox 38"/>
+          <p:cNvSpPr txBox="1"/>
+          <p:nvPr/>
+        </p:nvSpPr>
+        <p:spPr>
+          <a:xfrm>
+            <a:off x="9555480" y="4233672"/>
+            <a:ext cx="2377440" cy="219456"/>
           </a:xfrm>
           <a:prstGeom prst="rect">
             <a:avLst/>
@@ -9044,27 +9545,27 @@
               </a:spcAft>
             </a:pPr>
             <a:r>
-              <a:rPr sz="1050" b="0">
+              <a:rPr sz="950" b="0">
                 <a:solidFill>
                   <a:srgbClr val="637782"/>
                 </a:solidFill>
                 <a:latin typeface="Arial"/>
               </a:rPr>
-              <a:t>bought domestically</a:t>
-            </a:r>
-          </a:p>
-        </p:txBody>
-      </p:sp>
-      <p:sp>
-        <p:nvSpPr>
-          <p:cNvPr id="29" name="TextBox 28"/>
-          <p:cNvSpPr txBox="1"/>
-          <p:nvPr/>
-        </p:nvSpPr>
-        <p:spPr>
-          <a:xfrm>
-            <a:off x="822960" y="4873752"/>
-            <a:ext cx="3840480" cy="256032"/>
+              <a:t>sourced domestically</a:t>
+            </a:r>
+          </a:p>
+        </p:txBody>
+      </p:sp>
+      <p:sp>
+        <p:nvSpPr>
+          <p:cNvPr id="40" name="TextBox 39"/>
+          <p:cNvSpPr txBox="1"/>
+          <p:nvPr/>
+        </p:nvSpPr>
+        <p:spPr>
+          <a:xfrm>
+            <a:off x="822960" y="4507992"/>
+            <a:ext cx="4023360" cy="219456"/>
           </a:xfrm>
           <a:prstGeom prst="rect">
             <a:avLst/>
@@ -9089,27 +9590,27 @@
               </a:spcAft>
             </a:pPr>
             <a:r>
-              <a:rPr sz="1350" b="1">
+              <a:rPr sz="1200" b="1">
                 <a:solidFill>
                   <a:srgbClr val="121E25"/>
                 </a:solidFill>
                 <a:latin typeface="Arial"/>
               </a:rPr>
-              <a:t>Tax</a:t>
-            </a:r>
-          </a:p>
-        </p:txBody>
-      </p:sp>
-      <p:sp>
-        <p:nvSpPr>
-          <p:cNvPr id="30" name="TextBox 29"/>
-          <p:cNvSpPr txBox="1"/>
-          <p:nvPr/>
-        </p:nvSpPr>
-        <p:spPr>
-          <a:xfrm>
-            <a:off x="822960" y="5111496"/>
-            <a:ext cx="4754880" cy="237744"/>
+              <a:t>Sales tax</a:t>
+            </a:r>
+          </a:p>
+        </p:txBody>
+      </p:sp>
+      <p:sp>
+        <p:nvSpPr>
+          <p:cNvPr id="41" name="TextBox 40"/>
+          <p:cNvSpPr txBox="1"/>
+          <p:nvPr/>
+        </p:nvSpPr>
+        <p:spPr>
+          <a:xfrm>
+            <a:off x="3337560" y="4521708"/>
+            <a:ext cx="2560320" cy="219456"/>
           </a:xfrm>
           <a:prstGeom prst="rect">
             <a:avLst/>
@@ -9134,7 +9635,7 @@
               </a:spcAft>
             </a:pPr>
             <a:r>
-              <a:rPr sz="1100" b="0">
+              <a:rPr sz="950" b="0">
                 <a:solidFill>
                   <a:srgbClr val="637782"/>
                 </a:solidFill>
@@ -9147,14 +9648,14 @@
       </p:sp>
       <p:sp>
         <p:nvSpPr>
-          <p:cNvPr id="31" name="TextBox 30"/>
-          <p:cNvSpPr txBox="1"/>
-          <p:nvPr/>
-        </p:nvSpPr>
-        <p:spPr>
-          <a:xfrm>
-            <a:off x="5943600" y="4892040"/>
-            <a:ext cx="2103120" cy="274320"/>
+          <p:cNvPr id="42" name="TextBox 41"/>
+          <p:cNvSpPr txBox="1"/>
+          <p:nvPr/>
+        </p:nvSpPr>
+        <p:spPr>
+          <a:xfrm>
+            <a:off x="5943600" y="4498848"/>
+            <a:ext cx="2103120" cy="237744"/>
           </a:xfrm>
           <a:prstGeom prst="rect">
             <a:avLst/>
@@ -9179,7 +9680,7 @@
               </a:spcAft>
             </a:pPr>
             <a:r>
-              <a:rPr sz="1500" b="0">
+              <a:rPr sz="1300" b="0">
                 <a:solidFill>
                   <a:srgbClr val="C4622D"/>
                 </a:solidFill>
@@ -9192,14 +9693,14 @@
       </p:sp>
       <p:sp>
         <p:nvSpPr>
-          <p:cNvPr id="32" name="TextBox 31"/>
-          <p:cNvSpPr txBox="1"/>
-          <p:nvPr/>
-        </p:nvSpPr>
-        <p:spPr>
-          <a:xfrm>
-            <a:off x="8503920" y="4892040"/>
-            <a:ext cx="2103120" cy="274320"/>
+          <p:cNvPr id="43" name="TextBox 42"/>
+          <p:cNvSpPr txBox="1"/>
+          <p:nvPr/>
+        </p:nvSpPr>
+        <p:spPr>
+          <a:xfrm>
+            <a:off x="8503920" y="4498848"/>
+            <a:ext cx="1828800" cy="237744"/>
           </a:xfrm>
           <a:prstGeom prst="rect">
             <a:avLst/>
@@ -9224,27 +9725,27 @@
               </a:spcAft>
             </a:pPr>
             <a:r>
-              <a:rPr sz="1500" b="0">
+              <a:rPr sz="1300" b="0">
                 <a:solidFill>
                   <a:srgbClr val="2B8A9E"/>
                 </a:solidFill>
                 <a:latin typeface="Georgia"/>
               </a:rPr>
-              <a:t>$147</a:t>
-            </a:r>
-          </a:p>
-        </p:txBody>
-      </p:sp>
-      <p:sp>
-        <p:nvSpPr>
-          <p:cNvPr id="33" name="TextBox 32"/>
-          <p:cNvSpPr txBox="1"/>
-          <p:nvPr/>
-        </p:nvSpPr>
-        <p:spPr>
-          <a:xfrm>
-            <a:off x="822960" y="5440680"/>
-            <a:ext cx="3840480" cy="256032"/>
+              <a:t>$162</a:t>
+            </a:r>
+          </a:p>
+        </p:txBody>
+      </p:sp>
+      <p:sp>
+        <p:nvSpPr>
+          <p:cNvPr id="44" name="TextBox 43"/>
+          <p:cNvSpPr txBox="1"/>
+          <p:nvPr/>
+        </p:nvSpPr>
+        <p:spPr>
+          <a:xfrm>
+            <a:off x="822960" y="4887468"/>
+            <a:ext cx="4754880" cy="219456"/>
           </a:xfrm>
           <a:prstGeom prst="rect">
             <a:avLst/>
@@ -9269,27 +9770,72 @@
               </a:spcAft>
             </a:pPr>
             <a:r>
-              <a:rPr sz="1350" b="1">
+              <a:rPr sz="950" b="1">
+                <a:solidFill>
+                  <a:srgbClr val="9EAFB7"/>
+                </a:solidFill>
+                <a:latin typeface="Arial"/>
+              </a:rPr>
+              <a:t>ANNUAL</a:t>
+            </a:r>
+          </a:p>
+        </p:txBody>
+      </p:sp>
+      <p:sp>
+        <p:nvSpPr>
+          <p:cNvPr id="45" name="TextBox 44"/>
+          <p:cNvSpPr txBox="1"/>
+          <p:nvPr/>
+        </p:nvSpPr>
+        <p:spPr>
+          <a:xfrm>
+            <a:off x="822960" y="5125212"/>
+            <a:ext cx="4023360" cy="219456"/>
+          </a:xfrm>
+          <a:prstGeom prst="rect">
+            <a:avLst/>
+          </a:prstGeom>
+          <a:noFill/>
+        </p:spPr>
+        <p:txBody>
+          <a:bodyPr wrap="square" anchor="t" lIns="0" rIns="0" tIns="0" bIns="0">
+            <a:spAutoFit/>
+          </a:bodyPr>
+          <a:lstStyle/>
+          <a:p>
+            <a:pPr algn="l">
+              <a:lnSpc>
+                <a:spcPct val="100000"/>
+              </a:lnSpc>
+              <a:spcBef>
+                <a:spcPts val="0"/>
+              </a:spcBef>
+              <a:spcAft>
+                <a:spcPts val="0"/>
+              </a:spcAft>
+            </a:pPr>
+            <a:r>
+              <a:rPr sz="1200" b="1">
                 <a:solidFill>
                   <a:srgbClr val="121E25"/>
                 </a:solidFill>
                 <a:latin typeface="Arial"/>
               </a:rPr>
-              <a:t>Subscription</a:t>
-            </a:r>
-          </a:p>
-        </p:txBody>
-      </p:sp>
-      <p:sp>
-        <p:nvSpPr>
-          <p:cNvPr id="34" name="TextBox 33"/>
-          <p:cNvSpPr txBox="1"/>
-          <p:nvPr/>
-        </p:nvSpPr>
-        <p:spPr>
-          <a:xfrm>
-            <a:off x="822960" y="5678424"/>
-            <a:ext cx="4754880" cy="237744"/>
+              <a:t>Monitoring subscription</a:t>
+            </a:r>
+          </a:p>
+        </p:txBody>
+      </p:sp>
+      <p:sp>
+        <p:nvSpPr>
+          <p:cNvPr id="46" name="TextBox 45"/>
+          <p:cNvSpPr txBox="1"/>
+          <p:nvPr/>
+        </p:nvSpPr>
+        <p:spPr>
+          <a:xfrm>
+            <a:off x="3337560" y="5138928"/>
+            <a:ext cx="2560320" cy="219456"/>
           </a:xfrm>
           <a:prstGeom prst="rect">
             <a:avLst/>
@@ -9314,27 +9860,27 @@
               </a:spcAft>
             </a:pPr>
             <a:r>
-              <a:rPr sz="1100" b="0">
+              <a:rPr sz="950" b="0">
                 <a:solidFill>
                   <a:srgbClr val="637782"/>
                 </a:solidFill>
                 <a:latin typeface="Arial"/>
               </a:rPr>
-              <a:t>per site, per year</a:t>
-            </a:r>
-          </a:p>
-        </p:txBody>
-      </p:sp>
-      <p:sp>
-        <p:nvSpPr>
-          <p:cNvPr id="35" name="TextBox 34"/>
-          <p:cNvSpPr txBox="1"/>
-          <p:nvPr/>
-        </p:nvSpPr>
-        <p:spPr>
-          <a:xfrm>
-            <a:off x="5943600" y="5458968"/>
-            <a:ext cx="2103120" cy="274320"/>
+              <a:t>$100/month, per site</a:t>
+            </a:r>
+          </a:p>
+        </p:txBody>
+      </p:sp>
+      <p:sp>
+        <p:nvSpPr>
+          <p:cNvPr id="47" name="TextBox 46"/>
+          <p:cNvSpPr txBox="1"/>
+          <p:nvPr/>
+        </p:nvSpPr>
+        <p:spPr>
+          <a:xfrm>
+            <a:off x="5943600" y="5116068"/>
+            <a:ext cx="2103120" cy="237744"/>
           </a:xfrm>
           <a:prstGeom prst="rect">
             <a:avLst/>
@@ -9359,7 +9905,7 @@
               </a:spcAft>
             </a:pPr>
             <a:r>
-              <a:rPr sz="1500" b="0">
+              <a:rPr sz="1300" b="0">
                 <a:solidFill>
                   <a:srgbClr val="C4622D"/>
                 </a:solidFill>
@@ -9372,14 +9918,14 @@
       </p:sp>
       <p:sp>
         <p:nvSpPr>
-          <p:cNvPr id="36" name="TextBox 35"/>
-          <p:cNvSpPr txBox="1"/>
-          <p:nvPr/>
-        </p:nvSpPr>
-        <p:spPr>
-          <a:xfrm>
-            <a:off x="8503920" y="5458968"/>
-            <a:ext cx="2103120" cy="274320"/>
+          <p:cNvPr id="48" name="TextBox 47"/>
+          <p:cNvSpPr txBox="1"/>
+          <p:nvPr/>
+        </p:nvSpPr>
+        <p:spPr>
+          <a:xfrm>
+            <a:off x="8503920" y="5116068"/>
+            <a:ext cx="1828800" cy="237744"/>
           </a:xfrm>
           <a:prstGeom prst="rect">
             <a:avLst/>
@@ -9404,12 +9950,192 @@
               </a:spcAft>
             </a:pPr>
             <a:r>
-              <a:rPr sz="1500" b="0">
+              <a:rPr sz="1300" b="0">
                 <a:solidFill>
                   <a:srgbClr val="2B8A9E"/>
                 </a:solidFill>
                 <a:latin typeface="Georgia"/>
               </a:rPr>
+              <a:t>—</a:t>
+            </a:r>
+          </a:p>
+        </p:txBody>
+      </p:sp>
+      <p:sp>
+        <p:nvSpPr>
+          <p:cNvPr id="49" name="TextBox 48"/>
+          <p:cNvSpPr txBox="1"/>
+          <p:nvPr/>
+        </p:nvSpPr>
+        <p:spPr>
+          <a:xfrm>
+            <a:off x="822960" y="5413248"/>
+            <a:ext cx="4023360" cy="219456"/>
+          </a:xfrm>
+          <a:prstGeom prst="rect">
+            <a:avLst/>
+          </a:prstGeom>
+          <a:noFill/>
+        </p:spPr>
+        <p:txBody>
+          <a:bodyPr wrap="square" anchor="t" lIns="0" rIns="0" tIns="0" bIns="0">
+            <a:spAutoFit/>
+          </a:bodyPr>
+          <a:lstStyle/>
+          <a:p>
+            <a:pPr algn="l">
+              <a:lnSpc>
+                <a:spcPct val="100000"/>
+              </a:lnSpc>
+              <a:spcBef>
+                <a:spcPts val="0"/>
+              </a:spcBef>
+              <a:spcAft>
+                <a:spcPts val="0"/>
+              </a:spcAft>
+            </a:pPr>
+            <a:r>
+              <a:rPr sz="1200" b="1">
+                <a:solidFill>
+                  <a:srgbClr val="121E25"/>
+                </a:solidFill>
+                <a:latin typeface="Arial"/>
+              </a:rPr>
+              <a:t>Hosting and database</a:t>
+            </a:r>
+          </a:p>
+        </p:txBody>
+      </p:sp>
+      <p:sp>
+        <p:nvSpPr>
+          <p:cNvPr id="50" name="TextBox 49"/>
+          <p:cNvSpPr txBox="1"/>
+          <p:nvPr/>
+        </p:nvSpPr>
+        <p:spPr>
+          <a:xfrm>
+            <a:off x="3337560" y="5426964"/>
+            <a:ext cx="2560320" cy="219456"/>
+          </a:xfrm>
+          <a:prstGeom prst="rect">
+            <a:avLst/>
+          </a:prstGeom>
+          <a:noFill/>
+        </p:spPr>
+        <p:txBody>
+          <a:bodyPr wrap="square" anchor="t" lIns="0" rIns="0" tIns="0" bIns="0">
+            <a:spAutoFit/>
+          </a:bodyPr>
+          <a:lstStyle/>
+          <a:p>
+            <a:pPr algn="l">
+              <a:lnSpc>
+                <a:spcPct val="100000"/>
+              </a:lnSpc>
+              <a:spcBef>
+                <a:spcPts val="0"/>
+              </a:spcBef>
+              <a:spcAft>
+                <a:spcPts val="0"/>
+              </a:spcAft>
+            </a:pPr>
+            <a:r>
+              <a:rPr sz="950" b="0">
+                <a:solidFill>
+                  <a:srgbClr val="637782"/>
+                </a:solidFill>
+                <a:latin typeface="Arial"/>
+              </a:rPr>
+              <a:t>included above</a:t>
+            </a:r>
+          </a:p>
+        </p:txBody>
+      </p:sp>
+      <p:sp>
+        <p:nvSpPr>
+          <p:cNvPr id="51" name="TextBox 50"/>
+          <p:cNvSpPr txBox="1"/>
+          <p:nvPr/>
+        </p:nvSpPr>
+        <p:spPr>
+          <a:xfrm>
+            <a:off x="5943600" y="5404104"/>
+            <a:ext cx="2103120" cy="237744"/>
+          </a:xfrm>
+          <a:prstGeom prst="rect">
+            <a:avLst/>
+          </a:prstGeom>
+          <a:noFill/>
+        </p:spPr>
+        <p:txBody>
+          <a:bodyPr wrap="square" anchor="t" lIns="0" rIns="0" tIns="0" bIns="0">
+            <a:spAutoFit/>
+          </a:bodyPr>
+          <a:lstStyle/>
+          <a:p>
+            <a:pPr algn="l">
+              <a:lnSpc>
+                <a:spcPct val="100000"/>
+              </a:lnSpc>
+              <a:spcBef>
+                <a:spcPts val="0"/>
+              </a:spcBef>
+              <a:spcAft>
+                <a:spcPts val="0"/>
+              </a:spcAft>
+            </a:pPr>
+            <a:r>
+              <a:rPr sz="1300" b="0">
+                <a:solidFill>
+                  <a:srgbClr val="C4622D"/>
+                </a:solidFill>
+                <a:latin typeface="Georgia"/>
+              </a:rPr>
+              <a:t>—</a:t>
+            </a:r>
+          </a:p>
+        </p:txBody>
+      </p:sp>
+      <p:sp>
+        <p:nvSpPr>
+          <p:cNvPr id="52" name="TextBox 51"/>
+          <p:cNvSpPr txBox="1"/>
+          <p:nvPr/>
+        </p:nvSpPr>
+        <p:spPr>
+          <a:xfrm>
+            <a:off x="8503920" y="5404104"/>
+            <a:ext cx="1828800" cy="237744"/>
+          </a:xfrm>
+          <a:prstGeom prst="rect">
+            <a:avLst/>
+          </a:prstGeom>
+          <a:noFill/>
+        </p:spPr>
+        <p:txBody>
+          <a:bodyPr wrap="square" anchor="t" lIns="0" rIns="0" tIns="0" bIns="0">
+            <a:spAutoFit/>
+          </a:bodyPr>
+          <a:lstStyle/>
+          <a:p>
+            <a:pPr algn="l">
+              <a:lnSpc>
+                <a:spcPct val="100000"/>
+              </a:lnSpc>
+              <a:spcBef>
+                <a:spcPts val="0"/>
+              </a:spcBef>
+              <a:spcAft>
+                <a:spcPts val="0"/>
+              </a:spcAft>
+            </a:pPr>
+            <a:r>
+              <a:rPr sz="1300" b="0">
+                <a:solidFill>
+                  <a:srgbClr val="2B8A9E"/>
+                </a:solidFill>
+                <a:latin typeface="Georgia"/>
+              </a:rPr>
               <a:t>$144</a:t>
             </a:r>
           </a:p>
@@ -9417,14 +10143,14 @@
       </p:sp>
       <p:sp>
         <p:nvSpPr>
-          <p:cNvPr id="37" name="TextBox 36"/>
-          <p:cNvSpPr txBox="1"/>
-          <p:nvPr/>
-        </p:nvSpPr>
-        <p:spPr>
-          <a:xfrm>
-            <a:off x="8503920" y="5696712"/>
-            <a:ext cx="2743200" cy="237744"/>
+          <p:cNvPr id="53" name="TextBox 52"/>
+          <p:cNvSpPr txBox="1"/>
+          <p:nvPr/>
+        </p:nvSpPr>
+        <p:spPr>
+          <a:xfrm>
+            <a:off x="9555480" y="5426964"/>
+            <a:ext cx="2377440" cy="219456"/>
           </a:xfrm>
           <a:prstGeom prst="rect">
             <a:avLst/>
@@ -9449,26 +10175,296 @@
               </a:spcAft>
             </a:pPr>
             <a:r>
-              <a:rPr sz="1050" b="0">
+              <a:rPr sz="950" b="0">
                 <a:solidFill>
                   <a:srgbClr val="637782"/>
                 </a:solidFill>
                 <a:latin typeface="Arial"/>
               </a:rPr>
-              <a:t>hosting, all sites</a:t>
-            </a:r>
-          </a:p>
-        </p:txBody>
-      </p:sp>
-      <p:sp>
-        <p:nvSpPr>
-          <p:cNvPr id="38" name="Rectangle 37"/>
+              <a:t>$12/mo, every site</a:t>
+            </a:r>
+          </a:p>
+        </p:txBody>
+      </p:sp>
+      <p:sp>
+        <p:nvSpPr>
+          <p:cNvPr id="54" name="TextBox 53"/>
+          <p:cNvSpPr txBox="1"/>
+          <p:nvPr/>
+        </p:nvSpPr>
+        <p:spPr>
+          <a:xfrm>
+            <a:off x="822960" y="5792724"/>
+            <a:ext cx="4754880" cy="219456"/>
+          </a:xfrm>
+          <a:prstGeom prst="rect">
+            <a:avLst/>
+          </a:prstGeom>
+          <a:noFill/>
+        </p:spPr>
+        <p:txBody>
+          <a:bodyPr wrap="square" anchor="t" lIns="0" rIns="0" tIns="0" bIns="0">
+            <a:spAutoFit/>
+          </a:bodyPr>
+          <a:lstStyle/>
+          <a:p>
+            <a:pPr algn="l">
+              <a:lnSpc>
+                <a:spcPct val="100000"/>
+              </a:lnSpc>
+              <a:spcBef>
+                <a:spcPts val="0"/>
+              </a:spcBef>
+              <a:spcAft>
+                <a:spcPts val="0"/>
+              </a:spcAft>
+            </a:pPr>
+            <a:r>
+              <a:rPr sz="950" b="1">
+                <a:solidFill>
+                  <a:srgbClr val="9EAFB7"/>
+                </a:solidFill>
+                <a:latin typeface="Arial"/>
+              </a:rPr>
+              <a:t>EVERY 24 MONTHS</a:t>
+            </a:r>
+          </a:p>
+        </p:txBody>
+      </p:sp>
+      <p:sp>
+        <p:nvSpPr>
+          <p:cNvPr id="55" name="TextBox 54"/>
+          <p:cNvSpPr txBox="1"/>
+          <p:nvPr/>
+        </p:nvSpPr>
+        <p:spPr>
+          <a:xfrm>
+            <a:off x="822960" y="6030468"/>
+            <a:ext cx="4023360" cy="219456"/>
+          </a:xfrm>
+          <a:prstGeom prst="rect">
+            <a:avLst/>
+          </a:prstGeom>
+          <a:noFill/>
+        </p:spPr>
+        <p:txBody>
+          <a:bodyPr wrap="square" anchor="t" lIns="0" rIns="0" tIns="0" bIns="0">
+            <a:spAutoFit/>
+          </a:bodyPr>
+          <a:lstStyle/>
+          <a:p>
+            <a:pPr algn="l">
+              <a:lnSpc>
+                <a:spcPct val="100000"/>
+              </a:lnSpc>
+              <a:spcBef>
+                <a:spcPts val="0"/>
+              </a:spcBef>
+              <a:spcAft>
+                <a:spcPts val="0"/>
+              </a:spcAft>
+            </a:pPr>
+            <a:r>
+              <a:rPr sz="1200" b="1">
+                <a:solidFill>
+                  <a:srgbClr val="121E25"/>
+                </a:solidFill>
+                <a:latin typeface="Arial"/>
+              </a:rPr>
+              <a:t>NIST recertification</a:t>
+            </a:r>
+          </a:p>
+        </p:txBody>
+      </p:sp>
+      <p:sp>
+        <p:nvSpPr>
+          <p:cNvPr id="56" name="TextBox 55"/>
+          <p:cNvSpPr txBox="1"/>
+          <p:nvPr/>
+        </p:nvSpPr>
+        <p:spPr>
+          <a:xfrm>
+            <a:off x="3337560" y="6044184"/>
+            <a:ext cx="2560320" cy="219456"/>
+          </a:xfrm>
+          <a:prstGeom prst="rect">
+            <a:avLst/>
+          </a:prstGeom>
+          <a:noFill/>
+        </p:spPr>
+        <p:txBody>
+          <a:bodyPr wrap="square" anchor="t" lIns="0" rIns="0" tIns="0" bIns="0">
+            <a:spAutoFit/>
+          </a:bodyPr>
+          <a:lstStyle/>
+          <a:p>
+            <a:pPr algn="l">
+              <a:lnSpc>
+                <a:spcPct val="100000"/>
+              </a:lnSpc>
+              <a:spcBef>
+                <a:spcPts val="0"/>
+              </a:spcBef>
+              <a:spcAft>
+                <a:spcPts val="0"/>
+              </a:spcAft>
+            </a:pPr>
+            <a:r>
+              <a:rPr sz="950" b="0">
+                <a:solidFill>
+                  <a:srgbClr val="637782"/>
+                </a:solidFill>
+                <a:latin typeface="Arial"/>
+              </a:rPr>
+              <a:t>15 probes at $125</a:t>
+            </a:r>
+          </a:p>
+        </p:txBody>
+      </p:sp>
+      <p:sp>
+        <p:nvSpPr>
+          <p:cNvPr id="57" name="TextBox 56"/>
+          <p:cNvSpPr txBox="1"/>
+          <p:nvPr/>
+        </p:nvSpPr>
+        <p:spPr>
+          <a:xfrm>
+            <a:off x="5943600" y="6021324"/>
+            <a:ext cx="2103120" cy="237744"/>
+          </a:xfrm>
+          <a:prstGeom prst="rect">
+            <a:avLst/>
+          </a:prstGeom>
+          <a:noFill/>
+        </p:spPr>
+        <p:txBody>
+          <a:bodyPr wrap="square" anchor="t" lIns="0" rIns="0" tIns="0" bIns="0">
+            <a:spAutoFit/>
+          </a:bodyPr>
+          <a:lstStyle/>
+          <a:p>
+            <a:pPr algn="l">
+              <a:lnSpc>
+                <a:spcPct val="100000"/>
+              </a:lnSpc>
+              <a:spcBef>
+                <a:spcPts val="0"/>
+              </a:spcBef>
+              <a:spcAft>
+                <a:spcPts val="0"/>
+              </a:spcAft>
+            </a:pPr>
+            <a:r>
+              <a:rPr sz="1300" b="0">
+                <a:solidFill>
+                  <a:srgbClr val="C4622D"/>
+                </a:solidFill>
+                <a:latin typeface="Georgia"/>
+              </a:rPr>
+              <a:t>$1,875</a:t>
+            </a:r>
+          </a:p>
+        </p:txBody>
+      </p:sp>
+      <p:sp>
+        <p:nvSpPr>
+          <p:cNvPr id="58" name="TextBox 57"/>
+          <p:cNvSpPr txBox="1"/>
+          <p:nvPr/>
+        </p:nvSpPr>
+        <p:spPr>
+          <a:xfrm>
+            <a:off x="8503920" y="6021324"/>
+            <a:ext cx="1828800" cy="237744"/>
+          </a:xfrm>
+          <a:prstGeom prst="rect">
+            <a:avLst/>
+          </a:prstGeom>
+          <a:noFill/>
+        </p:spPr>
+        <p:txBody>
+          <a:bodyPr wrap="square" anchor="t" lIns="0" rIns="0" tIns="0" bIns="0">
+            <a:spAutoFit/>
+          </a:bodyPr>
+          <a:lstStyle/>
+          <a:p>
+            <a:pPr algn="l">
+              <a:lnSpc>
+                <a:spcPct val="100000"/>
+              </a:lnSpc>
+              <a:spcBef>
+                <a:spcPts val="0"/>
+              </a:spcBef>
+              <a:spcAft>
+                <a:spcPts val="0"/>
+              </a:spcAft>
+            </a:pPr>
+            <a:r>
+              <a:rPr sz="1300" b="0">
+                <a:solidFill>
+                  <a:srgbClr val="2B8A9E"/>
+                </a:solidFill>
+                <a:latin typeface="Georgia"/>
+              </a:rPr>
+              <a:t>$150</a:t>
+            </a:r>
+          </a:p>
+        </p:txBody>
+      </p:sp>
+      <p:sp>
+        <p:nvSpPr>
+          <p:cNvPr id="59" name="TextBox 58"/>
+          <p:cNvSpPr txBox="1"/>
+          <p:nvPr/>
+        </p:nvSpPr>
+        <p:spPr>
+          <a:xfrm>
+            <a:off x="9555480" y="6044184"/>
+            <a:ext cx="2377440" cy="219456"/>
+          </a:xfrm>
+          <a:prstGeom prst="rect">
+            <a:avLst/>
+          </a:prstGeom>
+          <a:noFill/>
+        </p:spPr>
+        <p:txBody>
+          <a:bodyPr wrap="square" anchor="t" lIns="0" rIns="0" tIns="0" bIns="0">
+            <a:spAutoFit/>
+          </a:bodyPr>
+          <a:lstStyle/>
+          <a:p>
+            <a:pPr algn="l">
+              <a:lnSpc>
+                <a:spcPct val="100000"/>
+              </a:lnSpc>
+              <a:spcBef>
+                <a:spcPts val="0"/>
+              </a:spcBef>
+              <a:spcAft>
+                <a:spcPts val="0"/>
+              </a:spcAft>
+            </a:pPr>
+            <a:r>
+              <a:rPr sz="950" b="0">
+                <a:solidFill>
+                  <a:srgbClr val="637782"/>
+                </a:solidFill>
+                <a:latin typeface="Arial"/>
+              </a:rPr>
+              <a:t>recalibrate in-house</a:t>
+            </a:r>
+          </a:p>
+        </p:txBody>
+      </p:sp>
+      <p:sp>
+        <p:nvSpPr>
+          <p:cNvPr id="60" name="Rectangle 59"/>
           <p:cNvSpPr/>
           <p:nvPr/>
         </p:nvSpPr>
         <p:spPr>
           <a:xfrm>
-            <a:off x="822960" y="6025896"/>
+            <a:off x="822960" y="6428232"/>
             <a:ext cx="10545775" cy="18288"/>
           </a:xfrm>
           <a:prstGeom prst="rect">
@@ -9506,14 +10502,14 @@
       </p:sp>
       <p:sp>
         <p:nvSpPr>
-          <p:cNvPr id="39" name="TextBox 38"/>
-          <p:cNvSpPr txBox="1"/>
-          <p:nvPr/>
-        </p:nvSpPr>
-        <p:spPr>
-          <a:xfrm>
-            <a:off x="822960" y="6172200"/>
-            <a:ext cx="4114800" cy="320040"/>
+          <p:cNvPr id="61" name="TextBox 60"/>
+          <p:cNvSpPr txBox="1"/>
+          <p:nvPr/>
+        </p:nvSpPr>
+        <p:spPr>
+          <a:xfrm>
+            <a:off x="822960" y="6556248"/>
+            <a:ext cx="2377440" cy="292608"/>
           </a:xfrm>
           <a:prstGeom prst="rect">
             <a:avLst/>
@@ -9538,7 +10534,7 @@
               </a:spcAft>
             </a:pPr>
             <a:r>
-              <a:rPr sz="1700" b="1">
+              <a:rPr sz="1500" b="1">
                 <a:solidFill>
                   <a:srgbClr val="121E25"/>
                 </a:solidFill>
@@ -9551,14 +10547,14 @@
       </p:sp>
       <p:sp>
         <p:nvSpPr>
-          <p:cNvPr id="40" name="TextBox 39"/>
-          <p:cNvSpPr txBox="1"/>
-          <p:nvPr/>
-        </p:nvSpPr>
-        <p:spPr>
-          <a:xfrm>
-            <a:off x="5943600" y="6135624"/>
-            <a:ext cx="2194560" cy="365760"/>
+          <p:cNvPr id="62" name="TextBox 61"/>
+          <p:cNvSpPr txBox="1"/>
+          <p:nvPr/>
+        </p:nvSpPr>
+        <p:spPr>
+          <a:xfrm>
+            <a:off x="5943600" y="6519672"/>
+            <a:ext cx="2194560" cy="329184"/>
           </a:xfrm>
           <a:prstGeom prst="rect">
             <a:avLst/>
@@ -9583,7 +10579,7 @@
               </a:spcAft>
             </a:pPr>
             <a:r>
-              <a:rPr sz="2400" b="0">
+              <a:rPr sz="2000" b="0">
                 <a:solidFill>
                   <a:srgbClr val="C4622D"/>
                 </a:solidFill>
@@ -9596,14 +10592,14 @@
       </p:sp>
       <p:sp>
         <p:nvSpPr>
-          <p:cNvPr id="41" name="TextBox 40"/>
-          <p:cNvSpPr txBox="1"/>
-          <p:nvPr/>
-        </p:nvSpPr>
-        <p:spPr>
-          <a:xfrm>
-            <a:off x="8503920" y="6135624"/>
-            <a:ext cx="2194560" cy="365760"/>
+          <p:cNvPr id="63" name="TextBox 62"/>
+          <p:cNvSpPr txBox="1"/>
+          <p:nvPr/>
+        </p:nvSpPr>
+        <p:spPr>
+          <a:xfrm>
+            <a:off x="8503920" y="6519672"/>
+            <a:ext cx="2194560" cy="329184"/>
           </a:xfrm>
           <a:prstGeom prst="rect">
             <a:avLst/>
@@ -9628,20 +10624,65 @@
               </a:spcAft>
             </a:pPr>
             <a:r>
-              <a:rPr sz="2400" b="0">
+              <a:rPr sz="2000" b="0">
                 <a:solidFill>
                   <a:srgbClr val="2B8A9E"/>
                 </a:solidFill>
                 <a:latin typeface="Georgia"/>
               </a:rPr>
-              <a:t>$1,544</a:t>
-            </a:r>
-          </a:p>
-        </p:txBody>
-      </p:sp>
-      <p:sp>
-        <p:nvSpPr>
-          <p:cNvPr id="42" name="TextBox 41"/>
+              <a:t>$1,856</a:t>
+            </a:r>
+          </a:p>
+        </p:txBody>
+      </p:sp>
+      <p:sp>
+        <p:nvSpPr>
+          <p:cNvPr id="64" name="TextBox 63"/>
+          <p:cNvSpPr txBox="1"/>
+          <p:nvPr/>
+        </p:nvSpPr>
+        <p:spPr>
+          <a:xfrm>
+            <a:off x="9966960" y="6592824"/>
+            <a:ext cx="2194560" cy="274320"/>
+          </a:xfrm>
+          <a:prstGeom prst="rect">
+            <a:avLst/>
+          </a:prstGeom>
+          <a:noFill/>
+        </p:spPr>
+        <p:txBody>
+          <a:bodyPr wrap="square" anchor="t" lIns="0" rIns="0" tIns="0" bIns="0">
+            <a:spAutoFit/>
+          </a:bodyPr>
+          <a:lstStyle/>
+          <a:p>
+            <a:pPr algn="l">
+              <a:lnSpc>
+                <a:spcPct val="100000"/>
+              </a:lnSpc>
+              <a:spcBef>
+                <a:spcPts val="0"/>
+              </a:spcBef>
+              <a:spcAft>
+                <a:spcPts val="0"/>
+              </a:spcAft>
+            </a:pPr>
+            <a:r>
+              <a:rPr sz="1200" b="1">
+                <a:solidFill>
+                  <a:srgbClr val="2E7D5B"/>
+                </a:solidFill>
+                <a:latin typeface="Arial"/>
+              </a:rPr>
+              <a:t>80% lower</a:t>
+            </a:r>
+          </a:p>
+        </p:txBody>
+      </p:sp>
+      <p:sp>
+        <p:nvSpPr>
+          <p:cNvPr id="65" name="TextBox 64"/>
           <p:cNvSpPr txBox="1"/>
           <p:nvPr/>
         </p:nvSpPr>
@@ -9679,7 +10720,7 @@
                 </a:solidFill>
                 <a:latin typeface="Arial"/>
               </a:rPr>
-              <a:t>Their figures are taken directly from the quote. Mine are at the same 15 monitoring points.</a:t>
+              <a:t>Left column is taken from the quote. Right column is my build at the same 15 monitoring points.</a:t>
             </a:r>
           </a:p>
         </p:txBody>
@@ -10099,7 +11140,7 @@
         <p:spPr>
           <a:xfrm>
             <a:off x="822960" y="4434840"/>
-            <a:ext cx="908857861469" cy="713232"/>
+            <a:ext cx="1082367089568" cy="713232"/>
           </a:xfrm>
           <a:prstGeom prst="rect">
             <a:avLst/>
@@ -10174,7 +11215,7 @@
                 </a:solidFill>
                 <a:latin typeface="Georgia"/>
               </a:rPr>
-              <a:t>$2,420</a:t>
+              <a:t>$2,882</a:t>
             </a:r>
           </a:p>
         </p:txBody>
@@ -10219,7 +11260,7 @@
                 </a:solidFill>
                 <a:latin typeface="Arial"/>
               </a:rPr>
-              <a:t>$1,050 hardware   +   $650 calibration   +   $720 hosting</a:t>
+              <a:t>$1,712 hardware and setup   +   $450 recalibration   +   $720 hosting</a:t>
             </a:r>
           </a:p>
         </p:txBody>
@@ -10308,7 +11349,7 @@
                 </a:solidFill>
                 <a:latin typeface="Georgia"/>
               </a:rPr>
-              <a:t>$15,836</a:t>
+              <a:t>$15,374</a:t>
             </a:r>
           </a:p>
           <a:p>
@@ -10685,22 +11726,22 @@
         <p:spPr>
           <a:xfrm>
             <a:off x="822960" y="2194560"/>
-            <a:ext cx="5486400" cy="292608"/>
-          </a:xfrm>
-          <a:prstGeom prst="rect">
-            <a:avLst/>
-          </a:prstGeom>
-          <a:noFill/>
-        </p:spPr>
-        <p:txBody>
-          <a:bodyPr wrap="square" anchor="t" lIns="0" rIns="0" tIns="0" bIns="0">
-            <a:spAutoFit/>
-          </a:bodyPr>
-          <a:lstStyle/>
-          <a:p>
-            <a:pPr algn="l">
-              <a:lnSpc>
-                <a:spcPct val="100000"/>
+            <a:ext cx="5486400" cy="566928"/>
+          </a:xfrm>
+          <a:prstGeom prst="rect">
+            <a:avLst/>
+          </a:prstGeom>
+          <a:noFill/>
+        </p:spPr>
+        <p:txBody>
+          <a:bodyPr wrap="square" anchor="t" lIns="0" rIns="0" tIns="0" bIns="0">
+            <a:spAutoFit/>
+          </a:bodyPr>
+          <a:lstStyle/>
+          <a:p>
+            <a:pPr algn="l">
+              <a:lnSpc>
+                <a:spcPct val="120000"/>
               </a:lnSpc>
               <a:spcBef>
                 <a:spcPts val="0"/>
@@ -10716,6 +11757,186 @@
                 </a:solidFill>
                 <a:latin typeface="Arial"/>
               </a:rPr>
+              <a:t>The unit mounts outside, the probe goes in</a:t>
+            </a:r>
+          </a:p>
+        </p:txBody>
+      </p:sp>
+      <p:sp>
+        <p:nvSpPr>
+          <p:cNvPr id="6" name="TextBox 5"/>
+          <p:cNvSpPr txBox="1"/>
+          <p:nvPr/>
+        </p:nvSpPr>
+        <p:spPr>
+          <a:xfrm>
+            <a:off x="822960" y="2761488"/>
+            <a:ext cx="5394960" cy="685800"/>
+          </a:xfrm>
+          <a:prstGeom prst="rect">
+            <a:avLst/>
+          </a:prstGeom>
+          <a:noFill/>
+        </p:spPr>
+        <p:txBody>
+          <a:bodyPr wrap="square" anchor="t" lIns="0" rIns="0" tIns="0" bIns="0">
+            <a:spAutoFit/>
+          </a:bodyPr>
+          <a:lstStyle/>
+          <a:p>
+            <a:pPr algn="l">
+              <a:lnSpc>
+                <a:spcPct val="135000"/>
+              </a:lnSpc>
+              <a:spcBef>
+                <a:spcPts val="0"/>
+              </a:spcBef>
+              <a:spcAft>
+                <a:spcPts val="0"/>
+              </a:spcAft>
+            </a:pPr>
+            <a:r>
+              <a:rPr sz="1250" b="0">
+                <a:solidFill>
+                  <a:srgbClr val="637782"/>
+                </a:solidFill>
+                <a:latin typeface="Arial"/>
+              </a:rPr>
+              <a:t>A flat cable passes through the door seal without compromising it. Nothing gets drilled and nothing about the freezer gets modified.</a:t>
+            </a:r>
+          </a:p>
+        </p:txBody>
+      </p:sp>
+      <p:sp>
+        <p:nvSpPr>
+          <p:cNvPr id="7" name="TextBox 6"/>
+          <p:cNvSpPr txBox="1"/>
+          <p:nvPr/>
+        </p:nvSpPr>
+        <p:spPr>
+          <a:xfrm>
+            <a:off x="822960" y="3493008"/>
+            <a:ext cx="5486400" cy="566928"/>
+          </a:xfrm>
+          <a:prstGeom prst="rect">
+            <a:avLst/>
+          </a:prstGeom>
+          <a:noFill/>
+        </p:spPr>
+        <p:txBody>
+          <a:bodyPr wrap="square" anchor="t" lIns="0" rIns="0" tIns="0" bIns="0">
+            <a:spAutoFit/>
+          </a:bodyPr>
+          <a:lstStyle/>
+          <a:p>
+            <a:pPr algn="l">
+              <a:lnSpc>
+                <a:spcPct val="120000"/>
+              </a:lnSpc>
+              <a:spcBef>
+                <a:spcPts val="0"/>
+              </a:spcBef>
+              <a:spcAft>
+                <a:spcPts val="0"/>
+              </a:spcAft>
+            </a:pPr>
+            <a:r>
+              <a:rPr sz="1600" b="1">
+                <a:solidFill>
+                  <a:srgbClr val="121E25"/>
+                </a:solidFill>
+                <a:latin typeface="Arial"/>
+              </a:rPr>
+              <a:t>That's also why it needs no gateway</a:t>
+            </a:r>
+          </a:p>
+        </p:txBody>
+      </p:sp>
+      <p:sp>
+        <p:nvSpPr>
+          <p:cNvPr id="8" name="TextBox 7"/>
+          <p:cNvSpPr txBox="1"/>
+          <p:nvPr/>
+        </p:nvSpPr>
+        <p:spPr>
+          <a:xfrm>
+            <a:off x="822960" y="4059936"/>
+            <a:ext cx="5394960" cy="685800"/>
+          </a:xfrm>
+          <a:prstGeom prst="rect">
+            <a:avLst/>
+          </a:prstGeom>
+          <a:noFill/>
+        </p:spPr>
+        <p:txBody>
+          <a:bodyPr wrap="square" anchor="t" lIns="0" rIns="0" tIns="0" bIns="0">
+            <a:spAutoFit/>
+          </a:bodyPr>
+          <a:lstStyle/>
+          <a:p>
+            <a:pPr algn="l">
+              <a:lnSpc>
+                <a:spcPct val="135000"/>
+              </a:lnSpc>
+              <a:spcBef>
+                <a:spcPts val="0"/>
+              </a:spcBef>
+              <a:spcAft>
+                <a:spcPts val="0"/>
+              </a:spcAft>
+            </a:pPr>
+            <a:r>
+              <a:rPr sz="1250" b="0">
+                <a:solidFill>
+                  <a:srgbClr val="637782"/>
+                </a:solidFill>
+                <a:latin typeface="Arial"/>
+              </a:rPr>
+              <a:t>Because the radio sits outside the metal box, it reaches the building WiFi directly. No proprietary protocol, no $599 gateways, no extra hardware to fail.</a:t>
+            </a:r>
+          </a:p>
+        </p:txBody>
+      </p:sp>
+      <p:sp>
+        <p:nvSpPr>
+          <p:cNvPr id="9" name="TextBox 8"/>
+          <p:cNvSpPr txBox="1"/>
+          <p:nvPr/>
+        </p:nvSpPr>
+        <p:spPr>
+          <a:xfrm>
+            <a:off x="822960" y="4791456"/>
+            <a:ext cx="5486400" cy="566928"/>
+          </a:xfrm>
+          <a:prstGeom prst="rect">
+            <a:avLst/>
+          </a:prstGeom>
+          <a:noFill/>
+        </p:spPr>
+        <p:txBody>
+          <a:bodyPr wrap="square" anchor="t" lIns="0" rIns="0" tIns="0" bIns="0">
+            <a:spAutoFit/>
+          </a:bodyPr>
+          <a:lstStyle/>
+          <a:p>
+            <a:pPr algn="l">
+              <a:lnSpc>
+                <a:spcPct val="120000"/>
+              </a:lnSpc>
+              <a:spcBef>
+                <a:spcPts val="0"/>
+              </a:spcBef>
+              <a:spcAft>
+                <a:spcPts val="0"/>
+              </a:spcAft>
+            </a:pPr>
+            <a:r>
+              <a:rPr sz="1600" b="1">
+                <a:solidFill>
+                  <a:srgbClr val="121E25"/>
+                </a:solidFill>
+                <a:latin typeface="Arial"/>
+              </a:rPr>
               <a:t>Mains powered</a:t>
             </a:r>
           </a:p>
@@ -10723,13 +11944,13 @@
       </p:sp>
       <p:sp>
         <p:nvSpPr>
-          <p:cNvPr id="6" name="TextBox 5"/>
-          <p:cNvSpPr txBox="1"/>
-          <p:nvPr/>
-        </p:nvSpPr>
-        <p:spPr>
-          <a:xfrm>
-            <a:off x="822960" y="2523744"/>
+          <p:cNvPr id="10" name="TextBox 9"/>
+          <p:cNvSpPr txBox="1"/>
+          <p:nvPr/>
+        </p:nvSpPr>
+        <p:spPr>
+          <a:xfrm>
+            <a:off x="822960" y="5358384"/>
             <a:ext cx="5394960" cy="685800"/>
           </a:xfrm>
           <a:prstGeom prst="rect">
@@ -10761,187 +11982,7 @@
                 </a:solidFill>
                 <a:latin typeface="Arial"/>
               </a:rPr>
-              <a:t>Freezers and server rooms both have power. No batteries to manage, and no dead sensor because nobody swapped a cell.</a:t>
-            </a:r>
-          </a:p>
-        </p:txBody>
-      </p:sp>
-      <p:sp>
-        <p:nvSpPr>
-          <p:cNvPr id="7" name="TextBox 6"/>
-          <p:cNvSpPr txBox="1"/>
-          <p:nvPr/>
-        </p:nvSpPr>
-        <p:spPr>
-          <a:xfrm>
-            <a:off x="822960" y="3401568"/>
-            <a:ext cx="5486400" cy="292608"/>
-          </a:xfrm>
-          <a:prstGeom prst="rect">
-            <a:avLst/>
-          </a:prstGeom>
-          <a:noFill/>
-        </p:spPr>
-        <p:txBody>
-          <a:bodyPr wrap="square" anchor="t" lIns="0" rIns="0" tIns="0" bIns="0">
-            <a:spAutoFit/>
-          </a:bodyPr>
-          <a:lstStyle/>
-          <a:p>
-            <a:pPr algn="l">
-              <a:lnSpc>
-                <a:spcPct val="100000"/>
-              </a:lnSpc>
-              <a:spcBef>
-                <a:spcPts val="0"/>
-              </a:spcBef>
-              <a:spcAft>
-                <a:spcPts val="0"/>
-              </a:spcAft>
-            </a:pPr>
-            <a:r>
-              <a:rPr sz="1600" b="1">
-                <a:solidFill>
-                  <a:srgbClr val="121E25"/>
-                </a:solidFill>
-                <a:latin typeface="Arial"/>
-              </a:rPr>
-              <a:t>Probe through the gasket</a:t>
-            </a:r>
-          </a:p>
-        </p:txBody>
-      </p:sp>
-      <p:sp>
-        <p:nvSpPr>
-          <p:cNvPr id="8" name="TextBox 7"/>
-          <p:cNvSpPr txBox="1"/>
-          <p:nvPr/>
-        </p:nvSpPr>
-        <p:spPr>
-          <a:xfrm>
-            <a:off x="822960" y="3730752"/>
-            <a:ext cx="5394960" cy="685800"/>
-          </a:xfrm>
-          <a:prstGeom prst="rect">
-            <a:avLst/>
-          </a:prstGeom>
-          <a:noFill/>
-        </p:spPr>
-        <p:txBody>
-          <a:bodyPr wrap="square" anchor="t" lIns="0" rIns="0" tIns="0" bIns="0">
-            <a:spAutoFit/>
-          </a:bodyPr>
-          <a:lstStyle/>
-          <a:p>
-            <a:pPr algn="l">
-              <a:lnSpc>
-                <a:spcPct val="135000"/>
-              </a:lnSpc>
-              <a:spcBef>
-                <a:spcPts val="0"/>
-              </a:spcBef>
-              <a:spcAft>
-                <a:spcPts val="0"/>
-              </a:spcAft>
-            </a:pPr>
-            <a:r>
-              <a:rPr sz="1250" b="0">
-                <a:solidFill>
-                  <a:srgbClr val="637782"/>
-                </a:solidFill>
-                <a:latin typeface="Arial"/>
-              </a:rPr>
-              <a:t>A flat cable passes through the door seal without compromising it. Nothing gets drilled, nothing gets modified.</a:t>
-            </a:r>
-          </a:p>
-        </p:txBody>
-      </p:sp>
-      <p:sp>
-        <p:nvSpPr>
-          <p:cNvPr id="9" name="TextBox 8"/>
-          <p:cNvSpPr txBox="1"/>
-          <p:nvPr/>
-        </p:nvSpPr>
-        <p:spPr>
-          <a:xfrm>
-            <a:off x="822960" y="4608576"/>
-            <a:ext cx="5486400" cy="292608"/>
-          </a:xfrm>
-          <a:prstGeom prst="rect">
-            <a:avLst/>
-          </a:prstGeom>
-          <a:noFill/>
-        </p:spPr>
-        <p:txBody>
-          <a:bodyPr wrap="square" anchor="t" lIns="0" rIns="0" tIns="0" bIns="0">
-            <a:spAutoFit/>
-          </a:bodyPr>
-          <a:lstStyle/>
-          <a:p>
-            <a:pPr algn="l">
-              <a:lnSpc>
-                <a:spcPct val="100000"/>
-              </a:lnSpc>
-              <a:spcBef>
-                <a:spcPts val="0"/>
-              </a:spcBef>
-              <a:spcAft>
-                <a:spcPts val="0"/>
-              </a:spcAft>
-            </a:pPr>
-            <a:r>
-              <a:rPr sz="1600" b="1">
-                <a:solidFill>
-                  <a:srgbClr val="121E25"/>
-                </a:solidFill>
-                <a:latin typeface="Arial"/>
-              </a:rPr>
-              <a:t>Enclosure I print myself</a:t>
-            </a:r>
-          </a:p>
-        </p:txBody>
-      </p:sp>
-      <p:sp>
-        <p:nvSpPr>
-          <p:cNvPr id="10" name="TextBox 9"/>
-          <p:cNvSpPr txBox="1"/>
-          <p:nvPr/>
-        </p:nvSpPr>
-        <p:spPr>
-          <a:xfrm>
-            <a:off x="822960" y="4937760"/>
-            <a:ext cx="5394960" cy="685800"/>
-          </a:xfrm>
-          <a:prstGeom prst="rect">
-            <a:avLst/>
-          </a:prstGeom>
-          <a:noFill/>
-        </p:spPr>
-        <p:txBody>
-          <a:bodyPr wrap="square" anchor="t" lIns="0" rIns="0" tIns="0" bIns="0">
-            <a:spAutoFit/>
-          </a:bodyPr>
-          <a:lstStyle/>
-          <a:p>
-            <a:pPr algn="l">
-              <a:lnSpc>
-                <a:spcPct val="135000"/>
-              </a:lnSpc>
-              <a:spcBef>
-                <a:spcPts val="0"/>
-              </a:spcBef>
-              <a:spcAft>
-                <a:spcPts val="0"/>
-              </a:spcAft>
-            </a:pPr>
-            <a:r>
-              <a:rPr sz="1250" b="0">
-                <a:solidFill>
-                  <a:srgbClr val="637782"/>
-                </a:solidFill>
-                <a:latin typeface="Arial"/>
-              </a:rPr>
-              <a:t>About $10, and I can change the shape for whatever mounting a site needs.</a:t>
+              <a:t>Freezers and server rooms both have power within a few feet. Nothing to charge, and no sensor going dark because a battery was missed.</a:t>
             </a:r>
           </a:p>
         </p:txBody>
@@ -10955,7 +11996,7 @@
         <p:spPr>
           <a:xfrm>
             <a:off x="6812280" y="2148840"/>
-            <a:ext cx="4526280" cy="3246120"/>
+            <a:ext cx="4526280" cy="3383280"/>
           </a:xfrm>
           <a:prstGeom prst="roundRect">
             <a:avLst>
@@ -11032,7 +12073,7 @@
                 </a:solidFill>
                 <a:latin typeface="Arial"/>
               </a:rPr>
-              <a:t>WHY NOT BATTERIES</a:t>
+              <a:t>WHY THEIRS NEEDS FOUR GATEWAYS</a:t>
             </a:r>
           </a:p>
         </p:txBody>
@@ -11046,7 +12087,7 @@
         <p:spPr>
           <a:xfrm>
             <a:off x="7178040" y="2816352"/>
-            <a:ext cx="3840480" cy="2377440"/>
+            <a:ext cx="3840480" cy="2468880"/>
           </a:xfrm>
           <a:prstGeom prst="rect">
             <a:avLst/>
@@ -11077,7 +12118,7 @@
                 </a:solidFill>
                 <a:latin typeface="Arial"/>
               </a:rPr>
-              <a:t>Lithium cells lose 20–40% of their capacity at freezer temperatures.</a:t>
+              <a:t>A wireless sensor sitting inside a metal freezer has a hard radio problem.</a:t>
             </a:r>
           </a:p>
           <a:p>
@@ -11099,7 +12140,29 @@
                 </a:solidFill>
                 <a:latin typeface="Arial"/>
               </a:rPr>
-              <a:t>Every one of these installs is somewhere with a wall socket a few feet away. Running on mains removes an entire category of failure — and it's why I can report every few minutes instead of once an hour.</a:t>
+              <a:t>That's the problem their proprietary protocol and gateways exist to solve. Putting the electronics outside and running only the probe through the seal avoids the problem instead of paying to work around it.</a:t>
+            </a:r>
+          </a:p>
+          <a:p>
+            <a:pPr algn="l">
+              <a:lnSpc>
+                <a:spcPct val="135000"/>
+              </a:lnSpc>
+              <a:spcBef>
+                <a:spcPts val="1000"/>
+              </a:spcBef>
+              <a:spcAft>
+                <a:spcPts val="0"/>
+              </a:spcAft>
+            </a:pPr>
+            <a:r>
+              <a:rPr sz="1250" b="1">
+                <a:solidFill>
+                  <a:srgbClr val="121E25"/>
+                </a:solidFill>
+                <a:latin typeface="Arial"/>
+              </a:rPr>
+              <a:t>Same reason mains power is straightforward: the unit is never inside the cold.</a:t>
             </a:r>
           </a:p>
         </p:txBody>

--- a/presentation/Fleet-Temperature-Monitoring.pptx
+++ b/presentation/Fleet-Temperature-Monitoring.pptx
@@ -4620,7 +4620,7 @@
                 </a:solidFill>
                 <a:latin typeface="Arial"/>
               </a:rPr>
-              <a:t>I can cover the same 15 points for $1,856 — and it is already running.</a:t>
+              <a:t>I can cover the same 15 points for $1,178 — and it is already running.</a:t>
             </a:r>
           </a:p>
         </p:txBody>
@@ -5206,7 +5206,7 @@
                 </a:solidFill>
                 <a:latin typeface="Georgia"/>
               </a:rPr>
-              <a:t>$70</a:t>
+              <a:t>$35</a:t>
             </a:r>
           </a:p>
         </p:txBody>
@@ -8471,7 +8471,7 @@
                 </a:solidFill>
                 <a:latin typeface="Arial"/>
               </a:rPr>
-              <a:t>Sensor unit + display</a:t>
+              <a:t>Controller board</a:t>
             </a:r>
           </a:p>
         </p:txBody>
@@ -8516,7 +8516,7 @@
                 </a:solidFill>
                 <a:latin typeface="Arial"/>
               </a:rPr>
-              <a:t>10 at $245</a:t>
+              <a:t>included in sensor unit</a:t>
             </a:r>
           </a:p>
         </p:txBody>
@@ -8561,7 +8561,7 @@
                 </a:solidFill>
                 <a:latin typeface="Georgia"/>
               </a:rPr>
-              <a:t>$2,450</a:t>
+              <a:t>—</a:t>
             </a:r>
           </a:p>
         </p:txBody>
@@ -8606,7 +8606,7 @@
                 </a:solidFill>
                 <a:latin typeface="Georgia"/>
               </a:rPr>
-              <a:t>$900</a:t>
+              <a:t>$105</a:t>
             </a:r>
           </a:p>
         </p:txBody>
@@ -8651,7 +8651,7 @@
                 </a:solidFill>
                 <a:latin typeface="Arial"/>
               </a:rPr>
-              <a:t>15 at $60</a:t>
+              <a:t>15 ESP32 at $7</a:t>
             </a:r>
           </a:p>
         </p:txBody>
@@ -8696,7 +8696,7 @@
                 </a:solidFill>
                 <a:latin typeface="Arial"/>
               </a:rPr>
-              <a:t>Probe + NIST certificate</a:t>
+              <a:t>Sensor unit + display</a:t>
             </a:r>
           </a:p>
         </p:txBody>
@@ -8741,7 +8741,7 @@
                 </a:solidFill>
                 <a:latin typeface="Arial"/>
               </a:rPr>
-              <a:t>15 at $125 — expires at 24 months</a:t>
+              <a:t>10 at $245</a:t>
             </a:r>
           </a:p>
         </p:txBody>
@@ -8786,7 +8786,7 @@
                 </a:solidFill>
                 <a:latin typeface="Georgia"/>
               </a:rPr>
-              <a:t>$1,875</a:t>
+              <a:t>$2,450</a:t>
             </a:r>
           </a:p>
         </p:txBody>
@@ -8831,7 +8831,7 @@
                 </a:solidFill>
                 <a:latin typeface="Georgia"/>
               </a:rPr>
-              <a:t>$150</a:t>
+              <a:t>—</a:t>
             </a:r>
           </a:p>
         </p:txBody>
@@ -8839,51 +8839,6 @@
       <p:sp>
         <p:nvSpPr>
           <p:cNvPr id="24" name="TextBox 23"/>
-          <p:cNvSpPr txBox="1"/>
-          <p:nvPr/>
-        </p:nvSpPr>
-        <p:spPr>
-          <a:xfrm>
-            <a:off x="9555480" y="3369564"/>
-            <a:ext cx="2377440" cy="219456"/>
-          </a:xfrm>
-          <a:prstGeom prst="rect">
-            <a:avLst/>
-          </a:prstGeom>
-          <a:noFill/>
-        </p:spPr>
-        <p:txBody>
-          <a:bodyPr wrap="square" anchor="t" lIns="0" rIns="0" tIns="0" bIns="0">
-            <a:spAutoFit/>
-          </a:bodyPr>
-          <a:lstStyle/>
-          <a:p>
-            <a:pPr algn="l">
-              <a:lnSpc>
-                <a:spcPct val="100000"/>
-              </a:lnSpc>
-              <a:spcBef>
-                <a:spcPts val="0"/>
-              </a:spcBef>
-              <a:spcAft>
-                <a:spcPts val="0"/>
-              </a:spcAft>
-            </a:pPr>
-            <a:r>
-              <a:rPr sz="950" b="0">
-                <a:solidFill>
-                  <a:srgbClr val="637782"/>
-                </a:solidFill>
-                <a:latin typeface="Arial"/>
-              </a:rPr>
-              <a:t>15 probes at $10</a:t>
-            </a:r>
-          </a:p>
-        </p:txBody>
-      </p:sp>
-      <p:sp>
-        <p:nvSpPr>
-          <p:cNvPr id="25" name="TextBox 24"/>
           <p:cNvSpPr txBox="1"/>
           <p:nvPr/>
         </p:nvSpPr>
@@ -8921,14 +8876,14 @@
                 </a:solidFill>
                 <a:latin typeface="Arial"/>
               </a:rPr>
-              <a:t>Enclosure</a:t>
-            </a:r>
-          </a:p>
-        </p:txBody>
-      </p:sp>
-      <p:sp>
-        <p:nvSpPr>
-          <p:cNvPr id="26" name="TextBox 25"/>
+              <a:t>Temperature probe</a:t>
+            </a:r>
+          </a:p>
+        </p:txBody>
+      </p:sp>
+      <p:sp>
+        <p:nvSpPr>
+          <p:cNvPr id="25" name="TextBox 24"/>
           <p:cNvSpPr txBox="1"/>
           <p:nvPr/>
         </p:nvSpPr>
@@ -8966,14 +8921,14 @@
                 </a:solidFill>
                 <a:latin typeface="Arial"/>
               </a:rPr>
-              <a:t>included</a:t>
-            </a:r>
-          </a:p>
-        </p:txBody>
-      </p:sp>
-      <p:sp>
-        <p:nvSpPr>
-          <p:cNvPr id="27" name="TextBox 26"/>
+              <a:t>15 at $125 with NIST cert</a:t>
+            </a:r>
+          </a:p>
+        </p:txBody>
+      </p:sp>
+      <p:sp>
+        <p:nvSpPr>
+          <p:cNvPr id="26" name="TextBox 25"/>
           <p:cNvSpPr txBox="1"/>
           <p:nvPr/>
         </p:nvSpPr>
@@ -9011,14 +8966,14 @@
                 </a:solidFill>
                 <a:latin typeface="Georgia"/>
               </a:rPr>
-              <a:t>—</a:t>
-            </a:r>
-          </a:p>
-        </p:txBody>
-      </p:sp>
-      <p:sp>
-        <p:nvSpPr>
-          <p:cNvPr id="28" name="TextBox 27"/>
+              <a:t>$1,875</a:t>
+            </a:r>
+          </a:p>
+        </p:txBody>
+      </p:sp>
+      <p:sp>
+        <p:nvSpPr>
+          <p:cNvPr id="27" name="TextBox 26"/>
           <p:cNvSpPr txBox="1"/>
           <p:nvPr/>
         </p:nvSpPr>
@@ -9063,7 +9018,7 @@
       </p:sp>
       <p:sp>
         <p:nvSpPr>
-          <p:cNvPr id="29" name="TextBox 28"/>
+          <p:cNvPr id="28" name="TextBox 27"/>
           <p:cNvSpPr txBox="1"/>
           <p:nvPr/>
         </p:nvSpPr>
@@ -9101,14 +9056,14 @@
                 </a:solidFill>
                 <a:latin typeface="Arial"/>
               </a:rPr>
-              <a:t>15 printed at $10</a:t>
-            </a:r>
-          </a:p>
-        </p:txBody>
-      </p:sp>
-      <p:sp>
-        <p:nvSpPr>
-          <p:cNvPr id="30" name="TextBox 29"/>
+              <a:t>15 at $10</a:t>
+            </a:r>
+          </a:p>
+        </p:txBody>
+      </p:sp>
+      <p:sp>
+        <p:nvSpPr>
+          <p:cNvPr id="29" name="TextBox 28"/>
           <p:cNvSpPr txBox="1"/>
           <p:nvPr/>
         </p:nvSpPr>
@@ -9146,14 +9101,14 @@
                 </a:solidFill>
                 <a:latin typeface="Arial"/>
               </a:rPr>
-              <a:t>Calibration reference</a:t>
-            </a:r>
-          </a:p>
-        </p:txBody>
-      </p:sp>
-      <p:sp>
-        <p:nvSpPr>
-          <p:cNvPr id="31" name="TextBox 30"/>
+              <a:t>Power supply</a:t>
+            </a:r>
+          </a:p>
+        </p:txBody>
+      </p:sp>
+      <p:sp>
+        <p:nvSpPr>
+          <p:cNvPr id="30" name="TextBox 29"/>
           <p:cNvSpPr txBox="1"/>
           <p:nvPr/>
         </p:nvSpPr>
@@ -9191,14 +9146,14 @@
                 </a:solidFill>
                 <a:latin typeface="Arial"/>
               </a:rPr>
-              <a:t>n/a — bought per sensor</a:t>
-            </a:r>
-          </a:p>
-        </p:txBody>
-      </p:sp>
-      <p:sp>
-        <p:nvSpPr>
-          <p:cNvPr id="32" name="TextBox 31"/>
+              <a:t>included</a:t>
+            </a:r>
+          </a:p>
+        </p:txBody>
+      </p:sp>
+      <p:sp>
+        <p:nvSpPr>
+          <p:cNvPr id="31" name="TextBox 30"/>
           <p:cNvSpPr txBox="1"/>
           <p:nvPr/>
         </p:nvSpPr>
@@ -9243,7 +9198,7 @@
       </p:sp>
       <p:sp>
         <p:nvSpPr>
-          <p:cNvPr id="33" name="TextBox 32"/>
+          <p:cNvPr id="32" name="TextBox 31"/>
           <p:cNvSpPr txBox="1"/>
           <p:nvPr/>
         </p:nvSpPr>
@@ -9281,14 +9236,14 @@
                 </a:solidFill>
                 <a:latin typeface="Georgia"/>
               </a:rPr>
-              <a:t>$350</a:t>
-            </a:r>
-          </a:p>
-        </p:txBody>
-      </p:sp>
-      <p:sp>
-        <p:nvSpPr>
-          <p:cNvPr id="34" name="TextBox 33"/>
+              <a:t>$150</a:t>
+            </a:r>
+          </a:p>
+        </p:txBody>
+      </p:sp>
+      <p:sp>
+        <p:nvSpPr>
+          <p:cNvPr id="33" name="TextBox 32"/>
           <p:cNvSpPr txBox="1"/>
           <p:nvPr/>
         </p:nvSpPr>
@@ -9326,14 +9281,14 @@
                 </a:solidFill>
                 <a:latin typeface="Arial"/>
               </a:rPr>
-              <a:t>one, covers the fleet</a:t>
-            </a:r>
-          </a:p>
-        </p:txBody>
-      </p:sp>
-      <p:sp>
-        <p:nvSpPr>
-          <p:cNvPr id="35" name="TextBox 34"/>
+              <a:t>15 at $10</a:t>
+            </a:r>
+          </a:p>
+        </p:txBody>
+      </p:sp>
+      <p:sp>
+        <p:nvSpPr>
+          <p:cNvPr id="34" name="TextBox 33"/>
           <p:cNvSpPr txBox="1"/>
           <p:nvPr/>
         </p:nvSpPr>
@@ -9371,14 +9326,14 @@
                 </a:solidFill>
                 <a:latin typeface="Arial"/>
               </a:rPr>
-              <a:t>Duty, tariff, freight</a:t>
-            </a:r>
-          </a:p>
-        </p:txBody>
-      </p:sp>
-      <p:sp>
-        <p:nvSpPr>
-          <p:cNvPr id="36" name="TextBox 35"/>
+              <a:t>Enclosure</a:t>
+            </a:r>
+          </a:p>
+        </p:txBody>
+      </p:sp>
+      <p:sp>
+        <p:nvSpPr>
+          <p:cNvPr id="35" name="TextBox 34"/>
           <p:cNvSpPr txBox="1"/>
           <p:nvPr/>
         </p:nvSpPr>
@@ -9416,14 +9371,14 @@
                 </a:solidFill>
                 <a:latin typeface="Arial"/>
               </a:rPr>
-              <a:t>imported</a:t>
-            </a:r>
-          </a:p>
-        </p:txBody>
-      </p:sp>
-      <p:sp>
-        <p:nvSpPr>
-          <p:cNvPr id="37" name="TextBox 36"/>
+              <a:t>included</a:t>
+            </a:r>
+          </a:p>
+        </p:txBody>
+      </p:sp>
+      <p:sp>
+        <p:nvSpPr>
+          <p:cNvPr id="36" name="TextBox 35"/>
           <p:cNvSpPr txBox="1"/>
           <p:nvPr/>
         </p:nvSpPr>
@@ -9461,14 +9416,14 @@
                 </a:solidFill>
                 <a:latin typeface="Georgia"/>
               </a:rPr>
-              <a:t>$407</a:t>
-            </a:r>
-          </a:p>
-        </p:txBody>
-      </p:sp>
-      <p:sp>
-        <p:nvSpPr>
-          <p:cNvPr id="38" name="TextBox 37"/>
+              <a:t>—</a:t>
+            </a:r>
+          </a:p>
+        </p:txBody>
+      </p:sp>
+      <p:sp>
+        <p:nvSpPr>
+          <p:cNvPr id="37" name="TextBox 36"/>
           <p:cNvSpPr txBox="1"/>
           <p:nvPr/>
         </p:nvSpPr>
@@ -9506,14 +9461,14 @@
                 </a:solidFill>
                 <a:latin typeface="Georgia"/>
               </a:rPr>
-              <a:t>$0</a:t>
-            </a:r>
-          </a:p>
-        </p:txBody>
-      </p:sp>
-      <p:sp>
-        <p:nvSpPr>
-          <p:cNvPr id="39" name="TextBox 38"/>
+              <a:t>$120</a:t>
+            </a:r>
+          </a:p>
+        </p:txBody>
+      </p:sp>
+      <p:sp>
+        <p:nvSpPr>
+          <p:cNvPr id="38" name="TextBox 37"/>
           <p:cNvSpPr txBox="1"/>
           <p:nvPr/>
         </p:nvSpPr>
@@ -9551,14 +9506,14 @@
                 </a:solidFill>
                 <a:latin typeface="Arial"/>
               </a:rPr>
-              <a:t>sourced domestically</a:t>
-            </a:r>
-          </a:p>
-        </p:txBody>
-      </p:sp>
-      <p:sp>
-        <p:nvSpPr>
-          <p:cNvPr id="40" name="TextBox 39"/>
+              <a:t>15 printed at $8</a:t>
+            </a:r>
+          </a:p>
+        </p:txBody>
+      </p:sp>
+      <p:sp>
+        <p:nvSpPr>
+          <p:cNvPr id="39" name="TextBox 38"/>
           <p:cNvSpPr txBox="1"/>
           <p:nvPr/>
         </p:nvSpPr>
@@ -9596,14 +9551,14 @@
                 </a:solidFill>
                 <a:latin typeface="Arial"/>
               </a:rPr>
-              <a:t>Sales tax</a:t>
-            </a:r>
-          </a:p>
-        </p:txBody>
-      </p:sp>
-      <p:sp>
-        <p:nvSpPr>
-          <p:cNvPr id="41" name="TextBox 40"/>
+              <a:t>Calibration reference</a:t>
+            </a:r>
+          </a:p>
+        </p:txBody>
+      </p:sp>
+      <p:sp>
+        <p:nvSpPr>
+          <p:cNvPr id="40" name="TextBox 39"/>
           <p:cNvSpPr txBox="1"/>
           <p:nvPr/>
         </p:nvSpPr>
@@ -9641,14 +9596,14 @@
                 </a:solidFill>
                 <a:latin typeface="Arial"/>
               </a:rPr>
-              <a:t>10.5%</a:t>
-            </a:r>
-          </a:p>
-        </p:txBody>
-      </p:sp>
-      <p:sp>
-        <p:nvSpPr>
-          <p:cNvPr id="42" name="TextBox 41"/>
+              <a:t>n/a — priced per sensor</a:t>
+            </a:r>
+          </a:p>
+        </p:txBody>
+      </p:sp>
+      <p:sp>
+        <p:nvSpPr>
+          <p:cNvPr id="41" name="TextBox 40"/>
           <p:cNvSpPr txBox="1"/>
           <p:nvPr/>
         </p:nvSpPr>
@@ -9686,14 +9641,14 @@
                 </a:solidFill>
                 <a:latin typeface="Georgia"/>
               </a:rPr>
-              <a:t>$748</a:t>
-            </a:r>
-          </a:p>
-        </p:txBody>
-      </p:sp>
-      <p:sp>
-        <p:nvSpPr>
-          <p:cNvPr id="43" name="TextBox 42"/>
+              <a:t>—</a:t>
+            </a:r>
+          </a:p>
+        </p:txBody>
+      </p:sp>
+      <p:sp>
+        <p:nvSpPr>
+          <p:cNvPr id="42" name="TextBox 41"/>
           <p:cNvSpPr txBox="1"/>
           <p:nvPr/>
         </p:nvSpPr>
@@ -9731,7 +9686,52 @@
                 </a:solidFill>
                 <a:latin typeface="Georgia"/>
               </a:rPr>
-              <a:t>$162</a:t>
+              <a:t>$350</a:t>
+            </a:r>
+          </a:p>
+        </p:txBody>
+      </p:sp>
+      <p:sp>
+        <p:nvSpPr>
+          <p:cNvPr id="43" name="TextBox 42"/>
+          <p:cNvSpPr txBox="1"/>
+          <p:nvPr/>
+        </p:nvSpPr>
+        <p:spPr>
+          <a:xfrm>
+            <a:off x="9555480" y="4521708"/>
+            <a:ext cx="2377440" cy="219456"/>
+          </a:xfrm>
+          <a:prstGeom prst="rect">
+            <a:avLst/>
+          </a:prstGeom>
+          <a:noFill/>
+        </p:spPr>
+        <p:txBody>
+          <a:bodyPr wrap="square" anchor="t" lIns="0" rIns="0" tIns="0" bIns="0">
+            <a:spAutoFit/>
+          </a:bodyPr>
+          <a:lstStyle/>
+          <a:p>
+            <a:pPr algn="l">
+              <a:lnSpc>
+                <a:spcPct val="100000"/>
+              </a:lnSpc>
+              <a:spcBef>
+                <a:spcPts val="0"/>
+              </a:spcBef>
+              <a:spcAft>
+                <a:spcPts val="0"/>
+              </a:spcAft>
+            </a:pPr>
+            <a:r>
+              <a:rPr sz="950" b="0">
+                <a:solidFill>
+                  <a:srgbClr val="637782"/>
+                </a:solidFill>
+                <a:latin typeface="Arial"/>
+              </a:rPr>
+              <a:t>one, covers the fleet</a:t>
             </a:r>
           </a:p>
         </p:txBody>
@@ -9744,7 +9744,637 @@
         </p:nvSpPr>
         <p:spPr>
           <a:xfrm>
-            <a:off x="822960" y="4887468"/>
+            <a:off x="822960" y="4796028"/>
+            <a:ext cx="4023360" cy="219456"/>
+          </a:xfrm>
+          <a:prstGeom prst="rect">
+            <a:avLst/>
+          </a:prstGeom>
+          <a:noFill/>
+        </p:spPr>
+        <p:txBody>
+          <a:bodyPr wrap="square" anchor="t" lIns="0" rIns="0" tIns="0" bIns="0">
+            <a:spAutoFit/>
+          </a:bodyPr>
+          <a:lstStyle/>
+          <a:p>
+            <a:pPr algn="l">
+              <a:lnSpc>
+                <a:spcPct val="100000"/>
+              </a:lnSpc>
+              <a:spcBef>
+                <a:spcPts val="0"/>
+              </a:spcBef>
+              <a:spcAft>
+                <a:spcPts val="0"/>
+              </a:spcAft>
+            </a:pPr>
+            <a:r>
+              <a:rPr sz="1200" b="1">
+                <a:solidFill>
+                  <a:srgbClr val="121E25"/>
+                </a:solidFill>
+                <a:latin typeface="Arial"/>
+              </a:rPr>
+              <a:t>On-site server</a:t>
+            </a:r>
+          </a:p>
+        </p:txBody>
+      </p:sp>
+      <p:sp>
+        <p:nvSpPr>
+          <p:cNvPr id="45" name="TextBox 44"/>
+          <p:cNvSpPr txBox="1"/>
+          <p:nvPr/>
+        </p:nvSpPr>
+        <p:spPr>
+          <a:xfrm>
+            <a:off x="3337560" y="4809744"/>
+            <a:ext cx="2560320" cy="219456"/>
+          </a:xfrm>
+          <a:prstGeom prst="rect">
+            <a:avLst/>
+          </a:prstGeom>
+          <a:noFill/>
+        </p:spPr>
+        <p:txBody>
+          <a:bodyPr wrap="square" anchor="t" lIns="0" rIns="0" tIns="0" bIns="0">
+            <a:spAutoFit/>
+          </a:bodyPr>
+          <a:lstStyle/>
+          <a:p>
+            <a:pPr algn="l">
+              <a:lnSpc>
+                <a:spcPct val="100000"/>
+              </a:lnSpc>
+              <a:spcBef>
+                <a:spcPts val="0"/>
+              </a:spcBef>
+              <a:spcAft>
+                <a:spcPts val="0"/>
+              </a:spcAft>
+            </a:pPr>
+            <a:r>
+              <a:rPr sz="950" b="0">
+                <a:solidFill>
+                  <a:srgbClr val="637782"/>
+                </a:solidFill>
+                <a:latin typeface="Arial"/>
+              </a:rPr>
+              <a:t>n/a — vendor cloud</a:t>
+            </a:r>
+          </a:p>
+        </p:txBody>
+      </p:sp>
+      <p:sp>
+        <p:nvSpPr>
+          <p:cNvPr id="46" name="TextBox 45"/>
+          <p:cNvSpPr txBox="1"/>
+          <p:nvPr/>
+        </p:nvSpPr>
+        <p:spPr>
+          <a:xfrm>
+            <a:off x="5943600" y="4786884"/>
+            <a:ext cx="2103120" cy="237744"/>
+          </a:xfrm>
+          <a:prstGeom prst="rect">
+            <a:avLst/>
+          </a:prstGeom>
+          <a:noFill/>
+        </p:spPr>
+        <p:txBody>
+          <a:bodyPr wrap="square" anchor="t" lIns="0" rIns="0" tIns="0" bIns="0">
+            <a:spAutoFit/>
+          </a:bodyPr>
+          <a:lstStyle/>
+          <a:p>
+            <a:pPr algn="l">
+              <a:lnSpc>
+                <a:spcPct val="100000"/>
+              </a:lnSpc>
+              <a:spcBef>
+                <a:spcPts val="0"/>
+              </a:spcBef>
+              <a:spcAft>
+                <a:spcPts val="0"/>
+              </a:spcAft>
+            </a:pPr>
+            <a:r>
+              <a:rPr sz="1300" b="0">
+                <a:solidFill>
+                  <a:srgbClr val="C4622D"/>
+                </a:solidFill>
+                <a:latin typeface="Georgia"/>
+              </a:rPr>
+              <a:t>—</a:t>
+            </a:r>
+          </a:p>
+        </p:txBody>
+      </p:sp>
+      <p:sp>
+        <p:nvSpPr>
+          <p:cNvPr id="47" name="TextBox 46"/>
+          <p:cNvSpPr txBox="1"/>
+          <p:nvPr/>
+        </p:nvSpPr>
+        <p:spPr>
+          <a:xfrm>
+            <a:off x="8503920" y="4786884"/>
+            <a:ext cx="1828800" cy="237744"/>
+          </a:xfrm>
+          <a:prstGeom prst="rect">
+            <a:avLst/>
+          </a:prstGeom>
+          <a:noFill/>
+        </p:spPr>
+        <p:txBody>
+          <a:bodyPr wrap="square" anchor="t" lIns="0" rIns="0" tIns="0" bIns="0">
+            <a:spAutoFit/>
+          </a:bodyPr>
+          <a:lstStyle/>
+          <a:p>
+            <a:pPr algn="l">
+              <a:lnSpc>
+                <a:spcPct val="100000"/>
+              </a:lnSpc>
+              <a:spcBef>
+                <a:spcPts val="0"/>
+              </a:spcBef>
+              <a:spcAft>
+                <a:spcPts val="0"/>
+              </a:spcAft>
+            </a:pPr>
+            <a:r>
+              <a:rPr sz="1300" b="0">
+                <a:solidFill>
+                  <a:srgbClr val="2B8A9E"/>
+                </a:solidFill>
+                <a:latin typeface="Georgia"/>
+              </a:rPr>
+              <a:t>$180</a:t>
+            </a:r>
+          </a:p>
+        </p:txBody>
+      </p:sp>
+      <p:sp>
+        <p:nvSpPr>
+          <p:cNvPr id="48" name="TextBox 47"/>
+          <p:cNvSpPr txBox="1"/>
+          <p:nvPr/>
+        </p:nvSpPr>
+        <p:spPr>
+          <a:xfrm>
+            <a:off x="9555480" y="4809744"/>
+            <a:ext cx="2377440" cy="219456"/>
+          </a:xfrm>
+          <a:prstGeom prst="rect">
+            <a:avLst/>
+          </a:prstGeom>
+          <a:noFill/>
+        </p:spPr>
+        <p:txBody>
+          <a:bodyPr wrap="square" anchor="t" lIns="0" rIns="0" tIns="0" bIns="0">
+            <a:spAutoFit/>
+          </a:bodyPr>
+          <a:lstStyle/>
+          <a:p>
+            <a:pPr algn="l">
+              <a:lnSpc>
+                <a:spcPct val="100000"/>
+              </a:lnSpc>
+              <a:spcBef>
+                <a:spcPts val="0"/>
+              </a:spcBef>
+              <a:spcAft>
+                <a:spcPts val="0"/>
+              </a:spcAft>
+            </a:pPr>
+            <a:r>
+              <a:rPr sz="950" b="0">
+                <a:solidFill>
+                  <a:srgbClr val="637782"/>
+                </a:solidFill>
+                <a:latin typeface="Arial"/>
+              </a:rPr>
+              <a:t>mini PC, runs everything</a:t>
+            </a:r>
+          </a:p>
+        </p:txBody>
+      </p:sp>
+      <p:sp>
+        <p:nvSpPr>
+          <p:cNvPr id="49" name="TextBox 48"/>
+          <p:cNvSpPr txBox="1"/>
+          <p:nvPr/>
+        </p:nvSpPr>
+        <p:spPr>
+          <a:xfrm>
+            <a:off x="822960" y="5084064"/>
+            <a:ext cx="4023360" cy="219456"/>
+          </a:xfrm>
+          <a:prstGeom prst="rect">
+            <a:avLst/>
+          </a:prstGeom>
+          <a:noFill/>
+        </p:spPr>
+        <p:txBody>
+          <a:bodyPr wrap="square" anchor="t" lIns="0" rIns="0" tIns="0" bIns="0">
+            <a:spAutoFit/>
+          </a:bodyPr>
+          <a:lstStyle/>
+          <a:p>
+            <a:pPr algn="l">
+              <a:lnSpc>
+                <a:spcPct val="100000"/>
+              </a:lnSpc>
+              <a:spcBef>
+                <a:spcPts val="0"/>
+              </a:spcBef>
+              <a:spcAft>
+                <a:spcPts val="0"/>
+              </a:spcAft>
+            </a:pPr>
+            <a:r>
+              <a:rPr sz="1200" b="1">
+                <a:solidFill>
+                  <a:srgbClr val="121E25"/>
+                </a:solidFill>
+                <a:latin typeface="Arial"/>
+              </a:rPr>
+              <a:t>Duty, tariff, freight</a:t>
+            </a:r>
+          </a:p>
+        </p:txBody>
+      </p:sp>
+      <p:sp>
+        <p:nvSpPr>
+          <p:cNvPr id="50" name="TextBox 49"/>
+          <p:cNvSpPr txBox="1"/>
+          <p:nvPr/>
+        </p:nvSpPr>
+        <p:spPr>
+          <a:xfrm>
+            <a:off x="3337560" y="5097780"/>
+            <a:ext cx="2560320" cy="219456"/>
+          </a:xfrm>
+          <a:prstGeom prst="rect">
+            <a:avLst/>
+          </a:prstGeom>
+          <a:noFill/>
+        </p:spPr>
+        <p:txBody>
+          <a:bodyPr wrap="square" anchor="t" lIns="0" rIns="0" tIns="0" bIns="0">
+            <a:spAutoFit/>
+          </a:bodyPr>
+          <a:lstStyle/>
+          <a:p>
+            <a:pPr algn="l">
+              <a:lnSpc>
+                <a:spcPct val="100000"/>
+              </a:lnSpc>
+              <a:spcBef>
+                <a:spcPts val="0"/>
+              </a:spcBef>
+              <a:spcAft>
+                <a:spcPts val="0"/>
+              </a:spcAft>
+            </a:pPr>
+            <a:r>
+              <a:rPr sz="950" b="0">
+                <a:solidFill>
+                  <a:srgbClr val="637782"/>
+                </a:solidFill>
+                <a:latin typeface="Arial"/>
+              </a:rPr>
+              <a:t>imported</a:t>
+            </a:r>
+          </a:p>
+        </p:txBody>
+      </p:sp>
+      <p:sp>
+        <p:nvSpPr>
+          <p:cNvPr id="51" name="TextBox 50"/>
+          <p:cNvSpPr txBox="1"/>
+          <p:nvPr/>
+        </p:nvSpPr>
+        <p:spPr>
+          <a:xfrm>
+            <a:off x="5943600" y="5074920"/>
+            <a:ext cx="2103120" cy="237744"/>
+          </a:xfrm>
+          <a:prstGeom prst="rect">
+            <a:avLst/>
+          </a:prstGeom>
+          <a:noFill/>
+        </p:spPr>
+        <p:txBody>
+          <a:bodyPr wrap="square" anchor="t" lIns="0" rIns="0" tIns="0" bIns="0">
+            <a:spAutoFit/>
+          </a:bodyPr>
+          <a:lstStyle/>
+          <a:p>
+            <a:pPr algn="l">
+              <a:lnSpc>
+                <a:spcPct val="100000"/>
+              </a:lnSpc>
+              <a:spcBef>
+                <a:spcPts val="0"/>
+              </a:spcBef>
+              <a:spcAft>
+                <a:spcPts val="0"/>
+              </a:spcAft>
+            </a:pPr>
+            <a:r>
+              <a:rPr sz="1300" b="0">
+                <a:solidFill>
+                  <a:srgbClr val="C4622D"/>
+                </a:solidFill>
+                <a:latin typeface="Georgia"/>
+              </a:rPr>
+              <a:t>$407</a:t>
+            </a:r>
+          </a:p>
+        </p:txBody>
+      </p:sp>
+      <p:sp>
+        <p:nvSpPr>
+          <p:cNvPr id="52" name="TextBox 51"/>
+          <p:cNvSpPr txBox="1"/>
+          <p:nvPr/>
+        </p:nvSpPr>
+        <p:spPr>
+          <a:xfrm>
+            <a:off x="8503920" y="5074920"/>
+            <a:ext cx="1828800" cy="237744"/>
+          </a:xfrm>
+          <a:prstGeom prst="rect">
+            <a:avLst/>
+          </a:prstGeom>
+          <a:noFill/>
+        </p:spPr>
+        <p:txBody>
+          <a:bodyPr wrap="square" anchor="t" lIns="0" rIns="0" tIns="0" bIns="0">
+            <a:spAutoFit/>
+          </a:bodyPr>
+          <a:lstStyle/>
+          <a:p>
+            <a:pPr algn="l">
+              <a:lnSpc>
+                <a:spcPct val="100000"/>
+              </a:lnSpc>
+              <a:spcBef>
+                <a:spcPts val="0"/>
+              </a:spcBef>
+              <a:spcAft>
+                <a:spcPts val="0"/>
+              </a:spcAft>
+            </a:pPr>
+            <a:r>
+              <a:rPr sz="1300" b="0">
+                <a:solidFill>
+                  <a:srgbClr val="2B8A9E"/>
+                </a:solidFill>
+                <a:latin typeface="Georgia"/>
+              </a:rPr>
+              <a:t>$0</a:t>
+            </a:r>
+          </a:p>
+        </p:txBody>
+      </p:sp>
+      <p:sp>
+        <p:nvSpPr>
+          <p:cNvPr id="53" name="TextBox 52"/>
+          <p:cNvSpPr txBox="1"/>
+          <p:nvPr/>
+        </p:nvSpPr>
+        <p:spPr>
+          <a:xfrm>
+            <a:off x="9555480" y="5097780"/>
+            <a:ext cx="2377440" cy="219456"/>
+          </a:xfrm>
+          <a:prstGeom prst="rect">
+            <a:avLst/>
+          </a:prstGeom>
+          <a:noFill/>
+        </p:spPr>
+        <p:txBody>
+          <a:bodyPr wrap="square" anchor="t" lIns="0" rIns="0" tIns="0" bIns="0">
+            <a:spAutoFit/>
+          </a:bodyPr>
+          <a:lstStyle/>
+          <a:p>
+            <a:pPr algn="l">
+              <a:lnSpc>
+                <a:spcPct val="100000"/>
+              </a:lnSpc>
+              <a:spcBef>
+                <a:spcPts val="0"/>
+              </a:spcBef>
+              <a:spcAft>
+                <a:spcPts val="0"/>
+              </a:spcAft>
+            </a:pPr>
+            <a:r>
+              <a:rPr sz="950" b="0">
+                <a:solidFill>
+                  <a:srgbClr val="637782"/>
+                </a:solidFill>
+                <a:latin typeface="Arial"/>
+              </a:rPr>
+              <a:t>sourced domestically</a:t>
+            </a:r>
+          </a:p>
+        </p:txBody>
+      </p:sp>
+      <p:sp>
+        <p:nvSpPr>
+          <p:cNvPr id="54" name="TextBox 53"/>
+          <p:cNvSpPr txBox="1"/>
+          <p:nvPr/>
+        </p:nvSpPr>
+        <p:spPr>
+          <a:xfrm>
+            <a:off x="822960" y="5372100"/>
+            <a:ext cx="4023360" cy="219456"/>
+          </a:xfrm>
+          <a:prstGeom prst="rect">
+            <a:avLst/>
+          </a:prstGeom>
+          <a:noFill/>
+        </p:spPr>
+        <p:txBody>
+          <a:bodyPr wrap="square" anchor="t" lIns="0" rIns="0" tIns="0" bIns="0">
+            <a:spAutoFit/>
+          </a:bodyPr>
+          <a:lstStyle/>
+          <a:p>
+            <a:pPr algn="l">
+              <a:lnSpc>
+                <a:spcPct val="100000"/>
+              </a:lnSpc>
+              <a:spcBef>
+                <a:spcPts val="0"/>
+              </a:spcBef>
+              <a:spcAft>
+                <a:spcPts val="0"/>
+              </a:spcAft>
+            </a:pPr>
+            <a:r>
+              <a:rPr sz="1200" b="1">
+                <a:solidFill>
+                  <a:srgbClr val="121E25"/>
+                </a:solidFill>
+                <a:latin typeface="Arial"/>
+              </a:rPr>
+              <a:t>Sales tax</a:t>
+            </a:r>
+          </a:p>
+        </p:txBody>
+      </p:sp>
+      <p:sp>
+        <p:nvSpPr>
+          <p:cNvPr id="55" name="TextBox 54"/>
+          <p:cNvSpPr txBox="1"/>
+          <p:nvPr/>
+        </p:nvSpPr>
+        <p:spPr>
+          <a:xfrm>
+            <a:off x="3337560" y="5385816"/>
+            <a:ext cx="2560320" cy="219456"/>
+          </a:xfrm>
+          <a:prstGeom prst="rect">
+            <a:avLst/>
+          </a:prstGeom>
+          <a:noFill/>
+        </p:spPr>
+        <p:txBody>
+          <a:bodyPr wrap="square" anchor="t" lIns="0" rIns="0" tIns="0" bIns="0">
+            <a:spAutoFit/>
+          </a:bodyPr>
+          <a:lstStyle/>
+          <a:p>
+            <a:pPr algn="l">
+              <a:lnSpc>
+                <a:spcPct val="100000"/>
+              </a:lnSpc>
+              <a:spcBef>
+                <a:spcPts val="0"/>
+              </a:spcBef>
+              <a:spcAft>
+                <a:spcPts val="0"/>
+              </a:spcAft>
+            </a:pPr>
+            <a:r>
+              <a:rPr sz="950" b="0">
+                <a:solidFill>
+                  <a:srgbClr val="637782"/>
+                </a:solidFill>
+                <a:latin typeface="Arial"/>
+              </a:rPr>
+              <a:t>10.5%</a:t>
+            </a:r>
+          </a:p>
+        </p:txBody>
+      </p:sp>
+      <p:sp>
+        <p:nvSpPr>
+          <p:cNvPr id="56" name="TextBox 55"/>
+          <p:cNvSpPr txBox="1"/>
+          <p:nvPr/>
+        </p:nvSpPr>
+        <p:spPr>
+          <a:xfrm>
+            <a:off x="5943600" y="5362956"/>
+            <a:ext cx="2103120" cy="237744"/>
+          </a:xfrm>
+          <a:prstGeom prst="rect">
+            <a:avLst/>
+          </a:prstGeom>
+          <a:noFill/>
+        </p:spPr>
+        <p:txBody>
+          <a:bodyPr wrap="square" anchor="t" lIns="0" rIns="0" tIns="0" bIns="0">
+            <a:spAutoFit/>
+          </a:bodyPr>
+          <a:lstStyle/>
+          <a:p>
+            <a:pPr algn="l">
+              <a:lnSpc>
+                <a:spcPct val="100000"/>
+              </a:lnSpc>
+              <a:spcBef>
+                <a:spcPts val="0"/>
+              </a:spcBef>
+              <a:spcAft>
+                <a:spcPts val="0"/>
+              </a:spcAft>
+            </a:pPr>
+            <a:r>
+              <a:rPr sz="1300" b="0">
+                <a:solidFill>
+                  <a:srgbClr val="C4622D"/>
+                </a:solidFill>
+                <a:latin typeface="Georgia"/>
+              </a:rPr>
+              <a:t>$748</a:t>
+            </a:r>
+          </a:p>
+        </p:txBody>
+      </p:sp>
+      <p:sp>
+        <p:nvSpPr>
+          <p:cNvPr id="57" name="TextBox 56"/>
+          <p:cNvSpPr txBox="1"/>
+          <p:nvPr/>
+        </p:nvSpPr>
+        <p:spPr>
+          <a:xfrm>
+            <a:off x="8503920" y="5362956"/>
+            <a:ext cx="1828800" cy="237744"/>
+          </a:xfrm>
+          <a:prstGeom prst="rect">
+            <a:avLst/>
+          </a:prstGeom>
+          <a:noFill/>
+        </p:spPr>
+        <p:txBody>
+          <a:bodyPr wrap="square" anchor="t" lIns="0" rIns="0" tIns="0" bIns="0">
+            <a:spAutoFit/>
+          </a:bodyPr>
+          <a:lstStyle/>
+          <a:p>
+            <a:pPr algn="l">
+              <a:lnSpc>
+                <a:spcPct val="100000"/>
+              </a:lnSpc>
+              <a:spcBef>
+                <a:spcPts val="0"/>
+              </a:spcBef>
+              <a:spcAft>
+                <a:spcPts val="0"/>
+              </a:spcAft>
+            </a:pPr>
+            <a:r>
+              <a:rPr sz="1300" b="0">
+                <a:solidFill>
+                  <a:srgbClr val="2B8A9E"/>
+                </a:solidFill>
+                <a:latin typeface="Georgia"/>
+              </a:rPr>
+              <a:t>$111</a:t>
+            </a:r>
+          </a:p>
+        </p:txBody>
+      </p:sp>
+      <p:sp>
+        <p:nvSpPr>
+          <p:cNvPr id="58" name="TextBox 57"/>
+          <p:cNvSpPr txBox="1"/>
+          <p:nvPr/>
+        </p:nvSpPr>
+        <p:spPr>
+          <a:xfrm>
+            <a:off x="822960" y="5751576"/>
             <a:ext cx="4754880" cy="219456"/>
           </a:xfrm>
           <a:prstGeom prst="rect">
@@ -9783,13 +10413,13 @@
       </p:sp>
       <p:sp>
         <p:nvSpPr>
-          <p:cNvPr id="45" name="TextBox 44"/>
-          <p:cNvSpPr txBox="1"/>
-          <p:nvPr/>
-        </p:nvSpPr>
-        <p:spPr>
-          <a:xfrm>
-            <a:off x="822960" y="5125212"/>
+          <p:cNvPr id="59" name="TextBox 58"/>
+          <p:cNvSpPr txBox="1"/>
+          <p:nvPr/>
+        </p:nvSpPr>
+        <p:spPr>
+          <a:xfrm>
+            <a:off x="822960" y="5989320"/>
             <a:ext cx="4023360" cy="219456"/>
           </a:xfrm>
           <a:prstGeom prst="rect">
@@ -9828,13 +10458,13 @@
       </p:sp>
       <p:sp>
         <p:nvSpPr>
-          <p:cNvPr id="46" name="TextBox 45"/>
-          <p:cNvSpPr txBox="1"/>
-          <p:nvPr/>
-        </p:nvSpPr>
-        <p:spPr>
-          <a:xfrm>
-            <a:off x="3337560" y="5138928"/>
+          <p:cNvPr id="60" name="TextBox 59"/>
+          <p:cNvSpPr txBox="1"/>
+          <p:nvPr/>
+        </p:nvSpPr>
+        <p:spPr>
+          <a:xfrm>
+            <a:off x="3337560" y="6003036"/>
             <a:ext cx="2560320" cy="219456"/>
           </a:xfrm>
           <a:prstGeom prst="rect">
@@ -9873,13 +10503,13 @@
       </p:sp>
       <p:sp>
         <p:nvSpPr>
-          <p:cNvPr id="47" name="TextBox 46"/>
-          <p:cNvSpPr txBox="1"/>
-          <p:nvPr/>
-        </p:nvSpPr>
-        <p:spPr>
-          <a:xfrm>
-            <a:off x="5943600" y="5116068"/>
+          <p:cNvPr id="61" name="TextBox 60"/>
+          <p:cNvSpPr txBox="1"/>
+          <p:nvPr/>
+        </p:nvSpPr>
+        <p:spPr>
+          <a:xfrm>
+            <a:off x="5943600" y="5980176"/>
             <a:ext cx="2103120" cy="237744"/>
           </a:xfrm>
           <a:prstGeom prst="rect">
@@ -9918,13 +10548,13 @@
       </p:sp>
       <p:sp>
         <p:nvSpPr>
-          <p:cNvPr id="48" name="TextBox 47"/>
-          <p:cNvSpPr txBox="1"/>
-          <p:nvPr/>
-        </p:nvSpPr>
-        <p:spPr>
-          <a:xfrm>
-            <a:off x="8503920" y="5116068"/>
+          <p:cNvPr id="62" name="TextBox 61"/>
+          <p:cNvSpPr txBox="1"/>
+          <p:nvPr/>
+        </p:nvSpPr>
+        <p:spPr>
+          <a:xfrm>
+            <a:off x="8503920" y="5980176"/>
             <a:ext cx="1828800" cy="237744"/>
           </a:xfrm>
           <a:prstGeom prst="rect">
@@ -9963,13 +10593,13 @@
       </p:sp>
       <p:sp>
         <p:nvSpPr>
-          <p:cNvPr id="49" name="TextBox 48"/>
-          <p:cNvSpPr txBox="1"/>
-          <p:nvPr/>
-        </p:nvSpPr>
-        <p:spPr>
-          <a:xfrm>
-            <a:off x="822960" y="5413248"/>
+          <p:cNvPr id="63" name="TextBox 62"/>
+          <p:cNvSpPr txBox="1"/>
+          <p:nvPr/>
+        </p:nvSpPr>
+        <p:spPr>
+          <a:xfrm>
+            <a:off x="822960" y="6277356"/>
             <a:ext cx="4023360" cy="219456"/>
           </a:xfrm>
           <a:prstGeom prst="rect">
@@ -10008,13 +10638,13 @@
       </p:sp>
       <p:sp>
         <p:nvSpPr>
-          <p:cNvPr id="50" name="TextBox 49"/>
-          <p:cNvSpPr txBox="1"/>
-          <p:nvPr/>
-        </p:nvSpPr>
-        <p:spPr>
-          <a:xfrm>
-            <a:off x="3337560" y="5426964"/>
+          <p:cNvPr id="64" name="TextBox 63"/>
+          <p:cNvSpPr txBox="1"/>
+          <p:nvPr/>
+        </p:nvSpPr>
+        <p:spPr>
+          <a:xfrm>
+            <a:off x="3337560" y="6291072"/>
             <a:ext cx="2560320" cy="219456"/>
           </a:xfrm>
           <a:prstGeom prst="rect">
@@ -10053,13 +10683,13 @@
       </p:sp>
       <p:sp>
         <p:nvSpPr>
-          <p:cNvPr id="51" name="TextBox 50"/>
-          <p:cNvSpPr txBox="1"/>
-          <p:nvPr/>
-        </p:nvSpPr>
-        <p:spPr>
-          <a:xfrm>
-            <a:off x="5943600" y="5404104"/>
+          <p:cNvPr id="65" name="TextBox 64"/>
+          <p:cNvSpPr txBox="1"/>
+          <p:nvPr/>
+        </p:nvSpPr>
+        <p:spPr>
+          <a:xfrm>
+            <a:off x="5943600" y="6268212"/>
             <a:ext cx="2103120" cy="237744"/>
           </a:xfrm>
           <a:prstGeom prst="rect">
@@ -10098,13 +10728,13 @@
       </p:sp>
       <p:sp>
         <p:nvSpPr>
-          <p:cNvPr id="52" name="TextBox 51"/>
-          <p:cNvSpPr txBox="1"/>
-          <p:nvPr/>
-        </p:nvSpPr>
-        <p:spPr>
-          <a:xfrm>
-            <a:off x="8503920" y="5404104"/>
+          <p:cNvPr id="66" name="TextBox 65"/>
+          <p:cNvSpPr txBox="1"/>
+          <p:nvPr/>
+        </p:nvSpPr>
+        <p:spPr>
+          <a:xfrm>
+            <a:off x="8503920" y="6268212"/>
             <a:ext cx="1828800" cy="237744"/>
           </a:xfrm>
           <a:prstGeom prst="rect">
@@ -10136,20 +10766,20 @@
                 </a:solidFill>
                 <a:latin typeface="Georgia"/>
               </a:rPr>
-              <a:t>$144</a:t>
-            </a:r>
-          </a:p>
-        </p:txBody>
-      </p:sp>
-      <p:sp>
-        <p:nvSpPr>
-          <p:cNvPr id="53" name="TextBox 52"/>
-          <p:cNvSpPr txBox="1"/>
-          <p:nvPr/>
-        </p:nvSpPr>
-        <p:spPr>
-          <a:xfrm>
-            <a:off x="9555480" y="5426964"/>
+              <a:t>$12</a:t>
+            </a:r>
+          </a:p>
+        </p:txBody>
+      </p:sp>
+      <p:sp>
+        <p:nvSpPr>
+          <p:cNvPr id="67" name="TextBox 66"/>
+          <p:cNvSpPr txBox="1"/>
+          <p:nvPr/>
+        </p:nvSpPr>
+        <p:spPr>
+          <a:xfrm>
+            <a:off x="9555480" y="6291072"/>
             <a:ext cx="2377440" cy="219456"/>
           </a:xfrm>
           <a:prstGeom prst="rect">
@@ -10181,20 +10811,20 @@
                 </a:solidFill>
                 <a:latin typeface="Arial"/>
               </a:rPr>
-              <a:t>$12/mo, every site</a:t>
-            </a:r>
-          </a:p>
-        </p:txBody>
-      </p:sp>
-      <p:sp>
-        <p:nvSpPr>
-          <p:cNvPr id="54" name="TextBox 53"/>
-          <p:cNvSpPr txBox="1"/>
-          <p:nvPr/>
-        </p:nvSpPr>
-        <p:spPr>
-          <a:xfrm>
-            <a:off x="822960" y="5792724"/>
+              <a:t>electricity, self-hosted</a:t>
+            </a:r>
+          </a:p>
+        </p:txBody>
+      </p:sp>
+      <p:sp>
+        <p:nvSpPr>
+          <p:cNvPr id="68" name="TextBox 67"/>
+          <p:cNvSpPr txBox="1"/>
+          <p:nvPr/>
+        </p:nvSpPr>
+        <p:spPr>
+          <a:xfrm>
+            <a:off x="822960" y="6656832"/>
             <a:ext cx="4754880" cy="219456"/>
           </a:xfrm>
           <a:prstGeom prst="rect">
@@ -10233,13 +10863,13 @@
       </p:sp>
       <p:sp>
         <p:nvSpPr>
-          <p:cNvPr id="55" name="TextBox 54"/>
-          <p:cNvSpPr txBox="1"/>
-          <p:nvPr/>
-        </p:nvSpPr>
-        <p:spPr>
-          <a:xfrm>
-            <a:off x="822960" y="6030468"/>
+          <p:cNvPr id="69" name="TextBox 68"/>
+          <p:cNvSpPr txBox="1"/>
+          <p:nvPr/>
+        </p:nvSpPr>
+        <p:spPr>
+          <a:xfrm>
+            <a:off x="822960" y="6894576"/>
             <a:ext cx="4023360" cy="219456"/>
           </a:xfrm>
           <a:prstGeom prst="rect">
@@ -10271,20 +10901,20 @@
                 </a:solidFill>
                 <a:latin typeface="Arial"/>
               </a:rPr>
-              <a:t>NIST recertification</a:t>
-            </a:r>
-          </a:p>
-        </p:txBody>
-      </p:sp>
-      <p:sp>
-        <p:nvSpPr>
-          <p:cNvPr id="56" name="TextBox 55"/>
-          <p:cNvSpPr txBox="1"/>
-          <p:nvPr/>
-        </p:nvSpPr>
-        <p:spPr>
-          <a:xfrm>
-            <a:off x="3337560" y="6044184"/>
+              <a:t>Recertification</a:t>
+            </a:r>
+          </a:p>
+        </p:txBody>
+      </p:sp>
+      <p:sp>
+        <p:nvSpPr>
+          <p:cNvPr id="70" name="TextBox 69"/>
+          <p:cNvSpPr txBox="1"/>
+          <p:nvPr/>
+        </p:nvSpPr>
+        <p:spPr>
+          <a:xfrm>
+            <a:off x="3337560" y="6908292"/>
             <a:ext cx="2560320" cy="219456"/>
           </a:xfrm>
           <a:prstGeom prst="rect">
@@ -10323,13 +10953,13 @@
       </p:sp>
       <p:sp>
         <p:nvSpPr>
-          <p:cNvPr id="57" name="TextBox 56"/>
-          <p:cNvSpPr txBox="1"/>
-          <p:nvPr/>
-        </p:nvSpPr>
-        <p:spPr>
-          <a:xfrm>
-            <a:off x="5943600" y="6021324"/>
+          <p:cNvPr id="71" name="TextBox 70"/>
+          <p:cNvSpPr txBox="1"/>
+          <p:nvPr/>
+        </p:nvSpPr>
+        <p:spPr>
+          <a:xfrm>
+            <a:off x="5943600" y="6885432"/>
             <a:ext cx="2103120" cy="237744"/>
           </a:xfrm>
           <a:prstGeom prst="rect">
@@ -10368,13 +10998,13 @@
       </p:sp>
       <p:sp>
         <p:nvSpPr>
-          <p:cNvPr id="58" name="TextBox 57"/>
-          <p:cNvSpPr txBox="1"/>
-          <p:nvPr/>
-        </p:nvSpPr>
-        <p:spPr>
-          <a:xfrm>
-            <a:off x="8503920" y="6021324"/>
+          <p:cNvPr id="72" name="TextBox 71"/>
+          <p:cNvSpPr txBox="1"/>
+          <p:nvPr/>
+        </p:nvSpPr>
+        <p:spPr>
+          <a:xfrm>
+            <a:off x="8503920" y="6885432"/>
             <a:ext cx="1828800" cy="237744"/>
           </a:xfrm>
           <a:prstGeom prst="rect">
@@ -10413,13 +11043,13 @@
       </p:sp>
       <p:sp>
         <p:nvSpPr>
-          <p:cNvPr id="59" name="TextBox 58"/>
-          <p:cNvSpPr txBox="1"/>
-          <p:nvPr/>
-        </p:nvSpPr>
-        <p:spPr>
-          <a:xfrm>
-            <a:off x="9555480" y="6044184"/>
+          <p:cNvPr id="73" name="TextBox 72"/>
+          <p:cNvSpPr txBox="1"/>
+          <p:nvPr/>
+        </p:nvSpPr>
+        <p:spPr>
+          <a:xfrm>
+            <a:off x="9555480" y="6908292"/>
             <a:ext cx="2377440" cy="219456"/>
           </a:xfrm>
           <a:prstGeom prst="rect">
@@ -10451,20 +11081,20 @@
                 </a:solidFill>
                 <a:latin typeface="Arial"/>
               </a:rPr>
-              <a:t>recalibrate in-house</a:t>
-            </a:r>
-          </a:p>
-        </p:txBody>
-      </p:sp>
-      <p:sp>
-        <p:nvSpPr>
-          <p:cNvPr id="60" name="Rectangle 59"/>
+              <a:t>reference only, in-house</a:t>
+            </a:r>
+          </a:p>
+        </p:txBody>
+      </p:sp>
+      <p:sp>
+        <p:nvSpPr>
+          <p:cNvPr id="74" name="Rectangle 73"/>
           <p:cNvSpPr/>
           <p:nvPr/>
         </p:nvSpPr>
         <p:spPr>
           <a:xfrm>
-            <a:off x="822960" y="6428232"/>
+            <a:off x="822960" y="7292340"/>
             <a:ext cx="10545775" cy="18288"/>
           </a:xfrm>
           <a:prstGeom prst="rect">
@@ -10502,13 +11132,13 @@
       </p:sp>
       <p:sp>
         <p:nvSpPr>
-          <p:cNvPr id="61" name="TextBox 60"/>
-          <p:cNvSpPr txBox="1"/>
-          <p:nvPr/>
-        </p:nvSpPr>
-        <p:spPr>
-          <a:xfrm>
-            <a:off x="822960" y="6556248"/>
+          <p:cNvPr id="75" name="TextBox 74"/>
+          <p:cNvSpPr txBox="1"/>
+          <p:nvPr/>
+        </p:nvSpPr>
+        <p:spPr>
+          <a:xfrm>
+            <a:off x="822960" y="7420356"/>
             <a:ext cx="2377440" cy="292608"/>
           </a:xfrm>
           <a:prstGeom prst="rect">
@@ -10547,13 +11177,13 @@
       </p:sp>
       <p:sp>
         <p:nvSpPr>
-          <p:cNvPr id="62" name="TextBox 61"/>
-          <p:cNvSpPr txBox="1"/>
-          <p:nvPr/>
-        </p:nvSpPr>
-        <p:spPr>
-          <a:xfrm>
-            <a:off x="5943600" y="6519672"/>
+          <p:cNvPr id="76" name="TextBox 75"/>
+          <p:cNvSpPr txBox="1"/>
+          <p:nvPr/>
+        </p:nvSpPr>
+        <p:spPr>
+          <a:xfrm>
+            <a:off x="5943600" y="7383780"/>
             <a:ext cx="2194560" cy="329184"/>
           </a:xfrm>
           <a:prstGeom prst="rect">
@@ -10592,13 +11222,13 @@
       </p:sp>
       <p:sp>
         <p:nvSpPr>
-          <p:cNvPr id="63" name="TextBox 62"/>
-          <p:cNvSpPr txBox="1"/>
-          <p:nvPr/>
-        </p:nvSpPr>
-        <p:spPr>
-          <a:xfrm>
-            <a:off x="8503920" y="6519672"/>
+          <p:cNvPr id="77" name="TextBox 76"/>
+          <p:cNvSpPr txBox="1"/>
+          <p:nvPr/>
+        </p:nvSpPr>
+        <p:spPr>
+          <a:xfrm>
+            <a:off x="8503920" y="7383780"/>
             <a:ext cx="2194560" cy="329184"/>
           </a:xfrm>
           <a:prstGeom prst="rect">
@@ -10630,20 +11260,20 @@
                 </a:solidFill>
                 <a:latin typeface="Georgia"/>
               </a:rPr>
-              <a:t>$1,856</a:t>
-            </a:r>
-          </a:p>
-        </p:txBody>
-      </p:sp>
-      <p:sp>
-        <p:nvSpPr>
-          <p:cNvPr id="64" name="TextBox 63"/>
-          <p:cNvSpPr txBox="1"/>
-          <p:nvPr/>
-        </p:nvSpPr>
-        <p:spPr>
-          <a:xfrm>
-            <a:off x="9966960" y="6592824"/>
+              <a:t>$1,178</a:t>
+            </a:r>
+          </a:p>
+        </p:txBody>
+      </p:sp>
+      <p:sp>
+        <p:nvSpPr>
+          <p:cNvPr id="78" name="TextBox 77"/>
+          <p:cNvSpPr txBox="1"/>
+          <p:nvPr/>
+        </p:nvSpPr>
+        <p:spPr>
+          <a:xfrm>
+            <a:off x="9966960" y="7456932"/>
             <a:ext cx="2194560" cy="274320"/>
           </a:xfrm>
           <a:prstGeom prst="rect">
@@ -10675,14 +11305,14 @@
                 </a:solidFill>
                 <a:latin typeface="Arial"/>
               </a:rPr>
-              <a:t>80% lower</a:t>
-            </a:r>
-          </a:p>
-        </p:txBody>
-      </p:sp>
-      <p:sp>
-        <p:nvSpPr>
-          <p:cNvPr id="65" name="TextBox 64"/>
+              <a:t>87% lower</a:t>
+            </a:r>
+          </a:p>
+        </p:txBody>
+      </p:sp>
+      <p:sp>
+        <p:nvSpPr>
+          <p:cNvPr id="79" name="TextBox 78"/>
           <p:cNvSpPr txBox="1"/>
           <p:nvPr/>
         </p:nvSpPr>
@@ -11140,7 +11770,7 @@
         <p:spPr>
           <a:xfrm>
             <a:off x="822960" y="4434840"/>
-            <a:ext cx="1082367089568" cy="713232"/>
+            <a:ext cx="577612971463" cy="713232"/>
           </a:xfrm>
           <a:prstGeom prst="rect">
             <a:avLst/>
@@ -11215,7 +11845,7 @@
                 </a:solidFill>
                 <a:latin typeface="Georgia"/>
               </a:rPr>
-              <a:t>$2,882</a:t>
+              <a:t>$1,538</a:t>
             </a:r>
           </a:p>
         </p:txBody>
@@ -11260,7 +11890,7 @@
                 </a:solidFill>
                 <a:latin typeface="Arial"/>
               </a:rPr>
-              <a:t>$1,712 hardware and setup   +   $450 recalibration   +   $720 hosting</a:t>
+              <a:t>$1,178 hardware and setup   +   $300 recalibration   +   $60 electricity</a:t>
             </a:r>
           </a:p>
         </p:txBody>
@@ -11349,7 +11979,7 @@
                 </a:solidFill>
                 <a:latin typeface="Georgia"/>
               </a:rPr>
-              <a:t>$15,374</a:t>
+              <a:t>$16,718</a:t>
             </a:r>
           </a:p>
           <a:p>
@@ -11417,7 +12047,7 @@
                 </a:solidFill>
                 <a:latin typeface="Georgia"/>
               </a:rPr>
-              <a:t>87%</a:t>
+              <a:t>92%</a:t>
             </a:r>
           </a:p>
           <a:p>
